--- a/exports/pptx/lessons/middle-module-13-indic-ecology/day-02-five-elements-revisited.pptx
+++ b/exports/pptx/lessons/middle-module-13-indic-ecology/day-02-five-elements-revisited.pptx
@@ -4943,7 +4943,297 @@
         </p:nvSpPr>
         <p:spPr>
           <a:xfrm>
-            <a:off x="634901" y="2958554"/>
+            <a:off x="406301" y="1254323"/>
+            <a:ext cx="8498026" cy="213271"/>
+          </a:xfrm>
+          <a:prstGeom prst="rect">
+            <a:avLst/>
+          </a:prstGeom>
+          <a:noFill/>
+          <a:ln/>
+        </p:spPr>
+        <p:txBody>
+          <a:bodyPr wrap="square" lIns="0" tIns="0" rIns="0" bIns="0" rtlCol="0" anchor="t"/>
+          <a:lstStyle/>
+          <a:p>
+            <a:pPr algn="l" indent="0" marL="0">
+              <a:lnSpc>
+                <a:spcPts val="1680"/>
+              </a:lnSpc>
+              <a:spcBef>
+                <a:spcPts val="300"/>
+              </a:spcBef>
+              <a:spcAft>
+                <a:spcPts val="300"/>
+              </a:spcAft>
+              <a:buNone/>
+            </a:pPr>
+            <a:r>
+              <a:rPr lang="en-US" sz="1200" i="1" dirty="0">
+                <a:solidFill>
+                  <a:srgbClr val="1C2833"/>
+                </a:solidFill>
+                <a:latin typeface="Arial" pitchFamily="34" charset="0"/>
+                <a:ea typeface="Arial" pitchFamily="34" charset="-122"/>
+                <a:cs typeface="Arial" pitchFamily="34" charset="-120"/>
+              </a:rPr>
+              <a:t>Each row: Element · English · One thing it does for us · One way we pollute it.</a:t>
+            </a:r>
+            <a:endParaRPr lang="en-US" sz="1200" dirty="0"/>
+          </a:p>
+        </p:txBody>
+      </p:sp>
+      <p:sp>
+        <p:nvSpPr>
+          <p:cNvPr id="6" name="Text 4"/>
+          <p:cNvSpPr/>
+          <p:nvPr/>
+        </p:nvSpPr>
+        <p:spPr>
+          <a:xfrm>
+            <a:off x="634901" y="1556445"/>
+            <a:ext cx="8102798" cy="1257002"/>
+          </a:xfrm>
+          <a:prstGeom prst="rect">
+            <a:avLst/>
+          </a:prstGeom>
+          <a:noFill/>
+          <a:ln/>
+        </p:spPr>
+        <p:txBody>
+          <a:bodyPr wrap="square" lIns="0" tIns="0" rIns="0" bIns="0" rtlCol="0" anchor="t"/>
+          <a:lstStyle/>
+          <a:p>
+            <a:pPr algn="l" marL="342900" indent="-342900">
+              <a:lnSpc>
+                <a:spcPts val="1620"/>
+              </a:lnSpc>
+              <a:spcAft>
+                <a:spcPts val="300"/>
+              </a:spcAft>
+              <a:buSzPct val="100000"/>
+              <a:buChar char="•"/>
+            </a:pPr>
+            <a:r>
+              <a:rPr lang="en-US" sz="1200" i="1" dirty="0">
+                <a:solidFill>
+                  <a:srgbClr val="1C2833"/>
+                </a:solidFill>
+                <a:latin typeface="Arial" pitchFamily="34" charset="0"/>
+                <a:ea typeface="Arial" pitchFamily="34" charset="-122"/>
+                <a:cs typeface="Arial" pitchFamily="34" charset="-120"/>
+              </a:rPr>
+              <a:t>pṛthvī</a:t>
+            </a:r>
+            <a:pPr algn="l" indent="0" marL="0">
+              <a:lnSpc>
+                <a:spcPts val="1620"/>
+              </a:lnSpc>
+              <a:spcAft>
+                <a:spcPts val="300"/>
+              </a:spcAft>
+              <a:buNone/>
+            </a:pPr>
+            <a:r>
+              <a:rPr lang="en-US" sz="1200" dirty="0">
+                <a:solidFill>
+                  <a:srgbClr val="1C2833"/>
+                </a:solidFill>
+                <a:latin typeface="Arial" pitchFamily="34" charset="0"/>
+                <a:ea typeface="Arial" pitchFamily="34" charset="-122"/>
+                <a:cs typeface="Arial" pitchFamily="34" charset="-120"/>
+              </a:rPr>
+              <a:t> — earth / solid · Soil for food, ground to stand on · Plastic waste, chemical fertiliser</a:t>
+            </a:r>
+            <a:endParaRPr lang="en-US" sz="1200" dirty="0"/>
+          </a:p>
+          <a:p>
+            <a:pPr algn="l" marL="342900" indent="-342900">
+              <a:lnSpc>
+                <a:spcPts val="1620"/>
+              </a:lnSpc>
+              <a:spcAft>
+                <a:spcPts val="300"/>
+              </a:spcAft>
+              <a:buSzPct val="100000"/>
+              <a:buChar char="•"/>
+            </a:pPr>
+            <a:r>
+              <a:rPr lang="en-US" sz="1200" i="1" dirty="0">
+                <a:solidFill>
+                  <a:srgbClr val="1C2833"/>
+                </a:solidFill>
+                <a:latin typeface="Arial" pitchFamily="34" charset="0"/>
+                <a:ea typeface="Arial" pitchFamily="34" charset="-122"/>
+                <a:cs typeface="Arial" pitchFamily="34" charset="-120"/>
+              </a:rPr>
+              <a:t>ap</a:t>
+            </a:r>
+            <a:pPr algn="l" indent="0" marL="0">
+              <a:lnSpc>
+                <a:spcPts val="1620"/>
+              </a:lnSpc>
+              <a:spcAft>
+                <a:spcPts val="300"/>
+              </a:spcAft>
+              <a:buNone/>
+            </a:pPr>
+            <a:r>
+              <a:rPr lang="en-US" sz="1200" dirty="0">
+                <a:solidFill>
+                  <a:srgbClr val="1C2833"/>
+                </a:solidFill>
+                <a:latin typeface="Arial" pitchFamily="34" charset="0"/>
+                <a:ea typeface="Arial" pitchFamily="34" charset="-122"/>
+                <a:cs typeface="Arial" pitchFamily="34" charset="-120"/>
+              </a:rPr>
+              <a:t> — water · Drink, wash, irrigate · Sewage, industrial effluent</a:t>
+            </a:r>
+            <a:endParaRPr lang="en-US" sz="1200" dirty="0"/>
+          </a:p>
+          <a:p>
+            <a:pPr algn="l" marL="342900" indent="-342900">
+              <a:lnSpc>
+                <a:spcPts val="1620"/>
+              </a:lnSpc>
+              <a:spcAft>
+                <a:spcPts val="300"/>
+              </a:spcAft>
+              <a:buSzPct val="100000"/>
+              <a:buChar char="•"/>
+            </a:pPr>
+            <a:r>
+              <a:rPr lang="en-US" sz="1200" i="1" dirty="0">
+                <a:solidFill>
+                  <a:srgbClr val="1C2833"/>
+                </a:solidFill>
+                <a:latin typeface="Arial" pitchFamily="34" charset="0"/>
+                <a:ea typeface="Arial" pitchFamily="34" charset="-122"/>
+                <a:cs typeface="Arial" pitchFamily="34" charset="-120"/>
+              </a:rPr>
+              <a:t>tejas</a:t>
+            </a:r>
+            <a:pPr algn="l" indent="0" marL="0">
+              <a:lnSpc>
+                <a:spcPts val="1620"/>
+              </a:lnSpc>
+              <a:spcAft>
+                <a:spcPts val="300"/>
+              </a:spcAft>
+              <a:buNone/>
+            </a:pPr>
+            <a:r>
+              <a:rPr lang="en-US" sz="1200" dirty="0">
+                <a:solidFill>
+                  <a:srgbClr val="1C2833"/>
+                </a:solidFill>
+                <a:latin typeface="Arial" pitchFamily="34" charset="0"/>
+                <a:ea typeface="Arial" pitchFamily="34" charset="-122"/>
+                <a:cs typeface="Arial" pitchFamily="34" charset="-120"/>
+              </a:rPr>
+              <a:t> — fire / heat / light · Cook, warm, illuminate · Burning fossil fuels (CO₂)</a:t>
+            </a:r>
+            <a:endParaRPr lang="en-US" sz="1200" dirty="0"/>
+          </a:p>
+          <a:p>
+            <a:pPr algn="l" marL="342900" indent="-342900">
+              <a:lnSpc>
+                <a:spcPts val="1620"/>
+              </a:lnSpc>
+              <a:spcAft>
+                <a:spcPts val="300"/>
+              </a:spcAft>
+              <a:buSzPct val="100000"/>
+              <a:buChar char="•"/>
+            </a:pPr>
+            <a:r>
+              <a:rPr lang="en-US" sz="1200" i="1" dirty="0">
+                <a:solidFill>
+                  <a:srgbClr val="1C2833"/>
+                </a:solidFill>
+                <a:latin typeface="Arial" pitchFamily="34" charset="0"/>
+                <a:ea typeface="Arial" pitchFamily="34" charset="-122"/>
+                <a:cs typeface="Arial" pitchFamily="34" charset="-120"/>
+              </a:rPr>
+              <a:t>vāyu</a:t>
+            </a:r>
+            <a:pPr algn="l" indent="0" marL="0">
+              <a:lnSpc>
+                <a:spcPts val="1620"/>
+              </a:lnSpc>
+              <a:spcAft>
+                <a:spcPts val="300"/>
+              </a:spcAft>
+              <a:buNone/>
+            </a:pPr>
+            <a:r>
+              <a:rPr lang="en-US" sz="1200" dirty="0">
+                <a:solidFill>
+                  <a:srgbClr val="1C2833"/>
+                </a:solidFill>
+                <a:latin typeface="Arial" pitchFamily="34" charset="0"/>
+                <a:ea typeface="Arial" pitchFamily="34" charset="-122"/>
+                <a:cs typeface="Arial" pitchFamily="34" charset="-120"/>
+              </a:rPr>
+              <a:t> — air · Breath, wind, weather · Vehicle exhaust, factory smoke</a:t>
+            </a:r>
+            <a:endParaRPr lang="en-US" sz="1200" dirty="0"/>
+          </a:p>
+          <a:p>
+            <a:pPr algn="l" marL="342900" indent="-342900">
+              <a:lnSpc>
+                <a:spcPts val="1620"/>
+              </a:lnSpc>
+              <a:spcAft>
+                <a:spcPts val="300"/>
+              </a:spcAft>
+              <a:buSzPct val="100000"/>
+              <a:buChar char="•"/>
+            </a:pPr>
+            <a:r>
+              <a:rPr lang="en-US" sz="1200" i="1" dirty="0">
+                <a:solidFill>
+                  <a:srgbClr val="1C2833"/>
+                </a:solidFill>
+                <a:latin typeface="Arial" pitchFamily="34" charset="0"/>
+                <a:ea typeface="Arial" pitchFamily="34" charset="-122"/>
+                <a:cs typeface="Arial" pitchFamily="34" charset="-120"/>
+              </a:rPr>
+              <a:t>ākāśa</a:t>
+            </a:r>
+            <a:pPr algn="l" indent="0" marL="0">
+              <a:lnSpc>
+                <a:spcPts val="1620"/>
+              </a:lnSpc>
+              <a:spcAft>
+                <a:spcPts val="300"/>
+              </a:spcAft>
+              <a:buNone/>
+            </a:pPr>
+            <a:r>
+              <a:rPr lang="en-US" sz="1200" dirty="0">
+                <a:solidFill>
+                  <a:srgbClr val="1C2833"/>
+                </a:solidFill>
+                <a:latin typeface="Arial" pitchFamily="34" charset="0"/>
+                <a:ea typeface="Arial" pitchFamily="34" charset="-122"/>
+                <a:cs typeface="Arial" pitchFamily="34" charset="-120"/>
+              </a:rPr>
+              <a:t> — space · Room to live, transmit sound · Noise, light pollution, satellite debris</a:t>
+            </a:r>
+            <a:endParaRPr lang="en-US" sz="1200" dirty="0"/>
+          </a:p>
+        </p:txBody>
+      </p:sp>
+      <p:sp>
+        <p:nvSpPr>
+          <p:cNvPr id="7" name="Text 5"/>
+          <p:cNvSpPr/>
+          <p:nvPr/>
+        </p:nvSpPr>
+        <p:spPr>
+          <a:xfrm>
+            <a:off x="634901" y="2914948"/>
             <a:ext cx="8102798" cy="487561"/>
           </a:xfrm>
           <a:prstGeom prst="rect">
@@ -5043,13 +5333,13 @@
       </p:sp>
       <p:sp>
         <p:nvSpPr>
-          <p:cNvPr id="6" name="Text 4"/>
+          <p:cNvPr id="8" name="Text 6"/>
           <p:cNvSpPr/>
           <p:nvPr/>
         </p:nvSpPr>
         <p:spPr>
           <a:xfrm>
-            <a:off x="634901" y="3547616"/>
+            <a:off x="634901" y="3504009"/>
             <a:ext cx="8102798" cy="693241"/>
           </a:xfrm>
           <a:prstGeom prst="rect">
@@ -5129,13 +5419,13 @@
       </p:sp>
       <p:sp>
         <p:nvSpPr>
-          <p:cNvPr id="7" name="Text 5"/>
+          <p:cNvPr id="9" name="Text 7"/>
           <p:cNvSpPr/>
           <p:nvPr/>
         </p:nvSpPr>
         <p:spPr>
           <a:xfrm>
-            <a:off x="406301" y="4329708"/>
+            <a:off x="406301" y="4286101"/>
             <a:ext cx="8498026" cy="426541"/>
           </a:xfrm>
           <a:prstGeom prst="rect">
@@ -5223,13 +5513,13 @@
       </p:sp>
       <p:sp>
         <p:nvSpPr>
-          <p:cNvPr id="8" name="Text 6"/>
+          <p:cNvPr id="10" name="Text 8"/>
           <p:cNvSpPr/>
           <p:nvPr/>
         </p:nvSpPr>
         <p:spPr>
           <a:xfrm>
-            <a:off x="406301" y="4832449"/>
+            <a:off x="406301" y="4788843"/>
             <a:ext cx="8498026" cy="213271"/>
           </a:xfrm>
           <a:prstGeom prst="rect">
@@ -5271,13 +5561,13 @@
       </p:sp>
       <p:sp>
         <p:nvSpPr>
-          <p:cNvPr id="9" name="Text 7"/>
+          <p:cNvPr id="11" name="Text 9"/>
           <p:cNvSpPr/>
           <p:nvPr/>
         </p:nvSpPr>
         <p:spPr>
           <a:xfrm>
-            <a:off x="634901" y="5134570"/>
+            <a:off x="634901" y="5090964"/>
             <a:ext cx="8102798" cy="487561"/>
           </a:xfrm>
           <a:prstGeom prst="rect">
@@ -5397,13 +5687,13 @@
       </p:sp>
       <p:sp>
         <p:nvSpPr>
-          <p:cNvPr id="10" name="Text 8"/>
+          <p:cNvPr id="12" name="Text 10"/>
           <p:cNvSpPr/>
           <p:nvPr/>
         </p:nvSpPr>
         <p:spPr>
           <a:xfrm>
-            <a:off x="406301" y="5787182"/>
+            <a:off x="406301" y="5743575"/>
             <a:ext cx="8498026" cy="213271"/>
           </a:xfrm>
           <a:prstGeom prst="rect">

--- a/exports/pptx/lessons/middle-module-13-indic-ecology/day-02-five-elements-revisited.pptx
+++ b/exports/pptx/lessons/middle-module-13-indic-ecology/day-02-five-elements-revisited.pptx
@@ -18,9 +18,15 @@
     <p:sldId id="266" r:id="rId12"/>
     <p:sldId id="267" r:id="rId13"/>
     <p:sldId id="268" r:id="rId14"/>
+    <p:sldId id="269" r:id="rId15"/>
+    <p:sldId id="270" r:id="rId16"/>
+    <p:sldId id="271" r:id="rId17"/>
+    <p:sldId id="272" r:id="rId18"/>
+    <p:sldId id="273" r:id="rId19"/>
+    <p:sldId id="274" r:id="rId20"/>
   </p:sldIdLst>
   <p:notesMasterIdLst>
-    <p:notesMasterId r:id="rId15"/>
+    <p:notesMasterId r:id="rId21"/>
   </p:notesMasterIdLst>
   <p:sldSz cx="9144000" cy="5143500"/>
   <p:notesSz cx="5143500" cy="9144000"/>
@@ -890,6 +896,534 @@
             <a:fld id="{F7021451-1387-4CA6-816F-3879F97B5CBC}" type="slidenum">
               <a:rPr lang="en-US"/>
               <a:t>13</a:t>
+            </a:fld>
+            <a:endParaRPr lang="en-US"/>
+          </a:p>
+        </p:txBody>
+      </p:sp>
+    </p:spTree>
+    <p:extLst>
+      <p:ext uri="{BB962C8B-B14F-4D97-AF65-F5344CB8AC3E}">
+        <p14:creationId xmlns:p14="http://schemas.microsoft.com/office/powerpoint/2010/main" val="1024086991"/>
+      </p:ext>
+    </p:extLst>
+  </p:cSld>
+  <p:clrMapOvr>
+    <a:masterClrMapping/>
+  </p:clrMapOvr>
+</p:notes>
+</file>
+
+<file path=ppt/notesSlides/notesSlide14.xml><?xml version="1.0" encoding="utf-8"?>
+<p:notes xmlns:a="http://schemas.openxmlformats.org/drawingml/2006/main" xmlns:r="http://schemas.openxmlformats.org/officeDocument/2006/relationships" xmlns:p="http://schemas.openxmlformats.org/presentationml/2006/main">
+  <p:cSld>
+    <p:spTree>
+      <p:nvGrpSpPr>
+        <p:cNvPr id="1" name=""/>
+        <p:cNvGrpSpPr/>
+        <p:nvPr/>
+      </p:nvGrpSpPr>
+      <p:grpSpPr>
+        <a:xfrm>
+          <a:off x="0" y="0"/>
+          <a:ext cx="0" cy="0"/>
+          <a:chOff x="0" y="0"/>
+          <a:chExt cx="0" cy="0"/>
+        </a:xfrm>
+      </p:grpSpPr>
+      <p:sp>
+        <p:nvSpPr>
+          <p:cNvPr id="2" name="Slide Image Placeholder 1"/>
+          <p:cNvSpPr>
+            <a:spLocks noGrp="1" noRot="1" noChangeAspect="1"/>
+          </p:cNvSpPr>
+          <p:nvPr>
+            <p:ph type="sldImg"/>
+          </p:nvPr>
+        </p:nvSpPr>
+        <p:spPr/>
+      </p:sp>
+      <p:sp>
+        <p:nvSpPr>
+          <p:cNvPr id="3" name="Notes Placeholder 2"/>
+          <p:cNvSpPr>
+            <a:spLocks noGrp="1"/>
+          </p:cNvSpPr>
+          <p:nvPr>
+            <p:ph type="body" idx="1"/>
+          </p:nvPr>
+        </p:nvSpPr>
+        <p:spPr/>
+        <p:txBody>
+          <a:bodyPr/>
+          <a:lstStyle/>
+          <a:p>
+            <a:r>
+              <a:rPr lang="en-US" dirty="0"/>
+              <a:t/>
+            </a:r>
+            <a:endParaRPr lang="en-US" dirty="0"/>
+          </a:p>
+        </p:txBody>
+      </p:sp>
+      <p:sp>
+        <p:nvSpPr>
+          <p:cNvPr id="4" name="Slide Number Placeholder 3"/>
+          <p:cNvSpPr>
+            <a:spLocks noGrp="1"/>
+          </p:cNvSpPr>
+          <p:nvPr>
+            <p:ph type="sldNum" sz="quarter" idx="10"/>
+          </p:nvPr>
+        </p:nvSpPr>
+        <p:spPr/>
+        <p:txBody>
+          <a:bodyPr/>
+          <a:lstStyle/>
+          <a:p>
+            <a:fld id="{F7021451-1387-4CA6-816F-3879F97B5CBC}" type="slidenum">
+              <a:rPr lang="en-US"/>
+              <a:t>14</a:t>
+            </a:fld>
+            <a:endParaRPr lang="en-US"/>
+          </a:p>
+        </p:txBody>
+      </p:sp>
+    </p:spTree>
+    <p:extLst>
+      <p:ext uri="{BB962C8B-B14F-4D97-AF65-F5344CB8AC3E}">
+        <p14:creationId xmlns:p14="http://schemas.microsoft.com/office/powerpoint/2010/main" val="1024086991"/>
+      </p:ext>
+    </p:extLst>
+  </p:cSld>
+  <p:clrMapOvr>
+    <a:masterClrMapping/>
+  </p:clrMapOvr>
+</p:notes>
+</file>
+
+<file path=ppt/notesSlides/notesSlide15.xml><?xml version="1.0" encoding="utf-8"?>
+<p:notes xmlns:a="http://schemas.openxmlformats.org/drawingml/2006/main" xmlns:r="http://schemas.openxmlformats.org/officeDocument/2006/relationships" xmlns:p="http://schemas.openxmlformats.org/presentationml/2006/main">
+  <p:cSld>
+    <p:spTree>
+      <p:nvGrpSpPr>
+        <p:cNvPr id="1" name=""/>
+        <p:cNvGrpSpPr/>
+        <p:nvPr/>
+      </p:nvGrpSpPr>
+      <p:grpSpPr>
+        <a:xfrm>
+          <a:off x="0" y="0"/>
+          <a:ext cx="0" cy="0"/>
+          <a:chOff x="0" y="0"/>
+          <a:chExt cx="0" cy="0"/>
+        </a:xfrm>
+      </p:grpSpPr>
+      <p:sp>
+        <p:nvSpPr>
+          <p:cNvPr id="2" name="Slide Image Placeholder 1"/>
+          <p:cNvSpPr>
+            <a:spLocks noGrp="1" noRot="1" noChangeAspect="1"/>
+          </p:cNvSpPr>
+          <p:nvPr>
+            <p:ph type="sldImg"/>
+          </p:nvPr>
+        </p:nvSpPr>
+        <p:spPr/>
+      </p:sp>
+      <p:sp>
+        <p:nvSpPr>
+          <p:cNvPr id="3" name="Notes Placeholder 2"/>
+          <p:cNvSpPr>
+            <a:spLocks noGrp="1"/>
+          </p:cNvSpPr>
+          <p:nvPr>
+            <p:ph type="body" idx="1"/>
+          </p:nvPr>
+        </p:nvSpPr>
+        <p:spPr/>
+        <p:txBody>
+          <a:bodyPr/>
+          <a:lstStyle/>
+          <a:p>
+            <a:r>
+              <a:rPr lang="en-US" dirty="0"/>
+              <a:t/>
+            </a:r>
+            <a:endParaRPr lang="en-US" dirty="0"/>
+          </a:p>
+        </p:txBody>
+      </p:sp>
+      <p:sp>
+        <p:nvSpPr>
+          <p:cNvPr id="4" name="Slide Number Placeholder 3"/>
+          <p:cNvSpPr>
+            <a:spLocks noGrp="1"/>
+          </p:cNvSpPr>
+          <p:nvPr>
+            <p:ph type="sldNum" sz="quarter" idx="10"/>
+          </p:nvPr>
+        </p:nvSpPr>
+        <p:spPr/>
+        <p:txBody>
+          <a:bodyPr/>
+          <a:lstStyle/>
+          <a:p>
+            <a:fld id="{F7021451-1387-4CA6-816F-3879F97B5CBC}" type="slidenum">
+              <a:rPr lang="en-US"/>
+              <a:t>15</a:t>
+            </a:fld>
+            <a:endParaRPr lang="en-US"/>
+          </a:p>
+        </p:txBody>
+      </p:sp>
+    </p:spTree>
+    <p:extLst>
+      <p:ext uri="{BB962C8B-B14F-4D97-AF65-F5344CB8AC3E}">
+        <p14:creationId xmlns:p14="http://schemas.microsoft.com/office/powerpoint/2010/main" val="1024086991"/>
+      </p:ext>
+    </p:extLst>
+  </p:cSld>
+  <p:clrMapOvr>
+    <a:masterClrMapping/>
+  </p:clrMapOvr>
+</p:notes>
+</file>
+
+<file path=ppt/notesSlides/notesSlide16.xml><?xml version="1.0" encoding="utf-8"?>
+<p:notes xmlns:a="http://schemas.openxmlformats.org/drawingml/2006/main" xmlns:r="http://schemas.openxmlformats.org/officeDocument/2006/relationships" xmlns:p="http://schemas.openxmlformats.org/presentationml/2006/main">
+  <p:cSld>
+    <p:spTree>
+      <p:nvGrpSpPr>
+        <p:cNvPr id="1" name=""/>
+        <p:cNvGrpSpPr/>
+        <p:nvPr/>
+      </p:nvGrpSpPr>
+      <p:grpSpPr>
+        <a:xfrm>
+          <a:off x="0" y="0"/>
+          <a:ext cx="0" cy="0"/>
+          <a:chOff x="0" y="0"/>
+          <a:chExt cx="0" cy="0"/>
+        </a:xfrm>
+      </p:grpSpPr>
+      <p:sp>
+        <p:nvSpPr>
+          <p:cNvPr id="2" name="Slide Image Placeholder 1"/>
+          <p:cNvSpPr>
+            <a:spLocks noGrp="1" noRot="1" noChangeAspect="1"/>
+          </p:cNvSpPr>
+          <p:nvPr>
+            <p:ph type="sldImg"/>
+          </p:nvPr>
+        </p:nvSpPr>
+        <p:spPr/>
+      </p:sp>
+      <p:sp>
+        <p:nvSpPr>
+          <p:cNvPr id="3" name="Notes Placeholder 2"/>
+          <p:cNvSpPr>
+            <a:spLocks noGrp="1"/>
+          </p:cNvSpPr>
+          <p:nvPr>
+            <p:ph type="body" idx="1"/>
+          </p:nvPr>
+        </p:nvSpPr>
+        <p:spPr/>
+        <p:txBody>
+          <a:bodyPr/>
+          <a:lstStyle/>
+          <a:p>
+            <a:r>
+              <a:rPr lang="en-US" dirty="0"/>
+              <a:t/>
+            </a:r>
+            <a:endParaRPr lang="en-US" dirty="0"/>
+          </a:p>
+        </p:txBody>
+      </p:sp>
+      <p:sp>
+        <p:nvSpPr>
+          <p:cNvPr id="4" name="Slide Number Placeholder 3"/>
+          <p:cNvSpPr>
+            <a:spLocks noGrp="1"/>
+          </p:cNvSpPr>
+          <p:nvPr>
+            <p:ph type="sldNum" sz="quarter" idx="10"/>
+          </p:nvPr>
+        </p:nvSpPr>
+        <p:spPr/>
+        <p:txBody>
+          <a:bodyPr/>
+          <a:lstStyle/>
+          <a:p>
+            <a:fld id="{F7021451-1387-4CA6-816F-3879F97B5CBC}" type="slidenum">
+              <a:rPr lang="en-US"/>
+              <a:t>16</a:t>
+            </a:fld>
+            <a:endParaRPr lang="en-US"/>
+          </a:p>
+        </p:txBody>
+      </p:sp>
+    </p:spTree>
+    <p:extLst>
+      <p:ext uri="{BB962C8B-B14F-4D97-AF65-F5344CB8AC3E}">
+        <p14:creationId xmlns:p14="http://schemas.microsoft.com/office/powerpoint/2010/main" val="1024086991"/>
+      </p:ext>
+    </p:extLst>
+  </p:cSld>
+  <p:clrMapOvr>
+    <a:masterClrMapping/>
+  </p:clrMapOvr>
+</p:notes>
+</file>
+
+<file path=ppt/notesSlides/notesSlide17.xml><?xml version="1.0" encoding="utf-8"?>
+<p:notes xmlns:a="http://schemas.openxmlformats.org/drawingml/2006/main" xmlns:r="http://schemas.openxmlformats.org/officeDocument/2006/relationships" xmlns:p="http://schemas.openxmlformats.org/presentationml/2006/main">
+  <p:cSld>
+    <p:spTree>
+      <p:nvGrpSpPr>
+        <p:cNvPr id="1" name=""/>
+        <p:cNvGrpSpPr/>
+        <p:nvPr/>
+      </p:nvGrpSpPr>
+      <p:grpSpPr>
+        <a:xfrm>
+          <a:off x="0" y="0"/>
+          <a:ext cx="0" cy="0"/>
+          <a:chOff x="0" y="0"/>
+          <a:chExt cx="0" cy="0"/>
+        </a:xfrm>
+      </p:grpSpPr>
+      <p:sp>
+        <p:nvSpPr>
+          <p:cNvPr id="2" name="Slide Image Placeholder 1"/>
+          <p:cNvSpPr>
+            <a:spLocks noGrp="1" noRot="1" noChangeAspect="1"/>
+          </p:cNvSpPr>
+          <p:nvPr>
+            <p:ph type="sldImg"/>
+          </p:nvPr>
+        </p:nvSpPr>
+        <p:spPr/>
+      </p:sp>
+      <p:sp>
+        <p:nvSpPr>
+          <p:cNvPr id="3" name="Notes Placeholder 2"/>
+          <p:cNvSpPr>
+            <a:spLocks noGrp="1"/>
+          </p:cNvSpPr>
+          <p:nvPr>
+            <p:ph type="body" idx="1"/>
+          </p:nvPr>
+        </p:nvSpPr>
+        <p:spPr/>
+        <p:txBody>
+          <a:bodyPr/>
+          <a:lstStyle/>
+          <a:p>
+            <a:r>
+              <a:rPr lang="en-US" dirty="0"/>
+              <a:t/>
+            </a:r>
+            <a:endParaRPr lang="en-US" dirty="0"/>
+          </a:p>
+        </p:txBody>
+      </p:sp>
+      <p:sp>
+        <p:nvSpPr>
+          <p:cNvPr id="4" name="Slide Number Placeholder 3"/>
+          <p:cNvSpPr>
+            <a:spLocks noGrp="1"/>
+          </p:cNvSpPr>
+          <p:nvPr>
+            <p:ph type="sldNum" sz="quarter" idx="10"/>
+          </p:nvPr>
+        </p:nvSpPr>
+        <p:spPr/>
+        <p:txBody>
+          <a:bodyPr/>
+          <a:lstStyle/>
+          <a:p>
+            <a:fld id="{F7021451-1387-4CA6-816F-3879F97B5CBC}" type="slidenum">
+              <a:rPr lang="en-US"/>
+              <a:t>17</a:t>
+            </a:fld>
+            <a:endParaRPr lang="en-US"/>
+          </a:p>
+        </p:txBody>
+      </p:sp>
+    </p:spTree>
+    <p:extLst>
+      <p:ext uri="{BB962C8B-B14F-4D97-AF65-F5344CB8AC3E}">
+        <p14:creationId xmlns:p14="http://schemas.microsoft.com/office/powerpoint/2010/main" val="1024086991"/>
+      </p:ext>
+    </p:extLst>
+  </p:cSld>
+  <p:clrMapOvr>
+    <a:masterClrMapping/>
+  </p:clrMapOvr>
+</p:notes>
+</file>
+
+<file path=ppt/notesSlides/notesSlide18.xml><?xml version="1.0" encoding="utf-8"?>
+<p:notes xmlns:a="http://schemas.openxmlformats.org/drawingml/2006/main" xmlns:r="http://schemas.openxmlformats.org/officeDocument/2006/relationships" xmlns:p="http://schemas.openxmlformats.org/presentationml/2006/main">
+  <p:cSld>
+    <p:spTree>
+      <p:nvGrpSpPr>
+        <p:cNvPr id="1" name=""/>
+        <p:cNvGrpSpPr/>
+        <p:nvPr/>
+      </p:nvGrpSpPr>
+      <p:grpSpPr>
+        <a:xfrm>
+          <a:off x="0" y="0"/>
+          <a:ext cx="0" cy="0"/>
+          <a:chOff x="0" y="0"/>
+          <a:chExt cx="0" cy="0"/>
+        </a:xfrm>
+      </p:grpSpPr>
+      <p:sp>
+        <p:nvSpPr>
+          <p:cNvPr id="2" name="Slide Image Placeholder 1"/>
+          <p:cNvSpPr>
+            <a:spLocks noGrp="1" noRot="1" noChangeAspect="1"/>
+          </p:cNvSpPr>
+          <p:nvPr>
+            <p:ph type="sldImg"/>
+          </p:nvPr>
+        </p:nvSpPr>
+        <p:spPr/>
+      </p:sp>
+      <p:sp>
+        <p:nvSpPr>
+          <p:cNvPr id="3" name="Notes Placeholder 2"/>
+          <p:cNvSpPr>
+            <a:spLocks noGrp="1"/>
+          </p:cNvSpPr>
+          <p:nvPr>
+            <p:ph type="body" idx="1"/>
+          </p:nvPr>
+        </p:nvSpPr>
+        <p:spPr/>
+        <p:txBody>
+          <a:bodyPr/>
+          <a:lstStyle/>
+          <a:p>
+            <a:r>
+              <a:rPr lang="en-US" dirty="0"/>
+              <a:t/>
+            </a:r>
+            <a:endParaRPr lang="en-US" dirty="0"/>
+          </a:p>
+        </p:txBody>
+      </p:sp>
+      <p:sp>
+        <p:nvSpPr>
+          <p:cNvPr id="4" name="Slide Number Placeholder 3"/>
+          <p:cNvSpPr>
+            <a:spLocks noGrp="1"/>
+          </p:cNvSpPr>
+          <p:nvPr>
+            <p:ph type="sldNum" sz="quarter" idx="10"/>
+          </p:nvPr>
+        </p:nvSpPr>
+        <p:spPr/>
+        <p:txBody>
+          <a:bodyPr/>
+          <a:lstStyle/>
+          <a:p>
+            <a:fld id="{F7021451-1387-4CA6-816F-3879F97B5CBC}" type="slidenum">
+              <a:rPr lang="en-US"/>
+              <a:t>18</a:t>
+            </a:fld>
+            <a:endParaRPr lang="en-US"/>
+          </a:p>
+        </p:txBody>
+      </p:sp>
+    </p:spTree>
+    <p:extLst>
+      <p:ext uri="{BB962C8B-B14F-4D97-AF65-F5344CB8AC3E}">
+        <p14:creationId xmlns:p14="http://schemas.microsoft.com/office/powerpoint/2010/main" val="1024086991"/>
+      </p:ext>
+    </p:extLst>
+  </p:cSld>
+  <p:clrMapOvr>
+    <a:masterClrMapping/>
+  </p:clrMapOvr>
+</p:notes>
+</file>
+
+<file path=ppt/notesSlides/notesSlide19.xml><?xml version="1.0" encoding="utf-8"?>
+<p:notes xmlns:a="http://schemas.openxmlformats.org/drawingml/2006/main" xmlns:r="http://schemas.openxmlformats.org/officeDocument/2006/relationships" xmlns:p="http://schemas.openxmlformats.org/presentationml/2006/main">
+  <p:cSld>
+    <p:spTree>
+      <p:nvGrpSpPr>
+        <p:cNvPr id="1" name=""/>
+        <p:cNvGrpSpPr/>
+        <p:nvPr/>
+      </p:nvGrpSpPr>
+      <p:grpSpPr>
+        <a:xfrm>
+          <a:off x="0" y="0"/>
+          <a:ext cx="0" cy="0"/>
+          <a:chOff x="0" y="0"/>
+          <a:chExt cx="0" cy="0"/>
+        </a:xfrm>
+      </p:grpSpPr>
+      <p:sp>
+        <p:nvSpPr>
+          <p:cNvPr id="2" name="Slide Image Placeholder 1"/>
+          <p:cNvSpPr>
+            <a:spLocks noGrp="1" noRot="1" noChangeAspect="1"/>
+          </p:cNvSpPr>
+          <p:nvPr>
+            <p:ph type="sldImg"/>
+          </p:nvPr>
+        </p:nvSpPr>
+        <p:spPr/>
+      </p:sp>
+      <p:sp>
+        <p:nvSpPr>
+          <p:cNvPr id="3" name="Notes Placeholder 2"/>
+          <p:cNvSpPr>
+            <a:spLocks noGrp="1"/>
+          </p:cNvSpPr>
+          <p:nvPr>
+            <p:ph type="body" idx="1"/>
+          </p:nvPr>
+        </p:nvSpPr>
+        <p:spPr/>
+        <p:txBody>
+          <a:bodyPr/>
+          <a:lstStyle/>
+          <a:p>
+            <a:r>
+              <a:rPr lang="en-US" dirty="0"/>
+              <a:t/>
+            </a:r>
+            <a:endParaRPr lang="en-US" dirty="0"/>
+          </a:p>
+        </p:txBody>
+      </p:sp>
+      <p:sp>
+        <p:nvSpPr>
+          <p:cNvPr id="4" name="Slide Number Placeholder 3"/>
+          <p:cNvSpPr>
+            <a:spLocks noGrp="1"/>
+          </p:cNvSpPr>
+          <p:nvPr>
+            <p:ph type="sldNum" sz="quarter" idx="10"/>
+          </p:nvPr>
+        </p:nvSpPr>
+        <p:spPr/>
+        <p:txBody>
+          <a:bodyPr/>
+          <a:lstStyle/>
+          <a:p>
+            <a:fld id="{F7021451-1387-4CA6-816F-3879F97B5CBC}" type="slidenum">
+              <a:rPr lang="en-US"/>
+              <a:t>19</a:t>
             </a:fld>
             <a:endParaRPr lang="en-US"/>
           </a:p>
@@ -2189,148 +2723,6 @@
         </p:nvSpPr>
         <p:spPr>
           <a:xfrm>
-            <a:off x="406301" y="1223963"/>
-            <a:ext cx="8498026" cy="274290"/>
-          </a:xfrm>
-          <a:prstGeom prst="rect">
-            <a:avLst/>
-          </a:prstGeom>
-          <a:noFill/>
-          <a:ln/>
-        </p:spPr>
-        <p:txBody>
-          <a:bodyPr wrap="square" lIns="0" tIns="0" rIns="0" bIns="0" rtlCol="0" anchor="t"/>
-          <a:lstStyle/>
-          <a:p>
-            <a:pPr algn="l" indent="0" marL="0">
-              <a:lnSpc>
-                <a:spcPts val="2160"/>
-              </a:lnSpc>
-              <a:spcBef>
-                <a:spcPts val="600"/>
-              </a:spcBef>
-              <a:spcAft>
-                <a:spcPts val="800"/>
-              </a:spcAft>
-              <a:buNone/>
-            </a:pPr>
-            <a:r>
-              <a:rPr lang="en-US" sz="1800" b="1" dirty="0">
-                <a:solidFill>
-                  <a:srgbClr val="FE4447"/>
-                </a:solidFill>
-                <a:latin typeface="Georgia" pitchFamily="34" charset="0"/>
-                <a:ea typeface="Georgia" pitchFamily="34" charset="-122"/>
-                <a:cs typeface="Georgia" pitchFamily="34" charset="-120"/>
-              </a:rPr>
-              <a:t>Learning objective</a:t>
-            </a:r>
-            <a:endParaRPr lang="en-US" sz="1800" dirty="0"/>
-          </a:p>
-        </p:txBody>
-      </p:sp>
-      <p:sp>
-        <p:nvSpPr>
-          <p:cNvPr id="6" name="Text 4"/>
-          <p:cNvSpPr/>
-          <p:nvPr/>
-        </p:nvSpPr>
-        <p:spPr>
-          <a:xfrm>
-            <a:off x="406301" y="1637854"/>
-            <a:ext cx="8498026" cy="426541"/>
-          </a:xfrm>
-          <a:prstGeom prst="rect">
-            <a:avLst/>
-          </a:prstGeom>
-          <a:noFill/>
-          <a:ln/>
-        </p:spPr>
-        <p:txBody>
-          <a:bodyPr wrap="square" lIns="0" tIns="0" rIns="0" bIns="0" rtlCol="0" anchor="t"/>
-          <a:lstStyle/>
-          <a:p>
-            <a:pPr algn="l" indent="0" marL="0">
-              <a:lnSpc>
-                <a:spcPts val="1680"/>
-              </a:lnSpc>
-              <a:spcBef>
-                <a:spcPts val="300"/>
-              </a:spcBef>
-              <a:spcAft>
-                <a:spcPts val="300"/>
-              </a:spcAft>
-              <a:buNone/>
-            </a:pPr>
-            <a:r>
-              <a:rPr lang="en-US" sz="1200" dirty="0">
-                <a:solidFill>
-                  <a:srgbClr val="1C2833"/>
-                </a:solidFill>
-                <a:latin typeface="Arial" pitchFamily="34" charset="0"/>
-                <a:ea typeface="Arial" pitchFamily="34" charset="-122"/>
-                <a:cs typeface="Arial" pitchFamily="34" charset="-120"/>
-              </a:rPr>
-              <a:t>Students re-state the five elements from Module 2, and re-frame each one as a "family member" of the ecological family — so the </a:t>
-            </a:r>
-            <a:pPr algn="l" indent="0" marL="0">
-              <a:lnSpc>
-                <a:spcPts val="1680"/>
-              </a:lnSpc>
-              <a:spcBef>
-                <a:spcPts val="300"/>
-              </a:spcBef>
-              <a:spcAft>
-                <a:spcPts val="300"/>
-              </a:spcAft>
-              <a:buNone/>
-            </a:pPr>
-            <a:r>
-              <a:rPr lang="en-US" sz="1200" i="1" dirty="0">
-                <a:solidFill>
-                  <a:srgbClr val="1C2833"/>
-                </a:solidFill>
-                <a:latin typeface="Arial" pitchFamily="34" charset="0"/>
-                <a:ea typeface="Arial" pitchFamily="34" charset="-122"/>
-                <a:cs typeface="Arial" pitchFamily="34" charset="-120"/>
-              </a:rPr>
-              <a:t>vasudhaiva kuṭumbakam</a:t>
-            </a:r>
-            <a:pPr algn="l" indent="0" marL="0">
-              <a:lnSpc>
-                <a:spcPts val="1680"/>
-              </a:lnSpc>
-              <a:spcBef>
-                <a:spcPts val="300"/>
-              </a:spcBef>
-              <a:spcAft>
-                <a:spcPts val="300"/>
-              </a:spcAft>
-              <a:buNone/>
-            </a:pPr>
-            <a:r>
-              <a:rPr lang="en-US" sz="1200" dirty="0">
-                <a:solidFill>
-                  <a:srgbClr val="1C2833"/>
-                </a:solidFill>
-                <a:latin typeface="Arial" pitchFamily="34" charset="0"/>
-                <a:ea typeface="Arial" pitchFamily="34" charset="-122"/>
-                <a:cs typeface="Arial" pitchFamily="34" charset="-120"/>
-              </a:rPr>
-              <a:t> ethic gets concrete, element by element.</a:t>
-            </a:r>
-            <a:endParaRPr lang="en-US" sz="1200" dirty="0"/>
-          </a:p>
-        </p:txBody>
-      </p:sp>
-      <p:sp>
-        <p:nvSpPr>
-          <p:cNvPr id="7" name="Text 5"/>
-          <p:cNvSpPr/>
-          <p:nvPr/>
-        </p:nvSpPr>
-        <p:spPr>
-          <a:xfrm>
             <a:off x="406301" y="4434929"/>
             <a:ext cx="8498026" cy="213271"/>
           </a:xfrm>
@@ -2475,7 +2867,7 @@
                 <a:ea typeface="Georgia" pitchFamily="34" charset="-122"/>
                 <a:cs typeface="Georgia" pitchFamily="34" charset="-120"/>
               </a:rPr>
-              <a:t>Homework</a:t>
+              <a:t>Core (20 min) (cont.)</a:t>
             </a:r>
             <a:endParaRPr lang="en-US" sz="1800" dirty="0"/>
           </a:p>
@@ -2489,8 +2881,8 @@
         </p:nvSpPr>
         <p:spPr>
           <a:xfrm>
-            <a:off x="406301" y="870942"/>
-            <a:ext cx="8498026" cy="426541"/>
+            <a:off x="634901" y="883593"/>
+            <a:ext cx="8102798" cy="487561"/>
           </a:xfrm>
           <a:prstGeom prst="rect">
             <a:avLst/>
@@ -2502,13 +2894,31 @@
           <a:bodyPr wrap="square" lIns="0" tIns="0" rIns="0" bIns="0" rtlCol="0" anchor="t"/>
           <a:lstStyle/>
           <a:p>
-            <a:pPr algn="l" indent="0" marL="0">
-              <a:lnSpc>
-                <a:spcPts val="1680"/>
-              </a:lnSpc>
-              <a:spcBef>
-                <a:spcPts val="300"/>
-              </a:spcBef>
+            <a:pPr algn="l" marL="342900" indent="-342900">
+              <a:lnSpc>
+                <a:spcPts val="1620"/>
+              </a:lnSpc>
+              <a:spcAft>
+                <a:spcPts val="300"/>
+              </a:spcAft>
+              <a:buSzPct val="100000"/>
+              <a:buChar char="•"/>
+            </a:pPr>
+            <a:r>
+              <a:rPr lang="en-US" sz="1200" b="1" dirty="0">
+                <a:solidFill>
+                  <a:srgbClr val="1C2833"/>
+                </a:solidFill>
+                <a:latin typeface="Arial" pitchFamily="34" charset="0"/>
+                <a:ea typeface="Arial" pitchFamily="34" charset="-122"/>
+                <a:cs typeface="Arial" pitchFamily="34" charset="-120"/>
+              </a:rPr>
+              <a:t>The reframe.</a:t>
+            </a:r>
+            <a:pPr algn="l" indent="0" marL="0">
+              <a:lnSpc>
+                <a:spcPts val="1620"/>
+              </a:lnSpc>
               <a:spcAft>
                 <a:spcPts val="300"/>
               </a:spcAft>
@@ -2523,7 +2933,47 @@
                 <a:ea typeface="Arial" pitchFamily="34" charset="-122"/>
                 <a:cs typeface="Arial" pitchFamily="34" charset="-120"/>
               </a:rPr>
-              <a:t>– Walk for 5 minutes anywhere near your home. Notice ONE specific way one element is being mistreated (the dump, the dust, the noise, the leaking tap). Write 3 sentences. Bring tomorrow.</a:t>
+              <a:t> </a:t>
+            </a:r>
+            <a:pPr algn="l" indent="0" marL="0">
+              <a:lnSpc>
+                <a:spcPts val="1620"/>
+              </a:lnSpc>
+              <a:spcAft>
+                <a:spcPts val="300"/>
+              </a:spcAft>
+              <a:buNone/>
+            </a:pPr>
+            <a:r>
+              <a:rPr lang="en-US" sz="1200" i="1" dirty="0">
+                <a:solidFill>
+                  <a:srgbClr val="1C2833"/>
+                </a:solidFill>
+                <a:latin typeface="Arial" pitchFamily="34" charset="0"/>
+                <a:ea typeface="Arial" pitchFamily="34" charset="-122"/>
+                <a:cs typeface="Arial" pitchFamily="34" charset="-120"/>
+              </a:rPr>
+              <a:t>"In Module 2 we learned the five elements as categories of matter. Today we look at the same five as members of the family."</a:t>
+            </a:r>
+            <a:pPr algn="l" indent="0" marL="0">
+              <a:lnSpc>
+                <a:spcPts val="1620"/>
+              </a:lnSpc>
+              <a:spcAft>
+                <a:spcPts val="300"/>
+              </a:spcAft>
+              <a:buNone/>
+            </a:pPr>
+            <a:r>
+              <a:rPr lang="en-US" sz="1200" dirty="0">
+                <a:solidFill>
+                  <a:srgbClr val="1C2833"/>
+                </a:solidFill>
+                <a:latin typeface="Arial" pitchFamily="34" charset="0"/>
+                <a:ea typeface="Arial" pitchFamily="34" charset="-122"/>
+                <a:cs typeface="Arial" pitchFamily="34" charset="-120"/>
+              </a:rPr>
+              <a:t> Each element gives us something; we owe each one something back.</a:t>
             </a:r>
             <a:endParaRPr lang="en-US" sz="1200" dirty="0"/>
           </a:p>
@@ -2532,6 +2982,92 @@
       <p:sp>
         <p:nvSpPr>
           <p:cNvPr id="5" name="Text 3"/>
+          <p:cNvSpPr/>
+          <p:nvPr/>
+        </p:nvSpPr>
+        <p:spPr>
+          <a:xfrm>
+            <a:off x="634901" y="1472654"/>
+            <a:ext cx="8102798" cy="693241"/>
+          </a:xfrm>
+          <a:prstGeom prst="rect">
+            <a:avLst/>
+          </a:prstGeom>
+          <a:noFill/>
+          <a:ln/>
+        </p:spPr>
+        <p:txBody>
+          <a:bodyPr wrap="square" lIns="0" tIns="0" rIns="0" bIns="0" rtlCol="0" anchor="t"/>
+          <a:lstStyle/>
+          <a:p>
+            <a:pPr algn="l" marL="342900" indent="-342900">
+              <a:lnSpc>
+                <a:spcPts val="1620"/>
+              </a:lnSpc>
+              <a:spcAft>
+                <a:spcPts val="300"/>
+              </a:spcAft>
+              <a:buSzPct val="100000"/>
+              <a:buChar char="•"/>
+            </a:pPr>
+            <a:r>
+              <a:rPr lang="en-US" sz="1200" b="1" dirty="0">
+                <a:solidFill>
+                  <a:srgbClr val="1C2833"/>
+                </a:solidFill>
+                <a:latin typeface="Arial" pitchFamily="34" charset="0"/>
+                <a:ea typeface="Arial" pitchFamily="34" charset="-122"/>
+                <a:cs typeface="Arial" pitchFamily="34" charset="-120"/>
+              </a:rPr>
+              <a:t>Why this is an ecological lens.</a:t>
+            </a:r>
+            <a:pPr algn="l" indent="0" marL="0">
+              <a:lnSpc>
+                <a:spcPts val="1620"/>
+              </a:lnSpc>
+              <a:spcAft>
+                <a:spcPts val="300"/>
+              </a:spcAft>
+              <a:buNone/>
+            </a:pPr>
+            <a:r>
+              <a:rPr lang="en-US" sz="1200" dirty="0">
+                <a:solidFill>
+                  <a:srgbClr val="1C2833"/>
+                </a:solidFill>
+                <a:latin typeface="Arial" pitchFamily="34" charset="0"/>
+                <a:ea typeface="Arial" pitchFamily="34" charset="-122"/>
+                <a:cs typeface="Arial" pitchFamily="34" charset="-120"/>
+              </a:rPr>
+              <a:t> Modern environmental science uses categories like "atmosphere," "hydrosphere," "lithosphere," "biosphere," etc. The five-element framework is a sensory, everyday version of the same idea. It says: </a:t>
+            </a:r>
+            <a:pPr algn="l" indent="0" marL="0">
+              <a:lnSpc>
+                <a:spcPts val="1620"/>
+              </a:lnSpc>
+              <a:spcAft>
+                <a:spcPts val="300"/>
+              </a:spcAft>
+              <a:buNone/>
+            </a:pPr>
+            <a:r>
+              <a:rPr lang="en-US" sz="1200" i="1" dirty="0">
+                <a:solidFill>
+                  <a:srgbClr val="1C2833"/>
+                </a:solidFill>
+                <a:latin typeface="Arial" pitchFamily="34" charset="0"/>
+                <a:ea typeface="Arial" pitchFamily="34" charset="-122"/>
+                <a:cs typeface="Arial" pitchFamily="34" charset="-120"/>
+              </a:rPr>
+              <a:t>the place you live is made of these five. Notice them. Care for each.</a:t>
+            </a:r>
+            <a:endParaRPr lang="en-US" sz="1200" dirty="0"/>
+          </a:p>
+        </p:txBody>
+      </p:sp>
+      <p:sp>
+        <p:nvSpPr>
+          <p:cNvPr id="6" name="Text 4"/>
           <p:cNvSpPr/>
           <p:nvPr/>
         </p:nvSpPr>
@@ -2681,7 +3217,7 @@
                 <a:ea typeface="Georgia" pitchFamily="34" charset="-122"/>
                 <a:cs typeface="Georgia" pitchFamily="34" charset="-120"/>
               </a:rPr>
-              <a:t>Differentiation</a:t>
+              <a:t>Core (20 min) (cont.)</a:t>
             </a:r>
             <a:endParaRPr lang="en-US" sz="1800" dirty="0"/>
           </a:p>
@@ -2695,8 +3231,61 @@
         </p:nvSpPr>
         <p:spPr>
           <a:xfrm>
-            <a:off x="634901" y="883593"/>
-            <a:ext cx="8102798" cy="731341"/>
+            <a:off x="406301" y="883593"/>
+            <a:ext cx="8331398" cy="842963"/>
+          </a:xfrm>
+          <a:prstGeom prst="rect">
+            <a:avLst/>
+          </a:prstGeom>
+          <a:solidFill>
+            <a:srgbClr val="F4F8F9"/>
+          </a:solidFill>
+          <a:ln/>
+        </p:spPr>
+        <p:txBody>
+          <a:bodyPr wrap="square" rtlCol="0" anchor="ctr"/>
+          <a:lstStyle/>
+          <a:p>
+            <a:pPr indent="0" marL="0">
+              <a:buNone/>
+            </a:pPr>
+            <a:endParaRPr lang="en-US" dirty="0"/>
+          </a:p>
+        </p:txBody>
+      </p:sp>
+      <p:sp>
+        <p:nvSpPr>
+          <p:cNvPr id="5" name="Shape 3"/>
+          <p:cNvSpPr/>
+          <p:nvPr/>
+        </p:nvSpPr>
+        <p:spPr>
+          <a:xfrm>
+            <a:off x="434876" y="883593"/>
+            <a:ext cx="0" cy="842963"/>
+          </a:xfrm>
+          <a:prstGeom prst="line">
+            <a:avLst/>
+          </a:prstGeom>
+          <a:noFill/>
+          <a:ln w="57150">
+            <a:solidFill>
+              <a:srgbClr val="FE4447"/>
+            </a:solidFill>
+            <a:prstDash val="solid"/>
+          </a:ln>
+        </p:spPr>
+      </p:sp>
+      <p:sp>
+        <p:nvSpPr>
+          <p:cNvPr id="6" name="Text 4"/>
+          <p:cNvSpPr/>
+          <p:nvPr/>
+        </p:nvSpPr>
+        <p:spPr>
+          <a:xfrm>
+            <a:off x="692051" y="1074093"/>
+            <a:ext cx="7973389" cy="461963"/>
           </a:xfrm>
           <a:prstGeom prst="rect">
             <a:avLst/>
@@ -2708,31 +3297,107 @@
           <a:bodyPr wrap="square" lIns="0" tIns="0" rIns="0" bIns="0" rtlCol="0" anchor="t"/>
           <a:lstStyle/>
           <a:p>
-            <a:pPr algn="l" marL="342900" indent="-342900">
-              <a:lnSpc>
-                <a:spcPts val="1620"/>
-              </a:lnSpc>
-              <a:spcAft>
-                <a:spcPts val="300"/>
-              </a:spcAft>
-              <a:buSzPct val="100000"/>
-              <a:buChar char="•"/>
-            </a:pPr>
-            <a:r>
-              <a:rPr lang="en-US" sz="1200" b="1" dirty="0">
-                <a:solidFill>
-                  <a:srgbClr val="1C2833"/>
-                </a:solidFill>
-                <a:latin typeface="Arial" pitchFamily="34" charset="0"/>
-                <a:ea typeface="Arial" pitchFamily="34" charset="-122"/>
-                <a:cs typeface="Arial" pitchFamily="34" charset="-120"/>
-              </a:rPr>
-              <a:t>One tier up:</a:t>
-            </a:r>
-            <a:pPr algn="l" indent="0" marL="0">
-              <a:lnSpc>
-                <a:spcPts val="1620"/>
-              </a:lnSpc>
+            <a:pPr algn="l" indent="0" marL="0">
+              <a:lnSpc>
+                <a:spcPts val="1820"/>
+              </a:lnSpc>
+              <a:spcBef>
+                <a:spcPts val="300"/>
+              </a:spcBef>
+              <a:spcAft>
+                <a:spcPts val="300"/>
+              </a:spcAft>
+              <a:buNone/>
+            </a:pPr>
+            <a:r>
+              <a:rPr lang="en-US" sz="1300" dirty="0">
+                <a:solidFill>
+                  <a:srgbClr val="1C2833"/>
+                </a:solidFill>
+                <a:latin typeface="Georgia" pitchFamily="34" charset="0"/>
+                <a:ea typeface="Georgia" pitchFamily="34" charset="-122"/>
+                <a:cs typeface="Georgia" pitchFamily="34" charset="-120"/>
+              </a:rPr>
+              <a:t>"Earth, water, fire, air, and sky — these five great elements (</a:t>
+            </a:r>
+            <a:pPr algn="l" indent="0" marL="0">
+              <a:lnSpc>
+                <a:spcPts val="1820"/>
+              </a:lnSpc>
+              <a:spcBef>
+                <a:spcPts val="300"/>
+              </a:spcBef>
+              <a:spcAft>
+                <a:spcPts val="300"/>
+              </a:spcAft>
+              <a:buNone/>
+            </a:pPr>
+            <a:r>
+              <a:rPr lang="en-US" sz="1300" i="1" dirty="0">
+                <a:solidFill>
+                  <a:srgbClr val="1C2833"/>
+                </a:solidFill>
+                <a:latin typeface="Georgia" pitchFamily="34" charset="0"/>
+                <a:ea typeface="Georgia" pitchFamily="34" charset="-122"/>
+                <a:cs typeface="Georgia" pitchFamily="34" charset="-120"/>
+              </a:rPr>
+              <a:t>pañca-mahābhūta</a:t>
+            </a:r>
+            <a:pPr algn="l" indent="0" marL="0">
+              <a:lnSpc>
+                <a:spcPts val="1820"/>
+              </a:lnSpc>
+              <a:spcBef>
+                <a:spcPts val="300"/>
+              </a:spcBef>
+              <a:spcAft>
+                <a:spcPts val="300"/>
+              </a:spcAft>
+              <a:buNone/>
+            </a:pPr>
+            <a:r>
+              <a:rPr lang="en-US" sz="1300" dirty="0">
+                <a:solidFill>
+                  <a:srgbClr val="1C2833"/>
+                </a:solidFill>
+                <a:latin typeface="Georgia" pitchFamily="34" charset="0"/>
+                <a:ea typeface="Georgia" pitchFamily="34" charset="-122"/>
+                <a:cs typeface="Georgia" pitchFamily="34" charset="-120"/>
+              </a:rPr>
+              <a:t>) sustain all beings." — paraphrase from Bhāgavata Purāṇa Canto 3.</a:t>
+            </a:r>
+            <a:endParaRPr lang="en-US" sz="1300" dirty="0"/>
+          </a:p>
+        </p:txBody>
+      </p:sp>
+      <p:sp>
+        <p:nvSpPr>
+          <p:cNvPr id="7" name="Text 5"/>
+          <p:cNvSpPr/>
+          <p:nvPr/>
+        </p:nvSpPr>
+        <p:spPr>
+          <a:xfrm>
+            <a:off x="406301" y="1815405"/>
+            <a:ext cx="8498026" cy="213271"/>
+          </a:xfrm>
+          <a:prstGeom prst="rect">
+            <a:avLst/>
+          </a:prstGeom>
+          <a:noFill/>
+          <a:ln/>
+        </p:spPr>
+        <p:txBody>
+          <a:bodyPr wrap="square" lIns="0" tIns="0" rIns="0" bIns="0" rtlCol="0" anchor="t"/>
+          <a:lstStyle/>
+          <a:p>
+            <a:pPr algn="l" indent="0" marL="0">
+              <a:lnSpc>
+                <a:spcPts val="1680"/>
+              </a:lnSpc>
+              <a:spcBef>
+                <a:spcPts val="300"/>
+              </a:spcBef>
               <a:spcAft>
                 <a:spcPts val="300"/>
               </a:spcAft>
@@ -2747,139 +3412,15 @@
                 <a:ea typeface="Arial" pitchFamily="34" charset="-122"/>
                 <a:cs typeface="Arial" pitchFamily="34" charset="-120"/>
               </a:rPr>
-              <a:t> Add a sixth row to the table for "biological diversity" (the </a:t>
-            </a:r>
-            <a:pPr algn="l" indent="0" marL="0">
-              <a:lnSpc>
-                <a:spcPts val="1620"/>
-              </a:lnSpc>
-              <a:spcAft>
-                <a:spcPts val="300"/>
-              </a:spcAft>
-              <a:buNone/>
-            </a:pPr>
-            <a:r>
-              <a:rPr lang="en-US" sz="1200" i="1" dirty="0">
-                <a:solidFill>
-                  <a:srgbClr val="1C2833"/>
-                </a:solidFill>
-                <a:latin typeface="Arial" pitchFamily="34" charset="0"/>
-                <a:ea typeface="Arial" pitchFamily="34" charset="-122"/>
-                <a:cs typeface="Arial" pitchFamily="34" charset="-120"/>
-              </a:rPr>
-              <a:t>jīva-jantu</a:t>
-            </a:r>
-            <a:pPr algn="l" indent="0" marL="0">
-              <a:lnSpc>
-                <a:spcPts val="1620"/>
-              </a:lnSpc>
-              <a:spcAft>
-                <a:spcPts val="300"/>
-              </a:spcAft>
-              <a:buNone/>
-            </a:pPr>
-            <a:r>
-              <a:rPr lang="en-US" sz="1200" dirty="0">
-                <a:solidFill>
-                  <a:srgbClr val="1C2833"/>
-                </a:solidFill>
-                <a:latin typeface="Arial" pitchFamily="34" charset="0"/>
-                <a:ea typeface="Arial" pitchFamily="34" charset="-122"/>
-                <a:cs typeface="Arial" pitchFamily="34" charset="-120"/>
-              </a:rPr>
-              <a:t> — living creatures). Is biodiversity a sixth element? Or is it already covered by </a:t>
-            </a:r>
-            <a:pPr algn="l" indent="0" marL="0">
-              <a:lnSpc>
-                <a:spcPts val="1620"/>
-              </a:lnSpc>
-              <a:spcAft>
-                <a:spcPts val="300"/>
-              </a:spcAft>
-              <a:buNone/>
-            </a:pPr>
-            <a:r>
-              <a:rPr lang="en-US" sz="1200" i="1" dirty="0">
-                <a:solidFill>
-                  <a:srgbClr val="1C2833"/>
-                </a:solidFill>
-                <a:latin typeface="Arial" pitchFamily="34" charset="0"/>
-                <a:ea typeface="Arial" pitchFamily="34" charset="-122"/>
-                <a:cs typeface="Arial" pitchFamily="34" charset="-120"/>
-              </a:rPr>
-              <a:t>pṛthvī</a:t>
-            </a:r>
-            <a:pPr algn="l" indent="0" marL="0">
-              <a:lnSpc>
-                <a:spcPts val="1620"/>
-              </a:lnSpc>
-              <a:spcAft>
-                <a:spcPts val="300"/>
-              </a:spcAft>
-              <a:buNone/>
-            </a:pPr>
-            <a:r>
-              <a:rPr lang="en-US" sz="1200" dirty="0">
-                <a:solidFill>
-                  <a:srgbClr val="1C2833"/>
-                </a:solidFill>
-                <a:latin typeface="Arial" pitchFamily="34" charset="0"/>
-                <a:ea typeface="Arial" pitchFamily="34" charset="-122"/>
-                <a:cs typeface="Arial" pitchFamily="34" charset="-120"/>
-              </a:rPr>
-              <a:t>? Defend either position.</a:t>
+              <a:t>(Cited as paraphrase to satisfy Middle-band citation rule; the verse cluster is SB 3.26.40–51 covered in Module 2.)</a:t>
             </a:r>
             <a:endParaRPr lang="en-US" sz="1200" dirty="0"/>
           </a:p>
-          <a:p>
-            <a:pPr algn="l" marL="342900" indent="-342900">
-              <a:lnSpc>
-                <a:spcPts val="1620"/>
-              </a:lnSpc>
-              <a:spcAft>
-                <a:spcPts val="300"/>
-              </a:spcAft>
-              <a:buSzPct val="100000"/>
-              <a:buChar char="•"/>
-            </a:pPr>
-            <a:r>
-              <a:rPr lang="en-US" sz="1200" b="1" dirty="0">
-                <a:solidFill>
-                  <a:srgbClr val="1C2833"/>
-                </a:solidFill>
-                <a:latin typeface="Arial" pitchFamily="34" charset="0"/>
-                <a:ea typeface="Arial" pitchFamily="34" charset="-122"/>
-                <a:cs typeface="Arial" pitchFamily="34" charset="-120"/>
-              </a:rPr>
-              <a:t>One tier down:</a:t>
-            </a:r>
-            <a:pPr algn="l" indent="0" marL="0">
-              <a:lnSpc>
-                <a:spcPts val="1620"/>
-              </a:lnSpc>
-              <a:spcAft>
-                <a:spcPts val="300"/>
-              </a:spcAft>
-              <a:buNone/>
-            </a:pPr>
-            <a:r>
-              <a:rPr lang="en-US" sz="1200" dirty="0">
-                <a:solidFill>
-                  <a:srgbClr val="1C2833"/>
-                </a:solidFill>
-                <a:latin typeface="Arial" pitchFamily="34" charset="0"/>
-                <a:ea typeface="Arial" pitchFamily="34" charset="-122"/>
-                <a:cs typeface="Arial" pitchFamily="34" charset="-120"/>
-              </a:rPr>
-              <a:t> Stick to two elements that feel obvious to you (e.g. water and air). The others will sink in over the week.</a:t>
-            </a:r>
-            <a:endParaRPr lang="en-US" sz="1200" dirty="0"/>
-          </a:p>
-        </p:txBody>
-      </p:sp>
-      <p:sp>
-        <p:nvSpPr>
-          <p:cNvPr id="5" name="Text 3"/>
+        </p:txBody>
+      </p:sp>
+      <p:sp>
+        <p:nvSpPr>
+          <p:cNvPr id="8" name="Text 6"/>
           <p:cNvSpPr/>
           <p:nvPr/>
         </p:nvSpPr>
@@ -3029,7 +3570,7 @@
                 <a:ea typeface="Georgia" pitchFamily="34" charset="-122"/>
                 <a:cs typeface="Georgia" pitchFamily="34" charset="-120"/>
               </a:rPr>
-              <a:t>Teacher notes</a:t>
+              <a:t>Core (20 min) (cont.)</a:t>
             </a:r>
             <a:endParaRPr lang="en-US" sz="1800" dirty="0"/>
           </a:p>
@@ -3043,8 +3584,8 @@
         </p:nvSpPr>
         <p:spPr>
           <a:xfrm>
-            <a:off x="406301" y="870942"/>
-            <a:ext cx="8498026" cy="1279624"/>
+            <a:off x="634901" y="883593"/>
+            <a:ext cx="8102798" cy="487561"/>
           </a:xfrm>
           <a:prstGeom prst="rect">
             <a:avLst/>
@@ -3056,13 +3597,31 @@
           <a:bodyPr wrap="square" lIns="0" tIns="0" rIns="0" bIns="0" rtlCol="0" anchor="t"/>
           <a:lstStyle/>
           <a:p>
-            <a:pPr algn="l" indent="0" marL="0">
-              <a:lnSpc>
-                <a:spcPts val="1680"/>
-              </a:lnSpc>
-              <a:spcBef>
-                <a:spcPts val="300"/>
-              </a:spcBef>
+            <a:pPr algn="l" marL="342900" indent="-342900">
+              <a:lnSpc>
+                <a:spcPts val="1620"/>
+              </a:lnSpc>
+              <a:spcAft>
+                <a:spcPts val="300"/>
+              </a:spcAft>
+              <a:buSzPct val="100000"/>
+              <a:buChar char="•"/>
+            </a:pPr>
+            <a:r>
+              <a:rPr lang="en-US" sz="1200" b="1" dirty="0">
+                <a:solidFill>
+                  <a:srgbClr val="1C2833"/>
+                </a:solidFill>
+                <a:latin typeface="Arial" pitchFamily="34" charset="0"/>
+                <a:ea typeface="Arial" pitchFamily="34" charset="-122"/>
+                <a:cs typeface="Arial" pitchFamily="34" charset="-120"/>
+              </a:rPr>
+              <a:t>The "give back" idea.</a:t>
+            </a:r>
+            <a:pPr algn="l" indent="0" marL="0">
+              <a:lnSpc>
+                <a:spcPts val="1620"/>
+              </a:lnSpc>
               <a:spcAft>
                 <a:spcPts val="300"/>
               </a:spcAft>
@@ -3077,15 +3636,12 @@
                 <a:ea typeface="Arial" pitchFamily="34" charset="-122"/>
                 <a:cs typeface="Arial" pitchFamily="34" charset="-120"/>
               </a:rPr>
-              <a:t>– Some students (correctly) will say "polluting space doesn't make sense — space is just space." Push: </a:t>
-            </a:r>
-            <a:pPr algn="l" indent="0" marL="0">
-              <a:lnSpc>
-                <a:spcPts val="1680"/>
-              </a:lnSpc>
-              <a:spcBef>
-                <a:spcPts val="300"/>
-              </a:spcBef>
+              <a:t> </a:t>
+            </a:r>
+            <a:pPr algn="l" indent="0" marL="0">
+              <a:lnSpc>
+                <a:spcPts val="1620"/>
+              </a:lnSpc>
               <a:spcAft>
                 <a:spcPts val="300"/>
               </a:spcAft>
@@ -3100,15 +3656,12 @@
                 <a:ea typeface="Arial" pitchFamily="34" charset="-122"/>
                 <a:cs typeface="Arial" pitchFamily="34" charset="-120"/>
               </a:rPr>
-              <a:t>"Have you ever been kept awake by a neighbour's loud TV? Have you been blinded by a glaring street light? That's polluting</a:t>
-            </a:r>
-            <a:pPr algn="l" indent="0" marL="0">
-              <a:lnSpc>
-                <a:spcPts val="1680"/>
-              </a:lnSpc>
-              <a:spcBef>
-                <a:spcPts val="300"/>
-              </a:spcBef>
+              <a:t>"What does a family member do for another? They give, they take, and they don't pollute each other's spaces. We'll come back to this on Day 5 when we read the Bhagavad Gītā on the</a:t>
+            </a:r>
+            <a:pPr algn="l" indent="0" marL="0">
+              <a:lnSpc>
+                <a:spcPts val="1620"/>
+              </a:lnSpc>
               <a:spcAft>
                 <a:spcPts val="300"/>
               </a:spcAft>
@@ -3123,15 +3676,12 @@
                 <a:ea typeface="Arial" pitchFamily="34" charset="-122"/>
                 <a:cs typeface="Arial" pitchFamily="34" charset="-120"/>
               </a:rPr>
-              <a:t>ākāśa</a:t>
-            </a:r>
-            <a:pPr algn="l" indent="0" marL="0">
-              <a:lnSpc>
-                <a:spcPts val="1680"/>
-              </a:lnSpc>
-              <a:spcBef>
-                <a:spcPts val="300"/>
-              </a:spcBef>
+              <a:t>yajña</a:t>
+            </a:r>
+            <a:pPr algn="l" indent="0" marL="0">
+              <a:lnSpc>
+                <a:spcPts val="1620"/>
+              </a:lnSpc>
               <a:spcAft>
                 <a:spcPts val="300"/>
               </a:spcAft>
@@ -3146,76 +3696,7 @@
                 <a:ea typeface="Arial" pitchFamily="34" charset="-122"/>
                 <a:cs typeface="Arial" pitchFamily="34" charset="-120"/>
               </a:rPr>
-              <a:t>."</a:t>
-            </a:r>
-            <a:pPr algn="l" indent="0" marL="0">
-              <a:lnSpc>
-                <a:spcPts val="1680"/>
-              </a:lnSpc>
-              <a:spcBef>
-                <a:spcPts val="300"/>
-              </a:spcBef>
-              <a:spcAft>
-                <a:spcPts val="300"/>
-              </a:spcAft>
-              <a:buNone/>
-            </a:pPr>
-            <a:r>
-              <a:rPr lang="en-US" sz="1200" dirty="0">
-                <a:solidFill>
-                  <a:srgbClr val="1C2833"/>
-                </a:solidFill>
-                <a:latin typeface="Arial" pitchFamily="34" charset="0"/>
-                <a:ea typeface="Arial" pitchFamily="34" charset="-122"/>
-                <a:cs typeface="Arial" pitchFamily="34" charset="-120"/>
-              </a:rPr>
-              <a:t> The five-element frame's strength is that it forces us to think about subtle pollutions too. – Don't let "fire" mean "we should stop using electricity." That's not the point. The point is that the </a:t>
-            </a:r>
-            <a:pPr algn="l" indent="0" marL="0">
-              <a:lnSpc>
-                <a:spcPts val="1680"/>
-              </a:lnSpc>
-              <a:spcBef>
-                <a:spcPts val="300"/>
-              </a:spcBef>
-              <a:spcAft>
-                <a:spcPts val="300"/>
-              </a:spcAft>
-              <a:buNone/>
-            </a:pPr>
-            <a:r>
-              <a:rPr lang="en-US" sz="1200" i="1" dirty="0">
-                <a:solidFill>
-                  <a:srgbClr val="1C2833"/>
-                </a:solidFill>
-                <a:latin typeface="Arial" pitchFamily="34" charset="0"/>
-                <a:ea typeface="Arial" pitchFamily="34" charset="-122"/>
-                <a:cs typeface="Arial" pitchFamily="34" charset="-120"/>
-              </a:rPr>
-              <a:t>tejas</a:t>
-            </a:r>
-            <a:pPr algn="l" indent="0" marL="0">
-              <a:lnSpc>
-                <a:spcPts val="1680"/>
-              </a:lnSpc>
-              <a:spcBef>
-                <a:spcPts val="300"/>
-              </a:spcBef>
-              <a:spcAft>
-                <a:spcPts val="300"/>
-              </a:spcAft>
-              <a:buNone/>
-            </a:pPr>
-            <a:r>
-              <a:rPr lang="en-US" sz="1200" dirty="0">
-                <a:solidFill>
-                  <a:srgbClr val="1C2833"/>
-                </a:solidFill>
-                <a:latin typeface="Arial" pitchFamily="34" charset="0"/>
-                <a:ea typeface="Arial" pitchFamily="34" charset="-122"/>
-                <a:cs typeface="Arial" pitchFamily="34" charset="-120"/>
-              </a:rPr>
-              <a:t> we use is currently mostly from burning fossil fuels; the family relationship is to use less or use cleaner. – Some students will ask about climate change here. Hold them off — Day 8 is the proper place. Today is the framework, not the data.</a:t>
+              <a:t> cycle."</a:t>
             </a:r>
             <a:endParaRPr lang="en-US" sz="1200" dirty="0"/>
           </a:p>
@@ -3373,7 +3854,7 @@
                 <a:ea typeface="Georgia" pitchFamily="34" charset="-122"/>
                 <a:cs typeface="Georgia" pitchFamily="34" charset="-120"/>
               </a:rPr>
-              <a:t>Citation(s) used in this lesson</a:t>
+              <a:t>Activity (15 min) — Element-as-family poster</a:t>
             </a:r>
             <a:endParaRPr lang="en-US" sz="1800" dirty="0"/>
           </a:p>
@@ -3387,8 +3868,8 @@
         </p:nvSpPr>
         <p:spPr>
           <a:xfrm>
-            <a:off x="406301" y="870942"/>
-            <a:ext cx="8498026" cy="436066"/>
+            <a:off x="634901" y="883593"/>
+            <a:ext cx="8102798" cy="1706463"/>
           </a:xfrm>
           <a:prstGeom prst="rect">
             <a:avLst/>
@@ -3400,6 +3881,352 @@
           <a:bodyPr wrap="square" lIns="0" tIns="0" rIns="0" bIns="0" rtlCol="0" anchor="t"/>
           <a:lstStyle/>
           <a:p>
+            <a:pPr algn="l" marL="342900" indent="-342900">
+              <a:lnSpc>
+                <a:spcPts val="1620"/>
+              </a:lnSpc>
+              <a:spcAft>
+                <a:spcPts val="300"/>
+              </a:spcAft>
+              <a:buSzPct val="100000"/>
+              <a:buChar char="•"/>
+            </a:pPr>
+            <a:r>
+              <a:rPr lang="en-US" sz="1200" dirty="0">
+                <a:solidFill>
+                  <a:srgbClr val="1C2833"/>
+                </a:solidFill>
+                <a:latin typeface="Arial" pitchFamily="34" charset="0"/>
+                <a:ea typeface="Arial" pitchFamily="34" charset="-122"/>
+                <a:cs typeface="Arial" pitchFamily="34" charset="-120"/>
+              </a:rPr>
+              <a:t>Group of 4. Each group gets one element-poster.</a:t>
+            </a:r>
+            <a:endParaRPr lang="en-US" sz="1200" dirty="0"/>
+          </a:p>
+          <a:p>
+            <a:pPr algn="l" marL="342900" indent="-342900">
+              <a:lnSpc>
+                <a:spcPts val="1620"/>
+              </a:lnSpc>
+              <a:spcAft>
+                <a:spcPts val="300"/>
+              </a:spcAft>
+              <a:buSzPct val="100000"/>
+              <a:buChar char="•"/>
+            </a:pPr>
+            <a:r>
+              <a:rPr lang="en-US" sz="1200" dirty="0">
+                <a:solidFill>
+                  <a:srgbClr val="1C2833"/>
+                </a:solidFill>
+                <a:latin typeface="Arial" pitchFamily="34" charset="0"/>
+                <a:ea typeface="Arial" pitchFamily="34" charset="-122"/>
+                <a:cs typeface="Arial" pitchFamily="34" charset="-120"/>
+              </a:rPr>
+              <a:t>They fill in:</a:t>
+            </a:r>
+            <a:endParaRPr lang="en-US" sz="1200" dirty="0"/>
+          </a:p>
+          <a:p>
+            <a:pPr algn="l" marL="342900" indent="-342900">
+              <a:lnSpc>
+                <a:spcPts val="1620"/>
+              </a:lnSpc>
+              <a:spcAft>
+                <a:spcPts val="300"/>
+              </a:spcAft>
+              <a:buSzPct val="100000"/>
+              <a:buChar char="•"/>
+            </a:pPr>
+            <a:r>
+              <a:rPr lang="en-US" sz="1200" b="1" dirty="0">
+                <a:solidFill>
+                  <a:srgbClr val="1C2833"/>
+                </a:solidFill>
+                <a:latin typeface="Arial" pitchFamily="34" charset="0"/>
+                <a:ea typeface="Arial" pitchFamily="34" charset="-122"/>
+                <a:cs typeface="Arial" pitchFamily="34" charset="-120"/>
+              </a:rPr>
+              <a:t>One concrete way this element gives to us, near our school.</a:t>
+            </a:r>
+            <a:pPr algn="l" indent="0" marL="0">
+              <a:lnSpc>
+                <a:spcPts val="1620"/>
+              </a:lnSpc>
+              <a:spcAft>
+                <a:spcPts val="300"/>
+              </a:spcAft>
+              <a:buNone/>
+            </a:pPr>
+            <a:r>
+              <a:rPr lang="en-US" sz="1200" dirty="0">
+                <a:solidFill>
+                  <a:srgbClr val="1C2833"/>
+                </a:solidFill>
+                <a:latin typeface="Arial" pitchFamily="34" charset="0"/>
+                <a:ea typeface="Arial" pitchFamily="34" charset="-122"/>
+                <a:cs typeface="Arial" pitchFamily="34" charset="-120"/>
+              </a:rPr>
+              <a:t> (E.g. </a:t>
+            </a:r>
+            <a:pPr algn="l" indent="0" marL="0">
+              <a:lnSpc>
+                <a:spcPts val="1620"/>
+              </a:lnSpc>
+              <a:spcAft>
+                <a:spcPts val="300"/>
+              </a:spcAft>
+              <a:buNone/>
+            </a:pPr>
+            <a:r>
+              <a:rPr lang="en-US" sz="1200" i="1" dirty="0">
+                <a:solidFill>
+                  <a:srgbClr val="1C2833"/>
+                </a:solidFill>
+                <a:latin typeface="Arial" pitchFamily="34" charset="0"/>
+                <a:ea typeface="Arial" pitchFamily="34" charset="-122"/>
+                <a:cs typeface="Arial" pitchFamily="34" charset="-120"/>
+              </a:rPr>
+              <a:t>vāyu</a:t>
+            </a:r>
+            <a:pPr algn="l" indent="0" marL="0">
+              <a:lnSpc>
+                <a:spcPts val="1620"/>
+              </a:lnSpc>
+              <a:spcAft>
+                <a:spcPts val="300"/>
+              </a:spcAft>
+              <a:buNone/>
+            </a:pPr>
+            <a:r>
+              <a:rPr lang="en-US" sz="1200" dirty="0">
+                <a:solidFill>
+                  <a:srgbClr val="1C2833"/>
+                </a:solidFill>
+                <a:latin typeface="Arial" pitchFamily="34" charset="0"/>
+                <a:ea typeface="Arial" pitchFamily="34" charset="-122"/>
+                <a:cs typeface="Arial" pitchFamily="34" charset="-120"/>
+              </a:rPr>
+              <a:t>: the breeze through the open windows.)</a:t>
+            </a:r>
+            <a:endParaRPr lang="en-US" sz="1200" dirty="0"/>
+          </a:p>
+          <a:p>
+            <a:pPr algn="l" marL="342900" indent="-342900">
+              <a:lnSpc>
+                <a:spcPts val="1620"/>
+              </a:lnSpc>
+              <a:spcAft>
+                <a:spcPts val="300"/>
+              </a:spcAft>
+              <a:buSzPct val="100000"/>
+              <a:buChar char="•"/>
+            </a:pPr>
+            <a:r>
+              <a:rPr lang="en-US" sz="1200" b="1" dirty="0">
+                <a:solidFill>
+                  <a:srgbClr val="1C2833"/>
+                </a:solidFill>
+                <a:latin typeface="Arial" pitchFamily="34" charset="0"/>
+                <a:ea typeface="Arial" pitchFamily="34" charset="-122"/>
+                <a:cs typeface="Arial" pitchFamily="34" charset="-120"/>
+              </a:rPr>
+              <a:t>One concrete way we take from this element, near our school.</a:t>
+            </a:r>
+            <a:pPr algn="l" indent="0" marL="0">
+              <a:lnSpc>
+                <a:spcPts val="1620"/>
+              </a:lnSpc>
+              <a:spcAft>
+                <a:spcPts val="300"/>
+              </a:spcAft>
+              <a:buNone/>
+            </a:pPr>
+            <a:r>
+              <a:rPr lang="en-US" sz="1200" dirty="0">
+                <a:solidFill>
+                  <a:srgbClr val="1C2833"/>
+                </a:solidFill>
+                <a:latin typeface="Arial" pitchFamily="34" charset="0"/>
+                <a:ea typeface="Arial" pitchFamily="34" charset="-122"/>
+                <a:cs typeface="Arial" pitchFamily="34" charset="-120"/>
+              </a:rPr>
+              <a:t> (E.g. </a:t>
+            </a:r>
+            <a:pPr algn="l" indent="0" marL="0">
+              <a:lnSpc>
+                <a:spcPts val="1620"/>
+              </a:lnSpc>
+              <a:spcAft>
+                <a:spcPts val="300"/>
+              </a:spcAft>
+              <a:buNone/>
+            </a:pPr>
+            <a:r>
+              <a:rPr lang="en-US" sz="1200" i="1" dirty="0">
+                <a:solidFill>
+                  <a:srgbClr val="1C2833"/>
+                </a:solidFill>
+                <a:latin typeface="Arial" pitchFamily="34" charset="0"/>
+                <a:ea typeface="Arial" pitchFamily="34" charset="-122"/>
+                <a:cs typeface="Arial" pitchFamily="34" charset="-120"/>
+              </a:rPr>
+              <a:t>vāyu</a:t>
+            </a:r>
+            <a:pPr algn="l" indent="0" marL="0">
+              <a:lnSpc>
+                <a:spcPts val="1620"/>
+              </a:lnSpc>
+              <a:spcAft>
+                <a:spcPts val="300"/>
+              </a:spcAft>
+              <a:buNone/>
+            </a:pPr>
+            <a:r>
+              <a:rPr lang="en-US" sz="1200" dirty="0">
+                <a:solidFill>
+                  <a:srgbClr val="1C2833"/>
+                </a:solidFill>
+                <a:latin typeface="Arial" pitchFamily="34" charset="0"/>
+                <a:ea typeface="Arial" pitchFamily="34" charset="-122"/>
+                <a:cs typeface="Arial" pitchFamily="34" charset="-120"/>
+              </a:rPr>
+              <a:t>: the parents' cars idling outside the gate.)</a:t>
+            </a:r>
+            <a:endParaRPr lang="en-US" sz="1200" dirty="0"/>
+          </a:p>
+          <a:p>
+            <a:pPr algn="l" marL="342900" indent="-342900">
+              <a:lnSpc>
+                <a:spcPts val="1620"/>
+              </a:lnSpc>
+              <a:spcAft>
+                <a:spcPts val="300"/>
+              </a:spcAft>
+              <a:buSzPct val="100000"/>
+              <a:buChar char="•"/>
+            </a:pPr>
+            <a:r>
+              <a:rPr lang="en-US" sz="1200" b="1" dirty="0">
+                <a:solidFill>
+                  <a:srgbClr val="1C2833"/>
+                </a:solidFill>
+                <a:latin typeface="Arial" pitchFamily="34" charset="0"/>
+                <a:ea typeface="Arial" pitchFamily="34" charset="-122"/>
+                <a:cs typeface="Arial" pitchFamily="34" charset="-120"/>
+              </a:rPr>
+              <a:t>One concrete way to give back to this element, near our school.</a:t>
+            </a:r>
+            <a:pPr algn="l" indent="0" marL="0">
+              <a:lnSpc>
+                <a:spcPts val="1620"/>
+              </a:lnSpc>
+              <a:spcAft>
+                <a:spcPts val="300"/>
+              </a:spcAft>
+              <a:buNone/>
+            </a:pPr>
+            <a:r>
+              <a:rPr lang="en-US" sz="1200" dirty="0">
+                <a:solidFill>
+                  <a:srgbClr val="1C2833"/>
+                </a:solidFill>
+                <a:latin typeface="Arial" pitchFamily="34" charset="0"/>
+                <a:ea typeface="Arial" pitchFamily="34" charset="-122"/>
+                <a:cs typeface="Arial" pitchFamily="34" charset="-120"/>
+              </a:rPr>
+              <a:t> (E.g. </a:t>
+            </a:r>
+            <a:pPr algn="l" indent="0" marL="0">
+              <a:lnSpc>
+                <a:spcPts val="1620"/>
+              </a:lnSpc>
+              <a:spcAft>
+                <a:spcPts val="300"/>
+              </a:spcAft>
+              <a:buNone/>
+            </a:pPr>
+            <a:r>
+              <a:rPr lang="en-US" sz="1200" i="1" dirty="0">
+                <a:solidFill>
+                  <a:srgbClr val="1C2833"/>
+                </a:solidFill>
+                <a:latin typeface="Arial" pitchFamily="34" charset="0"/>
+                <a:ea typeface="Arial" pitchFamily="34" charset="-122"/>
+                <a:cs typeface="Arial" pitchFamily="34" charset="-120"/>
+              </a:rPr>
+              <a:t>vāyu</a:t>
+            </a:r>
+            <a:pPr algn="l" indent="0" marL="0">
+              <a:lnSpc>
+                <a:spcPts val="1620"/>
+              </a:lnSpc>
+              <a:spcAft>
+                <a:spcPts val="300"/>
+              </a:spcAft>
+              <a:buNone/>
+            </a:pPr>
+            <a:r>
+              <a:rPr lang="en-US" sz="1200" dirty="0">
+                <a:solidFill>
+                  <a:srgbClr val="1C2833"/>
+                </a:solidFill>
+                <a:latin typeface="Arial" pitchFamily="34" charset="0"/>
+                <a:ea typeface="Arial" pitchFamily="34" charset="-122"/>
+                <a:cs typeface="Arial" pitchFamily="34" charset="-120"/>
+              </a:rPr>
+              <a:t>: ask parents to switch off engines during pick-up.)</a:t>
+            </a:r>
+            <a:endParaRPr lang="en-US" sz="1200" dirty="0"/>
+          </a:p>
+          <a:p>
+            <a:pPr algn="l" marL="342900" indent="-342900">
+              <a:lnSpc>
+                <a:spcPts val="1620"/>
+              </a:lnSpc>
+              <a:spcAft>
+                <a:spcPts val="300"/>
+              </a:spcAft>
+              <a:buSzPct val="100000"/>
+              <a:buChar char="•"/>
+            </a:pPr>
+            <a:r>
+              <a:rPr lang="en-US" sz="1200" dirty="0">
+                <a:solidFill>
+                  <a:srgbClr val="1C2833"/>
+                </a:solidFill>
+                <a:latin typeface="Arial" pitchFamily="34" charset="0"/>
+                <a:ea typeface="Arial" pitchFamily="34" charset="-122"/>
+                <a:cs typeface="Arial" pitchFamily="34" charset="-120"/>
+              </a:rPr>
+              <a:t>Posters go up on the wall. They stay up for the rest of the module.</a:t>
+            </a:r>
+            <a:endParaRPr lang="en-US" sz="1200" dirty="0"/>
+          </a:p>
+        </p:txBody>
+      </p:sp>
+      <p:sp>
+        <p:nvSpPr>
+          <p:cNvPr id="5" name="Text 3"/>
+          <p:cNvSpPr/>
+          <p:nvPr/>
+        </p:nvSpPr>
+        <p:spPr>
+          <a:xfrm>
+            <a:off x="406301" y="4434929"/>
+            <a:ext cx="8498026" cy="213271"/>
+          </a:xfrm>
+          <a:prstGeom prst="rect">
+            <a:avLst/>
+          </a:prstGeom>
+          <a:noFill/>
+          <a:ln/>
+        </p:spPr>
+        <p:txBody>
+          <a:bodyPr wrap="square" lIns="0" tIns="0" rIns="0" bIns="0" rtlCol="0" anchor="t"/>
+          <a:lstStyle/>
+          <a:p>
             <a:pPr algn="l" indent="0" marL="0">
               <a:lnSpc>
                 <a:spcPts val="1680"/>
@@ -3421,8 +4248,273 @@
                 <a:ea typeface="Arial" pitchFamily="34" charset="-122"/>
                 <a:cs typeface="Arial" pitchFamily="34" charset="-120"/>
               </a:rPr>
-              <a:t>– Paraphrase of Bhāgavata Purāṇa Canto 3 element-cosmology (SB 3.26.40–51) — sourced from Module 2's RAG cache, not re-quoted in full here. – See </a:t>
-            </a:r>
+              <a:t>Middle ·  · IKS Curriculum</a:t>
+            </a:r>
+            <a:endParaRPr lang="en-US" sz="1200" dirty="0"/>
+          </a:p>
+        </p:txBody>
+      </p:sp>
+    </p:spTree>
+  </p:cSld>
+  <p:clrMapOvr>
+    <a:masterClrMapping/>
+  </p:clrMapOvr>
+</p:sld>
+</file>
+
+<file path=ppt/slides/slide14.xml><?xml version="1.0" encoding="utf-8"?>
+<p:sld xmlns:a="http://schemas.openxmlformats.org/drawingml/2006/main" xmlns:r="http://schemas.openxmlformats.org/officeDocument/2006/relationships" xmlns:p="http://schemas.openxmlformats.org/presentationml/2006/main">
+  <p:cSld name="Slide 14">
+    <p:bg>
+      <p:bgPr>
+        <a:solidFill>
+          <a:srgbClr val="FFFFFF"/>
+        </a:solidFill>
+      </p:bgPr>
+    </p:bg>
+    <p:spTree>
+      <p:nvGrpSpPr>
+        <p:cNvPr id="1" name=""/>
+        <p:cNvGrpSpPr/>
+        <p:nvPr/>
+      </p:nvGrpSpPr>
+      <p:grpSpPr>
+        <a:xfrm>
+          <a:off x="0" y="0"/>
+          <a:ext cx="0" cy="0"/>
+          <a:chOff x="0" y="0"/>
+          <a:chExt cx="0" cy="0"/>
+        </a:xfrm>
+      </p:grpSpPr>
+      <p:sp>
+        <p:nvSpPr>
+          <p:cNvPr id="2" name="Text 0"/>
+          <p:cNvSpPr/>
+          <p:nvPr/>
+        </p:nvSpPr>
+        <p:spPr>
+          <a:xfrm>
+            <a:off x="0" y="0"/>
+            <a:ext cx="9144000" cy="101501"/>
+          </a:xfrm>
+          <a:prstGeom prst="rect">
+            <a:avLst/>
+          </a:prstGeom>
+          <a:solidFill>
+            <a:srgbClr val="277884"/>
+          </a:solidFill>
+          <a:ln/>
+        </p:spPr>
+        <p:txBody>
+          <a:bodyPr wrap="square" rtlCol="0" anchor="ctr"/>
+          <a:lstStyle/>
+          <a:p>
+            <a:pPr indent="0" marL="0">
+              <a:buNone/>
+            </a:pPr>
+            <a:endParaRPr lang="en-US" dirty="0"/>
+          </a:p>
+        </p:txBody>
+      </p:sp>
+      <p:sp>
+        <p:nvSpPr>
+          <p:cNvPr id="3" name="Text 1"/>
+          <p:cNvSpPr/>
+          <p:nvPr/>
+        </p:nvSpPr>
+        <p:spPr>
+          <a:xfrm>
+            <a:off x="406301" y="457051"/>
+            <a:ext cx="8498026" cy="274290"/>
+          </a:xfrm>
+          <a:prstGeom prst="rect">
+            <a:avLst/>
+          </a:prstGeom>
+          <a:noFill/>
+          <a:ln/>
+        </p:spPr>
+        <p:txBody>
+          <a:bodyPr wrap="square" lIns="0" tIns="0" rIns="0" bIns="0" rtlCol="0" anchor="t"/>
+          <a:lstStyle/>
+          <a:p>
+            <a:pPr algn="l" indent="0" marL="0">
+              <a:lnSpc>
+                <a:spcPts val="2160"/>
+              </a:lnSpc>
+              <a:spcBef>
+                <a:spcPts val="600"/>
+              </a:spcBef>
+              <a:spcAft>
+                <a:spcPts val="800"/>
+              </a:spcAft>
+              <a:buNone/>
+            </a:pPr>
+            <a:r>
+              <a:rPr lang="en-US" sz="1800" b="1" dirty="0">
+                <a:solidFill>
+                  <a:srgbClr val="FE4447"/>
+                </a:solidFill>
+                <a:latin typeface="Georgia" pitchFamily="34" charset="0"/>
+                <a:ea typeface="Georgia" pitchFamily="34" charset="-122"/>
+                <a:cs typeface="Georgia" pitchFamily="34" charset="-120"/>
+              </a:rPr>
+              <a:t>Wrap-up (5 min)</a:t>
+            </a:r>
+            <a:endParaRPr lang="en-US" sz="1800" dirty="0"/>
+          </a:p>
+        </p:txBody>
+      </p:sp>
+      <p:sp>
+        <p:nvSpPr>
+          <p:cNvPr id="4" name="Text 2"/>
+          <p:cNvSpPr/>
+          <p:nvPr/>
+        </p:nvSpPr>
+        <p:spPr>
+          <a:xfrm>
+            <a:off x="634901" y="883593"/>
+            <a:ext cx="8102798" cy="937022"/>
+          </a:xfrm>
+          <a:prstGeom prst="rect">
+            <a:avLst/>
+          </a:prstGeom>
+          <a:noFill/>
+          <a:ln/>
+        </p:spPr>
+        <p:txBody>
+          <a:bodyPr wrap="square" lIns="0" tIns="0" rIns="0" bIns="0" rtlCol="0" anchor="t"/>
+          <a:lstStyle/>
+          <a:p>
+            <a:pPr algn="l" marL="342900" indent="-342900">
+              <a:lnSpc>
+                <a:spcPts val="1620"/>
+              </a:lnSpc>
+              <a:spcAft>
+                <a:spcPts val="300"/>
+              </a:spcAft>
+              <a:buSzPct val="100000"/>
+              <a:buChar char="•"/>
+            </a:pPr>
+            <a:r>
+              <a:rPr lang="en-US" sz="1200" b="1" dirty="0">
+                <a:solidFill>
+                  <a:srgbClr val="1C2833"/>
+                </a:solidFill>
+                <a:latin typeface="Arial" pitchFamily="34" charset="0"/>
+                <a:ea typeface="Arial" pitchFamily="34" charset="-122"/>
+                <a:cs typeface="Arial" pitchFamily="34" charset="-120"/>
+              </a:rPr>
+              <a:t>Exit ticket.</a:t>
+            </a:r>
+            <a:pPr algn="l" indent="0" marL="0">
+              <a:lnSpc>
+                <a:spcPts val="1620"/>
+              </a:lnSpc>
+              <a:spcAft>
+                <a:spcPts val="300"/>
+              </a:spcAft>
+              <a:buNone/>
+            </a:pPr>
+            <a:r>
+              <a:rPr lang="en-US" sz="1200" dirty="0">
+                <a:solidFill>
+                  <a:srgbClr val="1C2833"/>
+                </a:solidFill>
+                <a:latin typeface="Arial" pitchFamily="34" charset="0"/>
+                <a:ea typeface="Arial" pitchFamily="34" charset="-122"/>
+                <a:cs typeface="Arial" pitchFamily="34" charset="-120"/>
+              </a:rPr>
+              <a:t> Each student writes on a slip: </a:t>
+            </a:r>
+            <a:pPr algn="l" indent="0" marL="0">
+              <a:lnSpc>
+                <a:spcPts val="1620"/>
+              </a:lnSpc>
+              <a:spcAft>
+                <a:spcPts val="300"/>
+              </a:spcAft>
+              <a:buNone/>
+            </a:pPr>
+            <a:r>
+              <a:rPr lang="en-US" sz="1200" i="1" dirty="0">
+                <a:solidFill>
+                  <a:srgbClr val="1C2833"/>
+                </a:solidFill>
+                <a:latin typeface="Arial" pitchFamily="34" charset="0"/>
+                <a:ea typeface="Arial" pitchFamily="34" charset="-122"/>
+                <a:cs typeface="Arial" pitchFamily="34" charset="-120"/>
+              </a:rPr>
+              <a:t>"The element I will pay closest attention to this week is _______, because _______."</a:t>
+            </a:r>
+            <a:endParaRPr lang="en-US" sz="1200" dirty="0"/>
+          </a:p>
+          <a:p>
+            <a:pPr algn="l" marL="342900" indent="-342900">
+              <a:lnSpc>
+                <a:spcPts val="1620"/>
+              </a:lnSpc>
+              <a:spcAft>
+                <a:spcPts val="300"/>
+              </a:spcAft>
+              <a:buSzPct val="100000"/>
+              <a:buChar char="•"/>
+            </a:pPr>
+            <a:r>
+              <a:rPr lang="en-US" sz="1200" dirty="0">
+                <a:solidFill>
+                  <a:srgbClr val="1C2833"/>
+                </a:solidFill>
+                <a:latin typeface="Arial" pitchFamily="34" charset="0"/>
+                <a:ea typeface="Arial" pitchFamily="34" charset="-122"/>
+                <a:cs typeface="Arial" pitchFamily="34" charset="-120"/>
+              </a:rPr>
+              <a:t>Preview Day 3: </a:t>
+            </a:r>
+            <a:pPr algn="l" indent="0" marL="0">
+              <a:lnSpc>
+                <a:spcPts val="1620"/>
+              </a:lnSpc>
+              <a:spcAft>
+                <a:spcPts val="300"/>
+              </a:spcAft>
+              <a:buNone/>
+            </a:pPr>
+            <a:r>
+              <a:rPr lang="en-US" sz="1200" i="1" dirty="0">
+                <a:solidFill>
+                  <a:srgbClr val="1C2833"/>
+                </a:solidFill>
+                <a:latin typeface="Arial" pitchFamily="34" charset="0"/>
+                <a:ea typeface="Arial" pitchFamily="34" charset="-122"/>
+                <a:cs typeface="Arial" pitchFamily="34" charset="-120"/>
+              </a:rPr>
+              <a:t>"Tomorrow we look at the element that has had the most religious attention in India — water, especially rivers."</a:t>
+            </a:r>
+            <a:endParaRPr lang="en-US" sz="1200" dirty="0"/>
+          </a:p>
+        </p:txBody>
+      </p:sp>
+      <p:sp>
+        <p:nvSpPr>
+          <p:cNvPr id="5" name="Text 3"/>
+          <p:cNvSpPr/>
+          <p:nvPr/>
+        </p:nvSpPr>
+        <p:spPr>
+          <a:xfrm>
+            <a:off x="406301" y="4434929"/>
+            <a:ext cx="8498026" cy="213271"/>
+          </a:xfrm>
+          <a:prstGeom prst="rect">
+            <a:avLst/>
+          </a:prstGeom>
+          <a:noFill/>
+          <a:ln/>
+        </p:spPr>
+        <p:txBody>
+          <a:bodyPr wrap="square" lIns="0" tIns="0" rIns="0" bIns="0" rtlCol="0" anchor="t"/>
+          <a:lstStyle/>
+          <a:p>
             <a:pPr algn="l" indent="0" marL="0">
               <a:lnSpc>
                 <a:spcPts val="1680"/>
@@ -3444,15 +4536,1767 @@
                 <a:ea typeface="Arial" pitchFamily="34" charset="-122"/>
                 <a:cs typeface="Arial" pitchFamily="34" charset="-120"/>
               </a:rPr>
+              <a:t>Middle ·  · IKS Curriculum</a:t>
+            </a:r>
+            <a:endParaRPr lang="en-US" sz="1200" dirty="0"/>
+          </a:p>
+        </p:txBody>
+      </p:sp>
+    </p:spTree>
+  </p:cSld>
+  <p:clrMapOvr>
+    <a:masterClrMapping/>
+  </p:clrMapOvr>
+</p:sld>
+</file>
+
+<file path=ppt/slides/slide15.xml><?xml version="1.0" encoding="utf-8"?>
+<p:sld xmlns:a="http://schemas.openxmlformats.org/drawingml/2006/main" xmlns:r="http://schemas.openxmlformats.org/officeDocument/2006/relationships" xmlns:p="http://schemas.openxmlformats.org/presentationml/2006/main">
+  <p:cSld name="Slide 15">
+    <p:bg>
+      <p:bgPr>
+        <a:solidFill>
+          <a:srgbClr val="FFFFFF"/>
+        </a:solidFill>
+      </p:bgPr>
+    </p:bg>
+    <p:spTree>
+      <p:nvGrpSpPr>
+        <p:cNvPr id="1" name=""/>
+        <p:cNvGrpSpPr/>
+        <p:nvPr/>
+      </p:nvGrpSpPr>
+      <p:grpSpPr>
+        <a:xfrm>
+          <a:off x="0" y="0"/>
+          <a:ext cx="0" cy="0"/>
+          <a:chOff x="0" y="0"/>
+          <a:chExt cx="0" cy="0"/>
+        </a:xfrm>
+      </p:grpSpPr>
+      <p:sp>
+        <p:nvSpPr>
+          <p:cNvPr id="2" name="Text 0"/>
+          <p:cNvSpPr/>
+          <p:nvPr/>
+        </p:nvSpPr>
+        <p:spPr>
+          <a:xfrm>
+            <a:off x="0" y="0"/>
+            <a:ext cx="9144000" cy="101501"/>
+          </a:xfrm>
+          <a:prstGeom prst="rect">
+            <a:avLst/>
+          </a:prstGeom>
+          <a:solidFill>
+            <a:srgbClr val="277884"/>
+          </a:solidFill>
+          <a:ln/>
+        </p:spPr>
+        <p:txBody>
+          <a:bodyPr wrap="square" rtlCol="0" anchor="ctr"/>
+          <a:lstStyle/>
+          <a:p>
+            <a:pPr indent="0" marL="0">
+              <a:buNone/>
+            </a:pPr>
+            <a:endParaRPr lang="en-US" dirty="0"/>
+          </a:p>
+        </p:txBody>
+      </p:sp>
+      <p:sp>
+        <p:nvSpPr>
+          <p:cNvPr id="3" name="Text 1"/>
+          <p:cNvSpPr/>
+          <p:nvPr/>
+        </p:nvSpPr>
+        <p:spPr>
+          <a:xfrm>
+            <a:off x="406301" y="457051"/>
+            <a:ext cx="8498026" cy="274290"/>
+          </a:xfrm>
+          <a:prstGeom prst="rect">
+            <a:avLst/>
+          </a:prstGeom>
+          <a:noFill/>
+          <a:ln/>
+        </p:spPr>
+        <p:txBody>
+          <a:bodyPr wrap="square" lIns="0" tIns="0" rIns="0" bIns="0" rtlCol="0" anchor="t"/>
+          <a:lstStyle/>
+          <a:p>
+            <a:pPr algn="l" indent="0" marL="0">
+              <a:lnSpc>
+                <a:spcPts val="2160"/>
+              </a:lnSpc>
+              <a:spcBef>
+                <a:spcPts val="600"/>
+              </a:spcBef>
+              <a:spcAft>
+                <a:spcPts val="800"/>
+              </a:spcAft>
+              <a:buNone/>
+            </a:pPr>
+            <a:r>
+              <a:rPr lang="en-US" sz="1800" b="1" dirty="0">
+                <a:solidFill>
+                  <a:srgbClr val="FE4447"/>
+                </a:solidFill>
+                <a:latin typeface="Georgia" pitchFamily="34" charset="0"/>
+                <a:ea typeface="Georgia" pitchFamily="34" charset="-122"/>
+                <a:cs typeface="Georgia" pitchFamily="34" charset="-120"/>
+              </a:rPr>
+              <a:t>Student-facing content</a:t>
+            </a:r>
+            <a:endParaRPr lang="en-US" sz="1800" dirty="0"/>
+          </a:p>
+        </p:txBody>
+      </p:sp>
+      <p:sp>
+        <p:nvSpPr>
+          <p:cNvPr id="4" name="Text 2"/>
+          <p:cNvSpPr/>
+          <p:nvPr/>
+        </p:nvSpPr>
+        <p:spPr>
+          <a:xfrm>
+            <a:off x="406301" y="883593"/>
+            <a:ext cx="8331398" cy="2305050"/>
+          </a:xfrm>
+          <a:prstGeom prst="rect">
+            <a:avLst/>
+          </a:prstGeom>
+          <a:solidFill>
+            <a:srgbClr val="F4F8F9"/>
+          </a:solidFill>
+          <a:ln/>
+        </p:spPr>
+        <p:txBody>
+          <a:bodyPr wrap="square" rtlCol="0" anchor="ctr"/>
+          <a:lstStyle/>
+          <a:p>
+            <a:pPr indent="0" marL="0">
+              <a:buNone/>
+            </a:pPr>
+            <a:endParaRPr lang="en-US" dirty="0"/>
+          </a:p>
+        </p:txBody>
+      </p:sp>
+      <p:sp>
+        <p:nvSpPr>
+          <p:cNvPr id="5" name="Shape 3"/>
+          <p:cNvSpPr/>
+          <p:nvPr/>
+        </p:nvSpPr>
+        <p:spPr>
+          <a:xfrm>
+            <a:off x="434876" y="883593"/>
+            <a:ext cx="0" cy="2305050"/>
+          </a:xfrm>
+          <a:prstGeom prst="line">
+            <a:avLst/>
+          </a:prstGeom>
+          <a:noFill/>
+          <a:ln w="57150">
+            <a:solidFill>
+              <a:srgbClr val="FE4447"/>
+            </a:solidFill>
+            <a:prstDash val="solid"/>
+          </a:ln>
+        </p:spPr>
+      </p:sp>
+      <p:sp>
+        <p:nvSpPr>
+          <p:cNvPr id="6" name="Text 4"/>
+          <p:cNvSpPr/>
+          <p:nvPr/>
+        </p:nvSpPr>
+        <p:spPr>
+          <a:xfrm>
+            <a:off x="692051" y="1074093"/>
+            <a:ext cx="7973389" cy="230981"/>
+          </a:xfrm>
+          <a:prstGeom prst="rect">
+            <a:avLst/>
+          </a:prstGeom>
+          <a:noFill/>
+          <a:ln/>
+        </p:spPr>
+        <p:txBody>
+          <a:bodyPr wrap="square" lIns="0" tIns="0" rIns="0" bIns="0" rtlCol="0" anchor="t"/>
+          <a:lstStyle/>
+          <a:p>
+            <a:pPr algn="l" indent="0" marL="0">
+              <a:lnSpc>
+                <a:spcPts val="1820"/>
+              </a:lnSpc>
+              <a:spcBef>
+                <a:spcPts val="300"/>
+              </a:spcBef>
+              <a:spcAft>
+                <a:spcPts val="300"/>
+              </a:spcAft>
+              <a:buNone/>
+            </a:pPr>
+            <a:r>
+              <a:rPr lang="en-US" sz="1300" b="1" i="1" dirty="0">
+                <a:solidFill>
+                  <a:srgbClr val="1C2833"/>
+                </a:solidFill>
+                <a:latin typeface="Georgia" pitchFamily="34" charset="0"/>
+                <a:ea typeface="Georgia" pitchFamily="34" charset="-122"/>
+                <a:cs typeface="Georgia" pitchFamily="34" charset="-120"/>
+              </a:rPr>
+              <a:t>The five elements as family members.</a:t>
+            </a:r>
+            <a:endParaRPr lang="en-US" sz="1300" dirty="0"/>
+          </a:p>
+        </p:txBody>
+      </p:sp>
+      <p:sp>
+        <p:nvSpPr>
+          <p:cNvPr id="7" name="Text 5"/>
+          <p:cNvSpPr/>
+          <p:nvPr/>
+        </p:nvSpPr>
+        <p:spPr>
+          <a:xfrm>
+            <a:off x="692051" y="1343174"/>
+            <a:ext cx="7973389" cy="1154906"/>
+          </a:xfrm>
+          <a:prstGeom prst="rect">
+            <a:avLst/>
+          </a:prstGeom>
+          <a:noFill/>
+          <a:ln/>
+        </p:spPr>
+        <p:txBody>
+          <a:bodyPr wrap="square" lIns="0" tIns="0" rIns="0" bIns="0" rtlCol="0" anchor="t"/>
+          <a:lstStyle/>
+          <a:p>
+            <a:pPr algn="l" indent="0" marL="0">
+              <a:lnSpc>
+                <a:spcPts val="1820"/>
+              </a:lnSpc>
+              <a:spcBef>
+                <a:spcPts val="300"/>
+              </a:spcBef>
+              <a:spcAft>
+                <a:spcPts val="300"/>
+              </a:spcAft>
+              <a:buNone/>
+            </a:pPr>
+            <a:r>
+              <a:rPr lang="en-US" sz="1300" dirty="0">
+                <a:solidFill>
+                  <a:srgbClr val="1C2833"/>
+                </a:solidFill>
+                <a:latin typeface="Georgia" pitchFamily="34" charset="0"/>
+                <a:ea typeface="Georgia" pitchFamily="34" charset="-122"/>
+                <a:cs typeface="Georgia" pitchFamily="34" charset="-120"/>
+              </a:rPr>
+              <a:t>| Element | Gives us | We owe it | |---------|----------|-----------| | </a:t>
+            </a:r>
+            <a:pPr algn="l" indent="0" marL="0">
+              <a:lnSpc>
+                <a:spcPts val="1820"/>
+              </a:lnSpc>
+              <a:spcBef>
+                <a:spcPts val="300"/>
+              </a:spcBef>
+              <a:spcAft>
+                <a:spcPts val="300"/>
+              </a:spcAft>
+              <a:buNone/>
+            </a:pPr>
+            <a:r>
+              <a:rPr lang="en-US" sz="1300" i="1" dirty="0">
+                <a:solidFill>
+                  <a:srgbClr val="1C2833"/>
+                </a:solidFill>
+                <a:latin typeface="Georgia" pitchFamily="34" charset="0"/>
+                <a:ea typeface="Georgia" pitchFamily="34" charset="-122"/>
+                <a:cs typeface="Georgia" pitchFamily="34" charset="-120"/>
+              </a:rPr>
+              <a:t>pṛthvī</a:t>
+            </a:r>
+            <a:pPr algn="l" indent="0" marL="0">
+              <a:lnSpc>
+                <a:spcPts val="1820"/>
+              </a:lnSpc>
+              <a:spcBef>
+                <a:spcPts val="300"/>
+              </a:spcBef>
+              <a:spcAft>
+                <a:spcPts val="300"/>
+              </a:spcAft>
+              <a:buNone/>
+            </a:pPr>
+            <a:r>
+              <a:rPr lang="en-US" sz="1300" dirty="0">
+                <a:solidFill>
+                  <a:srgbClr val="1C2833"/>
+                </a:solidFill>
+                <a:latin typeface="Georgia" pitchFamily="34" charset="0"/>
+                <a:ea typeface="Georgia" pitchFamily="34" charset="-122"/>
+                <a:cs typeface="Georgia" pitchFamily="34" charset="-120"/>
+              </a:rPr>
+              <a:t> (earth) | Food, ground, minerals | Less waste, less concrete, more compost | | </a:t>
+            </a:r>
+            <a:pPr algn="l" indent="0" marL="0">
+              <a:lnSpc>
+                <a:spcPts val="1820"/>
+              </a:lnSpc>
+              <a:spcBef>
+                <a:spcPts val="300"/>
+              </a:spcBef>
+              <a:spcAft>
+                <a:spcPts val="300"/>
+              </a:spcAft>
+              <a:buNone/>
+            </a:pPr>
+            <a:r>
+              <a:rPr lang="en-US" sz="1300" i="1" dirty="0">
+                <a:solidFill>
+                  <a:srgbClr val="1C2833"/>
+                </a:solidFill>
+                <a:latin typeface="Georgia" pitchFamily="34" charset="0"/>
+                <a:ea typeface="Georgia" pitchFamily="34" charset="-122"/>
+                <a:cs typeface="Georgia" pitchFamily="34" charset="-120"/>
+              </a:rPr>
+              <a:t>ap</a:t>
+            </a:r>
+            <a:pPr algn="l" indent="0" marL="0">
+              <a:lnSpc>
+                <a:spcPts val="1820"/>
+              </a:lnSpc>
+              <a:spcBef>
+                <a:spcPts val="300"/>
+              </a:spcBef>
+              <a:spcAft>
+                <a:spcPts val="300"/>
+              </a:spcAft>
+              <a:buNone/>
+            </a:pPr>
+            <a:r>
+              <a:rPr lang="en-US" sz="1300" dirty="0">
+                <a:solidFill>
+                  <a:srgbClr val="1C2833"/>
+                </a:solidFill>
+                <a:latin typeface="Georgia" pitchFamily="34" charset="0"/>
+                <a:ea typeface="Georgia" pitchFamily="34" charset="-122"/>
+                <a:cs typeface="Georgia" pitchFamily="34" charset="-120"/>
+              </a:rPr>
+              <a:t> (water) | Drink, growth, cleanness | Less waste, less pollution | | </a:t>
+            </a:r>
+            <a:pPr algn="l" indent="0" marL="0">
+              <a:lnSpc>
+                <a:spcPts val="1820"/>
+              </a:lnSpc>
+              <a:spcBef>
+                <a:spcPts val="300"/>
+              </a:spcBef>
+              <a:spcAft>
+                <a:spcPts val="300"/>
+              </a:spcAft>
+              <a:buNone/>
+            </a:pPr>
+            <a:r>
+              <a:rPr lang="en-US" sz="1300" i="1" dirty="0">
+                <a:solidFill>
+                  <a:srgbClr val="1C2833"/>
+                </a:solidFill>
+                <a:latin typeface="Georgia" pitchFamily="34" charset="0"/>
+                <a:ea typeface="Georgia" pitchFamily="34" charset="-122"/>
+                <a:cs typeface="Georgia" pitchFamily="34" charset="-120"/>
+              </a:rPr>
+              <a:t>tejas</a:t>
+            </a:r>
+            <a:pPr algn="l" indent="0" marL="0">
+              <a:lnSpc>
+                <a:spcPts val="1820"/>
+              </a:lnSpc>
+              <a:spcBef>
+                <a:spcPts val="300"/>
+              </a:spcBef>
+              <a:spcAft>
+                <a:spcPts val="300"/>
+              </a:spcAft>
+              <a:buNone/>
+            </a:pPr>
+            <a:r>
+              <a:rPr lang="en-US" sz="1300" dirty="0">
+                <a:solidFill>
+                  <a:srgbClr val="1C2833"/>
+                </a:solidFill>
+                <a:latin typeface="Georgia" pitchFamily="34" charset="0"/>
+                <a:ea typeface="Georgia" pitchFamily="34" charset="-122"/>
+                <a:cs typeface="Georgia" pitchFamily="34" charset="-120"/>
+              </a:rPr>
+              <a:t> (fire / energy) | Warmth, light, cooking | Less fossil fuel, more efficiency | | </a:t>
+            </a:r>
+            <a:pPr algn="l" indent="0" marL="0">
+              <a:lnSpc>
+                <a:spcPts val="1820"/>
+              </a:lnSpc>
+              <a:spcBef>
+                <a:spcPts val="300"/>
+              </a:spcBef>
+              <a:spcAft>
+                <a:spcPts val="300"/>
+              </a:spcAft>
+              <a:buNone/>
+            </a:pPr>
+            <a:r>
+              <a:rPr lang="en-US" sz="1300" i="1" dirty="0">
+                <a:solidFill>
+                  <a:srgbClr val="1C2833"/>
+                </a:solidFill>
+                <a:latin typeface="Georgia" pitchFamily="34" charset="0"/>
+                <a:ea typeface="Georgia" pitchFamily="34" charset="-122"/>
+                <a:cs typeface="Georgia" pitchFamily="34" charset="-120"/>
+              </a:rPr>
+              <a:t>vāyu</a:t>
+            </a:r>
+            <a:pPr algn="l" indent="0" marL="0">
+              <a:lnSpc>
+                <a:spcPts val="1820"/>
+              </a:lnSpc>
+              <a:spcBef>
+                <a:spcPts val="300"/>
+              </a:spcBef>
+              <a:spcAft>
+                <a:spcPts val="300"/>
+              </a:spcAft>
+              <a:buNone/>
+            </a:pPr>
+            <a:r>
+              <a:rPr lang="en-US" sz="1300" dirty="0">
+                <a:solidFill>
+                  <a:srgbClr val="1C2833"/>
+                </a:solidFill>
+                <a:latin typeface="Georgia" pitchFamily="34" charset="0"/>
+                <a:ea typeface="Georgia" pitchFamily="34" charset="-122"/>
+                <a:cs typeface="Georgia" pitchFamily="34" charset="-120"/>
+              </a:rPr>
+              <a:t> (air) | Breath, weather | Less burning, fewer engines | | </a:t>
+            </a:r>
+            <a:pPr algn="l" indent="0" marL="0">
+              <a:lnSpc>
+                <a:spcPts val="1820"/>
+              </a:lnSpc>
+              <a:spcBef>
+                <a:spcPts val="300"/>
+              </a:spcBef>
+              <a:spcAft>
+                <a:spcPts val="300"/>
+              </a:spcAft>
+              <a:buNone/>
+            </a:pPr>
+            <a:r>
+              <a:rPr lang="en-US" sz="1300" i="1" dirty="0">
+                <a:solidFill>
+                  <a:srgbClr val="1C2833"/>
+                </a:solidFill>
+                <a:latin typeface="Georgia" pitchFamily="34" charset="0"/>
+                <a:ea typeface="Georgia" pitchFamily="34" charset="-122"/>
+                <a:cs typeface="Georgia" pitchFamily="34" charset="-120"/>
+              </a:rPr>
+              <a:t>ākāśa</a:t>
+            </a:r>
+            <a:pPr algn="l" indent="0" marL="0">
+              <a:lnSpc>
+                <a:spcPts val="1820"/>
+              </a:lnSpc>
+              <a:spcBef>
+                <a:spcPts val="300"/>
+              </a:spcBef>
+              <a:spcAft>
+                <a:spcPts val="300"/>
+              </a:spcAft>
+              <a:buNone/>
+            </a:pPr>
+            <a:r>
+              <a:rPr lang="en-US" sz="1300" dirty="0">
+                <a:solidFill>
+                  <a:srgbClr val="1C2833"/>
+                </a:solidFill>
+                <a:latin typeface="Georgia" pitchFamily="34" charset="0"/>
+                <a:ea typeface="Georgia" pitchFamily="34" charset="-122"/>
+                <a:cs typeface="Georgia" pitchFamily="34" charset="-120"/>
+              </a:rPr>
+              <a:t> (space) | Room to live, sound to travel | Less noise, less light at night, less stuff |</a:t>
+            </a:r>
+            <a:endParaRPr lang="en-US" sz="1300" dirty="0"/>
+          </a:p>
+        </p:txBody>
+      </p:sp>
+      <p:sp>
+        <p:nvSpPr>
+          <p:cNvPr id="8" name="Text 6"/>
+          <p:cNvSpPr/>
+          <p:nvPr/>
+        </p:nvSpPr>
+        <p:spPr>
+          <a:xfrm>
+            <a:off x="692051" y="2536180"/>
+            <a:ext cx="7973389" cy="461963"/>
+          </a:xfrm>
+          <a:prstGeom prst="rect">
+            <a:avLst/>
+          </a:prstGeom>
+          <a:noFill/>
+          <a:ln/>
+        </p:spPr>
+        <p:txBody>
+          <a:bodyPr wrap="square" lIns="0" tIns="0" rIns="0" bIns="0" rtlCol="0" anchor="t"/>
+          <a:lstStyle/>
+          <a:p>
+            <a:pPr algn="l" indent="0" marL="0">
+              <a:lnSpc>
+                <a:spcPts val="1820"/>
+              </a:lnSpc>
+              <a:spcBef>
+                <a:spcPts val="300"/>
+              </a:spcBef>
+              <a:spcAft>
+                <a:spcPts val="300"/>
+              </a:spcAft>
+              <a:buNone/>
+            </a:pPr>
+            <a:r>
+              <a:rPr lang="en-US" sz="1300" dirty="0">
+                <a:solidFill>
+                  <a:srgbClr val="1C2833"/>
+                </a:solidFill>
+                <a:latin typeface="Georgia" pitchFamily="34" charset="0"/>
+                <a:ea typeface="Georgia" pitchFamily="34" charset="-122"/>
+                <a:cs typeface="Georgia" pitchFamily="34" charset="-120"/>
+              </a:rPr>
+              <a:t>The five elements are not five things "out there." They are five members of the family the verse calls </a:t>
+            </a:r>
+            <a:pPr algn="l" indent="0" marL="0">
+              <a:lnSpc>
+                <a:spcPts val="1820"/>
+              </a:lnSpc>
+              <a:spcBef>
+                <a:spcPts val="300"/>
+              </a:spcBef>
+              <a:spcAft>
+                <a:spcPts val="300"/>
+              </a:spcAft>
+              <a:buNone/>
+            </a:pPr>
+            <a:r>
+              <a:rPr lang="en-US" sz="1300" i="1" dirty="0">
+                <a:solidFill>
+                  <a:srgbClr val="1C2833"/>
+                </a:solidFill>
+                <a:latin typeface="Georgia" pitchFamily="34" charset="0"/>
+                <a:ea typeface="Georgia" pitchFamily="34" charset="-122"/>
+                <a:cs typeface="Georgia" pitchFamily="34" charset="-120"/>
+              </a:rPr>
+              <a:t>kuṭumba</a:t>
+            </a:r>
+            <a:pPr algn="l" indent="0" marL="0">
+              <a:lnSpc>
+                <a:spcPts val="1820"/>
+              </a:lnSpc>
+              <a:spcBef>
+                <a:spcPts val="300"/>
+              </a:spcBef>
+              <a:spcAft>
+                <a:spcPts val="300"/>
+              </a:spcAft>
+              <a:buNone/>
+            </a:pPr>
+            <a:r>
+              <a:rPr lang="en-US" sz="1300" dirty="0">
+                <a:solidFill>
+                  <a:srgbClr val="1C2833"/>
+                </a:solidFill>
+                <a:latin typeface="Georgia" pitchFamily="34" charset="0"/>
+                <a:ea typeface="Georgia" pitchFamily="34" charset="-122"/>
+                <a:cs typeface="Georgia" pitchFamily="34" charset="-120"/>
+              </a:rPr>
+              <a:t>.</a:t>
+            </a:r>
+            <a:endParaRPr lang="en-US" sz="1300" dirty="0"/>
+          </a:p>
+        </p:txBody>
+      </p:sp>
+      <p:sp>
+        <p:nvSpPr>
+          <p:cNvPr id="9" name="Text 7"/>
+          <p:cNvSpPr/>
+          <p:nvPr/>
+        </p:nvSpPr>
+        <p:spPr>
+          <a:xfrm>
+            <a:off x="406301" y="4434929"/>
+            <a:ext cx="8498026" cy="213271"/>
+          </a:xfrm>
+          <a:prstGeom prst="rect">
+            <a:avLst/>
+          </a:prstGeom>
+          <a:noFill/>
+          <a:ln/>
+        </p:spPr>
+        <p:txBody>
+          <a:bodyPr wrap="square" lIns="0" tIns="0" rIns="0" bIns="0" rtlCol="0" anchor="t"/>
+          <a:lstStyle/>
+          <a:p>
+            <a:pPr algn="l" indent="0" marL="0">
+              <a:lnSpc>
+                <a:spcPts val="1680"/>
+              </a:lnSpc>
+              <a:spcBef>
+                <a:spcPts val="300"/>
+              </a:spcBef>
+              <a:spcAft>
+                <a:spcPts val="300"/>
+              </a:spcAft>
+              <a:buNone/>
+            </a:pPr>
+            <a:r>
+              <a:rPr lang="en-US" sz="1200" dirty="0">
+                <a:solidFill>
+                  <a:srgbClr val="1C2833"/>
+                </a:solidFill>
+                <a:latin typeface="Arial" pitchFamily="34" charset="0"/>
+                <a:ea typeface="Arial" pitchFamily="34" charset="-122"/>
+                <a:cs typeface="Arial" pitchFamily="34" charset="-120"/>
+              </a:rPr>
+              <a:t>Middle ·  · IKS Curriculum</a:t>
+            </a:r>
+            <a:endParaRPr lang="en-US" sz="1200" dirty="0"/>
+          </a:p>
+        </p:txBody>
+      </p:sp>
+    </p:spTree>
+  </p:cSld>
+  <p:clrMapOvr>
+    <a:masterClrMapping/>
+  </p:clrMapOvr>
+</p:sld>
+</file>
+
+<file path=ppt/slides/slide16.xml><?xml version="1.0" encoding="utf-8"?>
+<p:sld xmlns:a="http://schemas.openxmlformats.org/drawingml/2006/main" xmlns:r="http://schemas.openxmlformats.org/officeDocument/2006/relationships" xmlns:p="http://schemas.openxmlformats.org/presentationml/2006/main">
+  <p:cSld name="Slide 16">
+    <p:bg>
+      <p:bgPr>
+        <a:solidFill>
+          <a:srgbClr val="FFFFFF"/>
+        </a:solidFill>
+      </p:bgPr>
+    </p:bg>
+    <p:spTree>
+      <p:nvGrpSpPr>
+        <p:cNvPr id="1" name=""/>
+        <p:cNvGrpSpPr/>
+        <p:nvPr/>
+      </p:nvGrpSpPr>
+      <p:grpSpPr>
+        <a:xfrm>
+          <a:off x="0" y="0"/>
+          <a:ext cx="0" cy="0"/>
+          <a:chOff x="0" y="0"/>
+          <a:chExt cx="0" cy="0"/>
+        </a:xfrm>
+      </p:grpSpPr>
+      <p:sp>
+        <p:nvSpPr>
+          <p:cNvPr id="2" name="Text 0"/>
+          <p:cNvSpPr/>
+          <p:nvPr/>
+        </p:nvSpPr>
+        <p:spPr>
+          <a:xfrm>
+            <a:off x="0" y="0"/>
+            <a:ext cx="9144000" cy="101501"/>
+          </a:xfrm>
+          <a:prstGeom prst="rect">
+            <a:avLst/>
+          </a:prstGeom>
+          <a:solidFill>
+            <a:srgbClr val="277884"/>
+          </a:solidFill>
+          <a:ln/>
+        </p:spPr>
+        <p:txBody>
+          <a:bodyPr wrap="square" rtlCol="0" anchor="ctr"/>
+          <a:lstStyle/>
+          <a:p>
+            <a:pPr indent="0" marL="0">
+              <a:buNone/>
+            </a:pPr>
+            <a:endParaRPr lang="en-US" dirty="0"/>
+          </a:p>
+        </p:txBody>
+      </p:sp>
+      <p:sp>
+        <p:nvSpPr>
+          <p:cNvPr id="3" name="Text 1"/>
+          <p:cNvSpPr/>
+          <p:nvPr/>
+        </p:nvSpPr>
+        <p:spPr>
+          <a:xfrm>
+            <a:off x="406301" y="457051"/>
+            <a:ext cx="8498026" cy="274290"/>
+          </a:xfrm>
+          <a:prstGeom prst="rect">
+            <a:avLst/>
+          </a:prstGeom>
+          <a:noFill/>
+          <a:ln/>
+        </p:spPr>
+        <p:txBody>
+          <a:bodyPr wrap="square" lIns="0" tIns="0" rIns="0" bIns="0" rtlCol="0" anchor="t"/>
+          <a:lstStyle/>
+          <a:p>
+            <a:pPr algn="l" indent="0" marL="0">
+              <a:lnSpc>
+                <a:spcPts val="2160"/>
+              </a:lnSpc>
+              <a:spcBef>
+                <a:spcPts val="600"/>
+              </a:spcBef>
+              <a:spcAft>
+                <a:spcPts val="800"/>
+              </a:spcAft>
+              <a:buNone/>
+            </a:pPr>
+            <a:r>
+              <a:rPr lang="en-US" sz="1800" b="1" dirty="0">
+                <a:solidFill>
+                  <a:srgbClr val="FE4447"/>
+                </a:solidFill>
+                <a:latin typeface="Georgia" pitchFamily="34" charset="0"/>
+                <a:ea typeface="Georgia" pitchFamily="34" charset="-122"/>
+                <a:cs typeface="Georgia" pitchFamily="34" charset="-120"/>
+              </a:rPr>
+              <a:t>Homework</a:t>
+            </a:r>
+            <a:endParaRPr lang="en-US" sz="1800" dirty="0"/>
+          </a:p>
+        </p:txBody>
+      </p:sp>
+      <p:sp>
+        <p:nvSpPr>
+          <p:cNvPr id="4" name="Text 2"/>
+          <p:cNvSpPr/>
+          <p:nvPr/>
+        </p:nvSpPr>
+        <p:spPr>
+          <a:xfrm>
+            <a:off x="634901" y="883593"/>
+            <a:ext cx="8102798" cy="487561"/>
+          </a:xfrm>
+          <a:prstGeom prst="rect">
+            <a:avLst/>
+          </a:prstGeom>
+          <a:noFill/>
+          <a:ln/>
+        </p:spPr>
+        <p:txBody>
+          <a:bodyPr wrap="square" lIns="0" tIns="0" rIns="0" bIns="0" rtlCol="0" anchor="t"/>
+          <a:lstStyle/>
+          <a:p>
+            <a:pPr algn="l" marL="342900" indent="-342900">
+              <a:lnSpc>
+                <a:spcPts val="1620"/>
+              </a:lnSpc>
+              <a:spcAft>
+                <a:spcPts val="300"/>
+              </a:spcAft>
+              <a:buSzPct val="100000"/>
+              <a:buChar char="•"/>
+            </a:pPr>
+            <a:r>
+              <a:rPr lang="en-US" sz="1200" dirty="0">
+                <a:solidFill>
+                  <a:srgbClr val="1C2833"/>
+                </a:solidFill>
+                <a:latin typeface="Arial" pitchFamily="34" charset="0"/>
+                <a:ea typeface="Arial" pitchFamily="34" charset="-122"/>
+                <a:cs typeface="Arial" pitchFamily="34" charset="-120"/>
+              </a:rPr>
+              <a:t>Walk for 5 minutes anywhere near your home. Notice ONE specific way one element is being mistreated (the dump, the dust, the noise, the leaking tap). Write 3 sentences. Bring tomorrow.</a:t>
+            </a:r>
+            <a:endParaRPr lang="en-US" sz="1200" dirty="0"/>
+          </a:p>
+        </p:txBody>
+      </p:sp>
+      <p:sp>
+        <p:nvSpPr>
+          <p:cNvPr id="5" name="Text 3"/>
+          <p:cNvSpPr/>
+          <p:nvPr/>
+        </p:nvSpPr>
+        <p:spPr>
+          <a:xfrm>
+            <a:off x="406301" y="4434929"/>
+            <a:ext cx="8498026" cy="213271"/>
+          </a:xfrm>
+          <a:prstGeom prst="rect">
+            <a:avLst/>
+          </a:prstGeom>
+          <a:noFill/>
+          <a:ln/>
+        </p:spPr>
+        <p:txBody>
+          <a:bodyPr wrap="square" lIns="0" tIns="0" rIns="0" bIns="0" rtlCol="0" anchor="t"/>
+          <a:lstStyle/>
+          <a:p>
+            <a:pPr algn="l" indent="0" marL="0">
+              <a:lnSpc>
+                <a:spcPts val="1680"/>
+              </a:lnSpc>
+              <a:spcBef>
+                <a:spcPts val="300"/>
+              </a:spcBef>
+              <a:spcAft>
+                <a:spcPts val="300"/>
+              </a:spcAft>
+              <a:buNone/>
+            </a:pPr>
+            <a:r>
+              <a:rPr lang="en-US" sz="1200" dirty="0">
+                <a:solidFill>
+                  <a:srgbClr val="1C2833"/>
+                </a:solidFill>
+                <a:latin typeface="Arial" pitchFamily="34" charset="0"/>
+                <a:ea typeface="Arial" pitchFamily="34" charset="-122"/>
+                <a:cs typeface="Arial" pitchFamily="34" charset="-120"/>
+              </a:rPr>
+              <a:t>Middle ·  · IKS Curriculum</a:t>
+            </a:r>
+            <a:endParaRPr lang="en-US" sz="1200" dirty="0"/>
+          </a:p>
+        </p:txBody>
+      </p:sp>
+    </p:spTree>
+  </p:cSld>
+  <p:clrMapOvr>
+    <a:masterClrMapping/>
+  </p:clrMapOvr>
+</p:sld>
+</file>
+
+<file path=ppt/slides/slide17.xml><?xml version="1.0" encoding="utf-8"?>
+<p:sld xmlns:a="http://schemas.openxmlformats.org/drawingml/2006/main" xmlns:r="http://schemas.openxmlformats.org/officeDocument/2006/relationships" xmlns:p="http://schemas.openxmlformats.org/presentationml/2006/main">
+  <p:cSld name="Slide 17">
+    <p:bg>
+      <p:bgPr>
+        <a:solidFill>
+          <a:srgbClr val="FFFFFF"/>
+        </a:solidFill>
+      </p:bgPr>
+    </p:bg>
+    <p:spTree>
+      <p:nvGrpSpPr>
+        <p:cNvPr id="1" name=""/>
+        <p:cNvGrpSpPr/>
+        <p:nvPr/>
+      </p:nvGrpSpPr>
+      <p:grpSpPr>
+        <a:xfrm>
+          <a:off x="0" y="0"/>
+          <a:ext cx="0" cy="0"/>
+          <a:chOff x="0" y="0"/>
+          <a:chExt cx="0" cy="0"/>
+        </a:xfrm>
+      </p:grpSpPr>
+      <p:sp>
+        <p:nvSpPr>
+          <p:cNvPr id="2" name="Text 0"/>
+          <p:cNvSpPr/>
+          <p:nvPr/>
+        </p:nvSpPr>
+        <p:spPr>
+          <a:xfrm>
+            <a:off x="0" y="0"/>
+            <a:ext cx="9144000" cy="101501"/>
+          </a:xfrm>
+          <a:prstGeom prst="rect">
+            <a:avLst/>
+          </a:prstGeom>
+          <a:solidFill>
+            <a:srgbClr val="277884"/>
+          </a:solidFill>
+          <a:ln/>
+        </p:spPr>
+        <p:txBody>
+          <a:bodyPr wrap="square" rtlCol="0" anchor="ctr"/>
+          <a:lstStyle/>
+          <a:p>
+            <a:pPr indent="0" marL="0">
+              <a:buNone/>
+            </a:pPr>
+            <a:endParaRPr lang="en-US" dirty="0"/>
+          </a:p>
+        </p:txBody>
+      </p:sp>
+      <p:sp>
+        <p:nvSpPr>
+          <p:cNvPr id="3" name="Text 1"/>
+          <p:cNvSpPr/>
+          <p:nvPr/>
+        </p:nvSpPr>
+        <p:spPr>
+          <a:xfrm>
+            <a:off x="406301" y="457051"/>
+            <a:ext cx="8498026" cy="274290"/>
+          </a:xfrm>
+          <a:prstGeom prst="rect">
+            <a:avLst/>
+          </a:prstGeom>
+          <a:noFill/>
+          <a:ln/>
+        </p:spPr>
+        <p:txBody>
+          <a:bodyPr wrap="square" lIns="0" tIns="0" rIns="0" bIns="0" rtlCol="0" anchor="t"/>
+          <a:lstStyle/>
+          <a:p>
+            <a:pPr algn="l" indent="0" marL="0">
+              <a:lnSpc>
+                <a:spcPts val="2160"/>
+              </a:lnSpc>
+              <a:spcBef>
+                <a:spcPts val="600"/>
+              </a:spcBef>
+              <a:spcAft>
+                <a:spcPts val="800"/>
+              </a:spcAft>
+              <a:buNone/>
+            </a:pPr>
+            <a:r>
+              <a:rPr lang="en-US" sz="1800" b="1" dirty="0">
+                <a:solidFill>
+                  <a:srgbClr val="FE4447"/>
+                </a:solidFill>
+                <a:latin typeface="Georgia" pitchFamily="34" charset="0"/>
+                <a:ea typeface="Georgia" pitchFamily="34" charset="-122"/>
+                <a:cs typeface="Georgia" pitchFamily="34" charset="-120"/>
+              </a:rPr>
+              <a:t>Differentiation</a:t>
+            </a:r>
+            <a:endParaRPr lang="en-US" sz="1800" dirty="0"/>
+          </a:p>
+        </p:txBody>
+      </p:sp>
+      <p:sp>
+        <p:nvSpPr>
+          <p:cNvPr id="4" name="Text 2"/>
+          <p:cNvSpPr/>
+          <p:nvPr/>
+        </p:nvSpPr>
+        <p:spPr>
+          <a:xfrm>
+            <a:off x="634901" y="883593"/>
+            <a:ext cx="8102798" cy="731341"/>
+          </a:xfrm>
+          <a:prstGeom prst="rect">
+            <a:avLst/>
+          </a:prstGeom>
+          <a:noFill/>
+          <a:ln/>
+        </p:spPr>
+        <p:txBody>
+          <a:bodyPr wrap="square" lIns="0" tIns="0" rIns="0" bIns="0" rtlCol="0" anchor="t"/>
+          <a:lstStyle/>
+          <a:p>
+            <a:pPr algn="l" marL="342900" indent="-342900">
+              <a:lnSpc>
+                <a:spcPts val="1620"/>
+              </a:lnSpc>
+              <a:spcAft>
+                <a:spcPts val="300"/>
+              </a:spcAft>
+              <a:buSzPct val="100000"/>
+              <a:buChar char="•"/>
+            </a:pPr>
+            <a:r>
+              <a:rPr lang="en-US" sz="1200" b="1" dirty="0">
+                <a:solidFill>
+                  <a:srgbClr val="1C2833"/>
+                </a:solidFill>
+                <a:latin typeface="Arial" pitchFamily="34" charset="0"/>
+                <a:ea typeface="Arial" pitchFamily="34" charset="-122"/>
+                <a:cs typeface="Arial" pitchFamily="34" charset="-120"/>
+              </a:rPr>
+              <a:t>One tier up:</a:t>
+            </a:r>
+            <a:pPr algn="l" indent="0" marL="0">
+              <a:lnSpc>
+                <a:spcPts val="1620"/>
+              </a:lnSpc>
+              <a:spcAft>
+                <a:spcPts val="300"/>
+              </a:spcAft>
+              <a:buNone/>
+            </a:pPr>
+            <a:r>
+              <a:rPr lang="en-US" sz="1200" dirty="0">
+                <a:solidFill>
+                  <a:srgbClr val="1C2833"/>
+                </a:solidFill>
+                <a:latin typeface="Arial" pitchFamily="34" charset="0"/>
+                <a:ea typeface="Arial" pitchFamily="34" charset="-122"/>
+                <a:cs typeface="Arial" pitchFamily="34" charset="-120"/>
+              </a:rPr>
+              <a:t> Add a sixth row to the table for "biological diversity" (the </a:t>
+            </a:r>
+            <a:pPr algn="l" indent="0" marL="0">
+              <a:lnSpc>
+                <a:spcPts val="1620"/>
+              </a:lnSpc>
+              <a:spcAft>
+                <a:spcPts val="300"/>
+              </a:spcAft>
+              <a:buNone/>
+            </a:pPr>
+            <a:r>
+              <a:rPr lang="en-US" sz="1200" i="1" dirty="0">
+                <a:solidFill>
+                  <a:srgbClr val="1C2833"/>
+                </a:solidFill>
+                <a:latin typeface="Arial" pitchFamily="34" charset="0"/>
+                <a:ea typeface="Arial" pitchFamily="34" charset="-122"/>
+                <a:cs typeface="Arial" pitchFamily="34" charset="-120"/>
+              </a:rPr>
+              <a:t>jīva-jantu</a:t>
+            </a:r>
+            <a:pPr algn="l" indent="0" marL="0">
+              <a:lnSpc>
+                <a:spcPts val="1620"/>
+              </a:lnSpc>
+              <a:spcAft>
+                <a:spcPts val="300"/>
+              </a:spcAft>
+              <a:buNone/>
+            </a:pPr>
+            <a:r>
+              <a:rPr lang="en-US" sz="1200" dirty="0">
+                <a:solidFill>
+                  <a:srgbClr val="1C2833"/>
+                </a:solidFill>
+                <a:latin typeface="Arial" pitchFamily="34" charset="0"/>
+                <a:ea typeface="Arial" pitchFamily="34" charset="-122"/>
+                <a:cs typeface="Arial" pitchFamily="34" charset="-120"/>
+              </a:rPr>
+              <a:t> — living creatures). Is biodiversity a sixth element? Or is it already covered by </a:t>
+            </a:r>
+            <a:pPr algn="l" indent="0" marL="0">
+              <a:lnSpc>
+                <a:spcPts val="1620"/>
+              </a:lnSpc>
+              <a:spcAft>
+                <a:spcPts val="300"/>
+              </a:spcAft>
+              <a:buNone/>
+            </a:pPr>
+            <a:r>
+              <a:rPr lang="en-US" sz="1200" i="1" dirty="0">
+                <a:solidFill>
+                  <a:srgbClr val="1C2833"/>
+                </a:solidFill>
+                <a:latin typeface="Arial" pitchFamily="34" charset="0"/>
+                <a:ea typeface="Arial" pitchFamily="34" charset="-122"/>
+                <a:cs typeface="Arial" pitchFamily="34" charset="-120"/>
+              </a:rPr>
+              <a:t>pṛthvī</a:t>
+            </a:r>
+            <a:pPr algn="l" indent="0" marL="0">
+              <a:lnSpc>
+                <a:spcPts val="1620"/>
+              </a:lnSpc>
+              <a:spcAft>
+                <a:spcPts val="300"/>
+              </a:spcAft>
+              <a:buNone/>
+            </a:pPr>
+            <a:r>
+              <a:rPr lang="en-US" sz="1200" dirty="0">
+                <a:solidFill>
+                  <a:srgbClr val="1C2833"/>
+                </a:solidFill>
+                <a:latin typeface="Arial" pitchFamily="34" charset="0"/>
+                <a:ea typeface="Arial" pitchFamily="34" charset="-122"/>
+                <a:cs typeface="Arial" pitchFamily="34" charset="-120"/>
+              </a:rPr>
+              <a:t>? Defend either position.</a:t>
+            </a:r>
+            <a:endParaRPr lang="en-US" sz="1200" dirty="0"/>
+          </a:p>
+          <a:p>
+            <a:pPr algn="l" marL="342900" indent="-342900">
+              <a:lnSpc>
+                <a:spcPts val="1620"/>
+              </a:lnSpc>
+              <a:spcAft>
+                <a:spcPts val="300"/>
+              </a:spcAft>
+              <a:buSzPct val="100000"/>
+              <a:buChar char="•"/>
+            </a:pPr>
+            <a:r>
+              <a:rPr lang="en-US" sz="1200" b="1" dirty="0">
+                <a:solidFill>
+                  <a:srgbClr val="1C2833"/>
+                </a:solidFill>
+                <a:latin typeface="Arial" pitchFamily="34" charset="0"/>
+                <a:ea typeface="Arial" pitchFamily="34" charset="-122"/>
+                <a:cs typeface="Arial" pitchFamily="34" charset="-120"/>
+              </a:rPr>
+              <a:t>One tier down:</a:t>
+            </a:r>
+            <a:pPr algn="l" indent="0" marL="0">
+              <a:lnSpc>
+                <a:spcPts val="1620"/>
+              </a:lnSpc>
+              <a:spcAft>
+                <a:spcPts val="300"/>
+              </a:spcAft>
+              <a:buNone/>
+            </a:pPr>
+            <a:r>
+              <a:rPr lang="en-US" sz="1200" dirty="0">
+                <a:solidFill>
+                  <a:srgbClr val="1C2833"/>
+                </a:solidFill>
+                <a:latin typeface="Arial" pitchFamily="34" charset="0"/>
+                <a:ea typeface="Arial" pitchFamily="34" charset="-122"/>
+                <a:cs typeface="Arial" pitchFamily="34" charset="-120"/>
+              </a:rPr>
+              <a:t> Stick to two elements that feel obvious to you (e.g. water and air). The others will sink in over the week.</a:t>
+            </a:r>
+            <a:endParaRPr lang="en-US" sz="1200" dirty="0"/>
+          </a:p>
+        </p:txBody>
+      </p:sp>
+      <p:sp>
+        <p:nvSpPr>
+          <p:cNvPr id="5" name="Text 3"/>
+          <p:cNvSpPr/>
+          <p:nvPr/>
+        </p:nvSpPr>
+        <p:spPr>
+          <a:xfrm>
+            <a:off x="406301" y="4434929"/>
+            <a:ext cx="8498026" cy="213271"/>
+          </a:xfrm>
+          <a:prstGeom prst="rect">
+            <a:avLst/>
+          </a:prstGeom>
+          <a:noFill/>
+          <a:ln/>
+        </p:spPr>
+        <p:txBody>
+          <a:bodyPr wrap="square" lIns="0" tIns="0" rIns="0" bIns="0" rtlCol="0" anchor="t"/>
+          <a:lstStyle/>
+          <a:p>
+            <a:pPr algn="l" indent="0" marL="0">
+              <a:lnSpc>
+                <a:spcPts val="1680"/>
+              </a:lnSpc>
+              <a:spcBef>
+                <a:spcPts val="300"/>
+              </a:spcBef>
+              <a:spcAft>
+                <a:spcPts val="300"/>
+              </a:spcAft>
+              <a:buNone/>
+            </a:pPr>
+            <a:r>
+              <a:rPr lang="en-US" sz="1200" dirty="0">
+                <a:solidFill>
+                  <a:srgbClr val="1C2833"/>
+                </a:solidFill>
+                <a:latin typeface="Arial" pitchFamily="34" charset="0"/>
+                <a:ea typeface="Arial" pitchFamily="34" charset="-122"/>
+                <a:cs typeface="Arial" pitchFamily="34" charset="-120"/>
+              </a:rPr>
+              <a:t>Middle ·  · IKS Curriculum</a:t>
+            </a:r>
+            <a:endParaRPr lang="en-US" sz="1200" dirty="0"/>
+          </a:p>
+        </p:txBody>
+      </p:sp>
+    </p:spTree>
+  </p:cSld>
+  <p:clrMapOvr>
+    <a:masterClrMapping/>
+  </p:clrMapOvr>
+</p:sld>
+</file>
+
+<file path=ppt/slides/slide18.xml><?xml version="1.0" encoding="utf-8"?>
+<p:sld xmlns:a="http://schemas.openxmlformats.org/drawingml/2006/main" xmlns:r="http://schemas.openxmlformats.org/officeDocument/2006/relationships" xmlns:p="http://schemas.openxmlformats.org/presentationml/2006/main">
+  <p:cSld name="Slide 18">
+    <p:bg>
+      <p:bgPr>
+        <a:solidFill>
+          <a:srgbClr val="FFFFFF"/>
+        </a:solidFill>
+      </p:bgPr>
+    </p:bg>
+    <p:spTree>
+      <p:nvGrpSpPr>
+        <p:cNvPr id="1" name=""/>
+        <p:cNvGrpSpPr/>
+        <p:nvPr/>
+      </p:nvGrpSpPr>
+      <p:grpSpPr>
+        <a:xfrm>
+          <a:off x="0" y="0"/>
+          <a:ext cx="0" cy="0"/>
+          <a:chOff x="0" y="0"/>
+          <a:chExt cx="0" cy="0"/>
+        </a:xfrm>
+      </p:grpSpPr>
+      <p:sp>
+        <p:nvSpPr>
+          <p:cNvPr id="2" name="Text 0"/>
+          <p:cNvSpPr/>
+          <p:nvPr/>
+        </p:nvSpPr>
+        <p:spPr>
+          <a:xfrm>
+            <a:off x="0" y="0"/>
+            <a:ext cx="9144000" cy="101501"/>
+          </a:xfrm>
+          <a:prstGeom prst="rect">
+            <a:avLst/>
+          </a:prstGeom>
+          <a:solidFill>
+            <a:srgbClr val="277884"/>
+          </a:solidFill>
+          <a:ln/>
+        </p:spPr>
+        <p:txBody>
+          <a:bodyPr wrap="square" rtlCol="0" anchor="ctr"/>
+          <a:lstStyle/>
+          <a:p>
+            <a:pPr indent="0" marL="0">
+              <a:buNone/>
+            </a:pPr>
+            <a:endParaRPr lang="en-US" dirty="0"/>
+          </a:p>
+        </p:txBody>
+      </p:sp>
+      <p:sp>
+        <p:nvSpPr>
+          <p:cNvPr id="3" name="Text 1"/>
+          <p:cNvSpPr/>
+          <p:nvPr/>
+        </p:nvSpPr>
+        <p:spPr>
+          <a:xfrm>
+            <a:off x="406301" y="457051"/>
+            <a:ext cx="8498026" cy="274290"/>
+          </a:xfrm>
+          <a:prstGeom prst="rect">
+            <a:avLst/>
+          </a:prstGeom>
+          <a:noFill/>
+          <a:ln/>
+        </p:spPr>
+        <p:txBody>
+          <a:bodyPr wrap="square" lIns="0" tIns="0" rIns="0" bIns="0" rtlCol="0" anchor="t"/>
+          <a:lstStyle/>
+          <a:p>
+            <a:pPr algn="l" indent="0" marL="0">
+              <a:lnSpc>
+                <a:spcPts val="2160"/>
+              </a:lnSpc>
+              <a:spcBef>
+                <a:spcPts val="600"/>
+              </a:spcBef>
+              <a:spcAft>
+                <a:spcPts val="800"/>
+              </a:spcAft>
+              <a:buNone/>
+            </a:pPr>
+            <a:r>
+              <a:rPr lang="en-US" sz="1800" b="1" dirty="0">
+                <a:solidFill>
+                  <a:srgbClr val="FE4447"/>
+                </a:solidFill>
+                <a:latin typeface="Georgia" pitchFamily="34" charset="0"/>
+                <a:ea typeface="Georgia" pitchFamily="34" charset="-122"/>
+                <a:cs typeface="Georgia" pitchFamily="34" charset="-120"/>
+              </a:rPr>
+              <a:t>Teacher notes</a:t>
+            </a:r>
+            <a:endParaRPr lang="en-US" sz="1800" dirty="0"/>
+          </a:p>
+        </p:txBody>
+      </p:sp>
+      <p:sp>
+        <p:nvSpPr>
+          <p:cNvPr id="4" name="Text 2"/>
+          <p:cNvSpPr/>
+          <p:nvPr/>
+        </p:nvSpPr>
+        <p:spPr>
+          <a:xfrm>
+            <a:off x="634901" y="883593"/>
+            <a:ext cx="8102798" cy="1592163"/>
+          </a:xfrm>
+          <a:prstGeom prst="rect">
+            <a:avLst/>
+          </a:prstGeom>
+          <a:noFill/>
+          <a:ln/>
+        </p:spPr>
+        <p:txBody>
+          <a:bodyPr wrap="square" lIns="0" tIns="0" rIns="0" bIns="0" rtlCol="0" anchor="t"/>
+          <a:lstStyle/>
+          <a:p>
+            <a:pPr algn="l" marL="342900" indent="-342900">
+              <a:lnSpc>
+                <a:spcPts val="1620"/>
+              </a:lnSpc>
+              <a:spcAft>
+                <a:spcPts val="300"/>
+              </a:spcAft>
+              <a:buSzPct val="100000"/>
+              <a:buChar char="•"/>
+            </a:pPr>
+            <a:r>
+              <a:rPr lang="en-US" sz="1200" dirty="0">
+                <a:solidFill>
+                  <a:srgbClr val="1C2833"/>
+                </a:solidFill>
+                <a:latin typeface="Arial" pitchFamily="34" charset="0"/>
+                <a:ea typeface="Arial" pitchFamily="34" charset="-122"/>
+                <a:cs typeface="Arial" pitchFamily="34" charset="-120"/>
+              </a:rPr>
+              <a:t>Some students (correctly) will say "polluting space doesn't make sense — space is just space." Push: </a:t>
+            </a:r>
+            <a:pPr algn="l" indent="0" marL="0">
+              <a:lnSpc>
+                <a:spcPts val="1620"/>
+              </a:lnSpc>
+              <a:spcAft>
+                <a:spcPts val="300"/>
+              </a:spcAft>
+              <a:buNone/>
+            </a:pPr>
+            <a:r>
+              <a:rPr lang="en-US" sz="1200" i="1" dirty="0">
+                <a:solidFill>
+                  <a:srgbClr val="1C2833"/>
+                </a:solidFill>
+                <a:latin typeface="Arial" pitchFamily="34" charset="0"/>
+                <a:ea typeface="Arial" pitchFamily="34" charset="-122"/>
+                <a:cs typeface="Arial" pitchFamily="34" charset="-120"/>
+              </a:rPr>
+              <a:t>"Have you ever been kept awake by a neighbour's loud TV? Have you been blinded by a glaring street light? That's polluting</a:t>
+            </a:r>
+            <a:pPr algn="l" indent="0" marL="0">
+              <a:lnSpc>
+                <a:spcPts val="1620"/>
+              </a:lnSpc>
+              <a:spcAft>
+                <a:spcPts val="300"/>
+              </a:spcAft>
+              <a:buNone/>
+            </a:pPr>
+            <a:r>
+              <a:rPr lang="en-US" sz="1200" dirty="0">
+                <a:solidFill>
+                  <a:srgbClr val="1C2833"/>
+                </a:solidFill>
+                <a:latin typeface="Arial" pitchFamily="34" charset="0"/>
+                <a:ea typeface="Arial" pitchFamily="34" charset="-122"/>
+                <a:cs typeface="Arial" pitchFamily="34" charset="-120"/>
+              </a:rPr>
+              <a:t>ākāśa</a:t>
+            </a:r>
+            <a:pPr algn="l" indent="0" marL="0">
+              <a:lnSpc>
+                <a:spcPts val="1620"/>
+              </a:lnSpc>
+              <a:spcAft>
+                <a:spcPts val="300"/>
+              </a:spcAft>
+              <a:buNone/>
+            </a:pPr>
+            <a:r>
+              <a:rPr lang="en-US" sz="1200" i="1" dirty="0">
+                <a:solidFill>
+                  <a:srgbClr val="1C2833"/>
+                </a:solidFill>
+                <a:latin typeface="Arial" pitchFamily="34" charset="0"/>
+                <a:ea typeface="Arial" pitchFamily="34" charset="-122"/>
+                <a:cs typeface="Arial" pitchFamily="34" charset="-120"/>
+              </a:rPr>
+              <a:t>."</a:t>
+            </a:r>
+            <a:pPr algn="l" indent="0" marL="0">
+              <a:lnSpc>
+                <a:spcPts val="1620"/>
+              </a:lnSpc>
+              <a:spcAft>
+                <a:spcPts val="300"/>
+              </a:spcAft>
+              <a:buNone/>
+            </a:pPr>
+            <a:r>
+              <a:rPr lang="en-US" sz="1200" dirty="0">
+                <a:solidFill>
+                  <a:srgbClr val="1C2833"/>
+                </a:solidFill>
+                <a:latin typeface="Arial" pitchFamily="34" charset="0"/>
+                <a:ea typeface="Arial" pitchFamily="34" charset="-122"/>
+                <a:cs typeface="Arial" pitchFamily="34" charset="-120"/>
+              </a:rPr>
+              <a:t> The five-element frame's strength is that it forces us to think about subtle pollutions too.</a:t>
+            </a:r>
+            <a:endParaRPr lang="en-US" sz="1200" dirty="0"/>
+          </a:p>
+          <a:p>
+            <a:pPr algn="l" marL="342900" indent="-342900">
+              <a:lnSpc>
+                <a:spcPts val="1620"/>
+              </a:lnSpc>
+              <a:spcAft>
+                <a:spcPts val="300"/>
+              </a:spcAft>
+              <a:buSzPct val="100000"/>
+              <a:buChar char="•"/>
+            </a:pPr>
+            <a:r>
+              <a:rPr lang="en-US" sz="1200" dirty="0">
+                <a:solidFill>
+                  <a:srgbClr val="1C2833"/>
+                </a:solidFill>
+                <a:latin typeface="Arial" pitchFamily="34" charset="0"/>
+                <a:ea typeface="Arial" pitchFamily="34" charset="-122"/>
+                <a:cs typeface="Arial" pitchFamily="34" charset="-120"/>
+              </a:rPr>
+              <a:t>Don't let "fire" mean "we should stop using electricity." That's not the point. The point is that the </a:t>
+            </a:r>
+            <a:pPr algn="l" indent="0" marL="0">
+              <a:lnSpc>
+                <a:spcPts val="1620"/>
+              </a:lnSpc>
+              <a:spcAft>
+                <a:spcPts val="300"/>
+              </a:spcAft>
+              <a:buNone/>
+            </a:pPr>
+            <a:r>
+              <a:rPr lang="en-US" sz="1200" i="1" dirty="0">
+                <a:solidFill>
+                  <a:srgbClr val="1C2833"/>
+                </a:solidFill>
+                <a:latin typeface="Arial" pitchFamily="34" charset="0"/>
+                <a:ea typeface="Arial" pitchFamily="34" charset="-122"/>
+                <a:cs typeface="Arial" pitchFamily="34" charset="-120"/>
+              </a:rPr>
+              <a:t>tejas</a:t>
+            </a:r>
+            <a:pPr algn="l" indent="0" marL="0">
+              <a:lnSpc>
+                <a:spcPts val="1620"/>
+              </a:lnSpc>
+              <a:spcAft>
+                <a:spcPts val="300"/>
+              </a:spcAft>
+              <a:buNone/>
+            </a:pPr>
+            <a:r>
+              <a:rPr lang="en-US" sz="1200" dirty="0">
+                <a:solidFill>
+                  <a:srgbClr val="1C2833"/>
+                </a:solidFill>
+                <a:latin typeface="Arial" pitchFamily="34" charset="0"/>
+                <a:ea typeface="Arial" pitchFamily="34" charset="-122"/>
+                <a:cs typeface="Arial" pitchFamily="34" charset="-120"/>
+              </a:rPr>
+              <a:t> we use is currently mostly from burning fossil fuels; the family relationship is to use less or use cleaner.</a:t>
+            </a:r>
+            <a:endParaRPr lang="en-US" sz="1200" dirty="0"/>
+          </a:p>
+          <a:p>
+            <a:pPr algn="l" marL="342900" indent="-342900">
+              <a:lnSpc>
+                <a:spcPts val="1620"/>
+              </a:lnSpc>
+              <a:spcAft>
+                <a:spcPts val="300"/>
+              </a:spcAft>
+              <a:buSzPct val="100000"/>
+              <a:buChar char="•"/>
+            </a:pPr>
+            <a:r>
+              <a:rPr lang="en-US" sz="1200" dirty="0">
+                <a:solidFill>
+                  <a:srgbClr val="1C2833"/>
+                </a:solidFill>
+                <a:latin typeface="Arial" pitchFamily="34" charset="0"/>
+                <a:ea typeface="Arial" pitchFamily="34" charset="-122"/>
+                <a:cs typeface="Arial" pitchFamily="34" charset="-120"/>
+              </a:rPr>
+              <a:t>Some students will ask about climate change here. Hold them off — Day 8 is the proper place. Today is the framework, not the data.</a:t>
+            </a:r>
+            <a:endParaRPr lang="en-US" sz="1200" dirty="0"/>
+          </a:p>
+        </p:txBody>
+      </p:sp>
+      <p:sp>
+        <p:nvSpPr>
+          <p:cNvPr id="5" name="Text 3"/>
+          <p:cNvSpPr/>
+          <p:nvPr/>
+        </p:nvSpPr>
+        <p:spPr>
+          <a:xfrm>
+            <a:off x="406301" y="4434929"/>
+            <a:ext cx="8498026" cy="213271"/>
+          </a:xfrm>
+          <a:prstGeom prst="rect">
+            <a:avLst/>
+          </a:prstGeom>
+          <a:noFill/>
+          <a:ln/>
+        </p:spPr>
+        <p:txBody>
+          <a:bodyPr wrap="square" lIns="0" tIns="0" rIns="0" bIns="0" rtlCol="0" anchor="t"/>
+          <a:lstStyle/>
+          <a:p>
+            <a:pPr algn="l" indent="0" marL="0">
+              <a:lnSpc>
+                <a:spcPts val="1680"/>
+              </a:lnSpc>
+              <a:spcBef>
+                <a:spcPts val="300"/>
+              </a:spcBef>
+              <a:spcAft>
+                <a:spcPts val="300"/>
+              </a:spcAft>
+              <a:buNone/>
+            </a:pPr>
+            <a:r>
+              <a:rPr lang="en-US" sz="1200" dirty="0">
+                <a:solidFill>
+                  <a:srgbClr val="1C2833"/>
+                </a:solidFill>
+                <a:latin typeface="Arial" pitchFamily="34" charset="0"/>
+                <a:ea typeface="Arial" pitchFamily="34" charset="-122"/>
+                <a:cs typeface="Arial" pitchFamily="34" charset="-120"/>
+              </a:rPr>
+              <a:t>Middle ·  · IKS Curriculum</a:t>
+            </a:r>
+            <a:endParaRPr lang="en-US" sz="1200" dirty="0"/>
+          </a:p>
+        </p:txBody>
+      </p:sp>
+    </p:spTree>
+  </p:cSld>
+  <p:clrMapOvr>
+    <a:masterClrMapping/>
+  </p:clrMapOvr>
+</p:sld>
+</file>
+
+<file path=ppt/slides/slide19.xml><?xml version="1.0" encoding="utf-8"?>
+<p:sld xmlns:a="http://schemas.openxmlformats.org/drawingml/2006/main" xmlns:r="http://schemas.openxmlformats.org/officeDocument/2006/relationships" xmlns:p="http://schemas.openxmlformats.org/presentationml/2006/main">
+  <p:cSld name="Slide 19">
+    <p:bg>
+      <p:bgPr>
+        <a:solidFill>
+          <a:srgbClr val="FFFFFF"/>
+        </a:solidFill>
+      </p:bgPr>
+    </p:bg>
+    <p:spTree>
+      <p:nvGrpSpPr>
+        <p:cNvPr id="1" name=""/>
+        <p:cNvGrpSpPr/>
+        <p:nvPr/>
+      </p:nvGrpSpPr>
+      <p:grpSpPr>
+        <a:xfrm>
+          <a:off x="0" y="0"/>
+          <a:ext cx="0" cy="0"/>
+          <a:chOff x="0" y="0"/>
+          <a:chExt cx="0" cy="0"/>
+        </a:xfrm>
+      </p:grpSpPr>
+      <p:sp>
+        <p:nvSpPr>
+          <p:cNvPr id="2" name="Text 0"/>
+          <p:cNvSpPr/>
+          <p:nvPr/>
+        </p:nvSpPr>
+        <p:spPr>
+          <a:xfrm>
+            <a:off x="0" y="0"/>
+            <a:ext cx="9144000" cy="101501"/>
+          </a:xfrm>
+          <a:prstGeom prst="rect">
+            <a:avLst/>
+          </a:prstGeom>
+          <a:solidFill>
+            <a:srgbClr val="277884"/>
+          </a:solidFill>
+          <a:ln/>
+        </p:spPr>
+        <p:txBody>
+          <a:bodyPr wrap="square" rtlCol="0" anchor="ctr"/>
+          <a:lstStyle/>
+          <a:p>
+            <a:pPr indent="0" marL="0">
+              <a:buNone/>
+            </a:pPr>
+            <a:endParaRPr lang="en-US" dirty="0"/>
+          </a:p>
+        </p:txBody>
+      </p:sp>
+      <p:sp>
+        <p:nvSpPr>
+          <p:cNvPr id="3" name="Text 1"/>
+          <p:cNvSpPr/>
+          <p:nvPr/>
+        </p:nvSpPr>
+        <p:spPr>
+          <a:xfrm>
+            <a:off x="406301" y="457051"/>
+            <a:ext cx="8498026" cy="274290"/>
+          </a:xfrm>
+          <a:prstGeom prst="rect">
+            <a:avLst/>
+          </a:prstGeom>
+          <a:noFill/>
+          <a:ln/>
+        </p:spPr>
+        <p:txBody>
+          <a:bodyPr wrap="square" lIns="0" tIns="0" rIns="0" bIns="0" rtlCol="0" anchor="t"/>
+          <a:lstStyle/>
+          <a:p>
+            <a:pPr algn="l" indent="0" marL="0">
+              <a:lnSpc>
+                <a:spcPts val="2160"/>
+              </a:lnSpc>
+              <a:spcBef>
+                <a:spcPts val="600"/>
+              </a:spcBef>
+              <a:spcAft>
+                <a:spcPts val="800"/>
+              </a:spcAft>
+              <a:buNone/>
+            </a:pPr>
+            <a:r>
+              <a:rPr lang="en-US" sz="1800" b="1" dirty="0">
+                <a:solidFill>
+                  <a:srgbClr val="FE4447"/>
+                </a:solidFill>
+                <a:latin typeface="Georgia" pitchFamily="34" charset="0"/>
+                <a:ea typeface="Georgia" pitchFamily="34" charset="-122"/>
+                <a:cs typeface="Georgia" pitchFamily="34" charset="-120"/>
+              </a:rPr>
+              <a:t>Citation(s) used in this lesson</a:t>
+            </a:r>
+            <a:endParaRPr lang="en-US" sz="1800" dirty="0"/>
+          </a:p>
+        </p:txBody>
+      </p:sp>
+      <p:sp>
+        <p:nvSpPr>
+          <p:cNvPr id="4" name="Text 2"/>
+          <p:cNvSpPr/>
+          <p:nvPr/>
+        </p:nvSpPr>
+        <p:spPr>
+          <a:xfrm>
+            <a:off x="634901" y="883593"/>
+            <a:ext cx="8102798" cy="750391"/>
+          </a:xfrm>
+          <a:prstGeom prst="rect">
+            <a:avLst/>
+          </a:prstGeom>
+          <a:noFill/>
+          <a:ln/>
+        </p:spPr>
+        <p:txBody>
+          <a:bodyPr wrap="square" lIns="0" tIns="0" rIns="0" bIns="0" rtlCol="0" anchor="t"/>
+          <a:lstStyle/>
+          <a:p>
+            <a:pPr algn="l" marL="342900" indent="-342900">
+              <a:lnSpc>
+                <a:spcPts val="1620"/>
+              </a:lnSpc>
+              <a:spcAft>
+                <a:spcPts val="300"/>
+              </a:spcAft>
+              <a:buSzPct val="100000"/>
+              <a:buChar char="•"/>
+            </a:pPr>
+            <a:r>
+              <a:rPr lang="en-US" sz="1200" dirty="0">
+                <a:solidFill>
+                  <a:srgbClr val="1C2833"/>
+                </a:solidFill>
+                <a:latin typeface="Arial" pitchFamily="34" charset="0"/>
+                <a:ea typeface="Arial" pitchFamily="34" charset="-122"/>
+                <a:cs typeface="Arial" pitchFamily="34" charset="-120"/>
+              </a:rPr>
+              <a:t>Paraphrase of Bhāgavata Purāṇa Canto 3 element-cosmology (SB 3.26.40–51) — sourced from Module 2's RAG cache, not re-quoted in full here.</a:t>
+            </a:r>
+            <a:endParaRPr lang="en-US" sz="1200" dirty="0"/>
+          </a:p>
+          <a:p>
+            <a:pPr algn="l" marL="342900" indent="-342900">
+              <a:lnSpc>
+                <a:spcPts val="1620"/>
+              </a:lnSpc>
+              <a:spcAft>
+                <a:spcPts val="300"/>
+              </a:spcAft>
+              <a:buSzPct val="100000"/>
+              <a:buChar char="•"/>
+            </a:pPr>
+            <a:r>
+              <a:rPr lang="en-US" sz="1200" dirty="0">
+                <a:solidFill>
+                  <a:srgbClr val="1C2833"/>
+                </a:solidFill>
+                <a:latin typeface="Arial" pitchFamily="34" charset="0"/>
+                <a:ea typeface="Arial" pitchFamily="34" charset="-122"/>
+                <a:cs typeface="Arial" pitchFamily="34" charset="-120"/>
+              </a:rPr>
+              <a:t>See </a:t>
+            </a:r>
+            <a:pPr algn="l" indent="0" marL="0">
+              <a:lnSpc>
+                <a:spcPts val="1620"/>
+              </a:lnSpc>
+              <a:spcAft>
+                <a:spcPts val="300"/>
+              </a:spcAft>
+              <a:buNone/>
+            </a:pPr>
+            <a:r>
+              <a:rPr lang="en-US" sz="1200" dirty="0">
+                <a:solidFill>
+                  <a:srgbClr val="1C2833"/>
+                </a:solidFill>
+                <a:latin typeface="Arial" pitchFamily="34" charset="0"/>
+                <a:ea typeface="Arial" pitchFamily="34" charset="-122"/>
+                <a:cs typeface="Arial" pitchFamily="34" charset="-120"/>
+              </a:rPr>
               <a:t>sources.md</a:t>
             </a:r>
             <a:pPr algn="l" indent="0" marL="0">
               <a:lnSpc>
-                <a:spcPts val="1680"/>
-              </a:lnSpc>
-              <a:spcBef>
-                <a:spcPts val="300"/>
-              </a:spcBef>
+                <a:spcPts val="1620"/>
+              </a:lnSpc>
               <a:spcAft>
                 <a:spcPts val="300"/>
               </a:spcAft>
@@ -3625,7 +6469,7 @@
                 <a:ea typeface="Georgia" pitchFamily="34" charset="-122"/>
                 <a:cs typeface="Georgia" pitchFamily="34" charset="-120"/>
               </a:rPr>
-              <a:t>Materials</a:t>
+              <a:t>Learning objective</a:t>
             </a:r>
             <a:endParaRPr lang="en-US" sz="1800" dirty="0"/>
           </a:p>
@@ -3673,7 +6517,53 @@
                 <a:ea typeface="Arial" pitchFamily="34" charset="-122"/>
                 <a:cs typeface="Arial" pitchFamily="34" charset="-120"/>
               </a:rPr>
-              <a:t>– Whiteboard – Each student's Module 2 notebook (if available); otherwise a five-row table on the board – Five posters or sheets, one per element, labelled in Sanskrit + English – Sticky notes from Day 1</a:t>
+              <a:t>Students re-state the five elements from Module 2, and re-frame each one as a "family member" of the ecological family — so the </a:t>
+            </a:r>
+            <a:pPr algn="l" indent="0" marL="0">
+              <a:lnSpc>
+                <a:spcPts val="1680"/>
+              </a:lnSpc>
+              <a:spcBef>
+                <a:spcPts val="300"/>
+              </a:spcBef>
+              <a:spcAft>
+                <a:spcPts val="300"/>
+              </a:spcAft>
+              <a:buNone/>
+            </a:pPr>
+            <a:r>
+              <a:rPr lang="en-US" sz="1200" i="1" dirty="0">
+                <a:solidFill>
+                  <a:srgbClr val="1C2833"/>
+                </a:solidFill>
+                <a:latin typeface="Arial" pitchFamily="34" charset="0"/>
+                <a:ea typeface="Arial" pitchFamily="34" charset="-122"/>
+                <a:cs typeface="Arial" pitchFamily="34" charset="-120"/>
+              </a:rPr>
+              <a:t>vasudhaiva kuṭumbakam</a:t>
+            </a:r>
+            <a:pPr algn="l" indent="0" marL="0">
+              <a:lnSpc>
+                <a:spcPts val="1680"/>
+              </a:lnSpc>
+              <a:spcBef>
+                <a:spcPts val="300"/>
+              </a:spcBef>
+              <a:spcAft>
+                <a:spcPts val="300"/>
+              </a:spcAft>
+              <a:buNone/>
+            </a:pPr>
+            <a:r>
+              <a:rPr lang="en-US" sz="1200" dirty="0">
+                <a:solidFill>
+                  <a:srgbClr val="1C2833"/>
+                </a:solidFill>
+                <a:latin typeface="Arial" pitchFamily="34" charset="0"/>
+                <a:ea typeface="Arial" pitchFamily="34" charset="-122"/>
+                <a:cs typeface="Arial" pitchFamily="34" charset="-120"/>
+              </a:rPr>
+              <a:t> ethic gets concrete, element by element.</a:t>
             </a:r>
             <a:endParaRPr lang="en-US" sz="1200" dirty="0"/>
           </a:p>
@@ -3831,7 +6721,7 @@
                 <a:ea typeface="Georgia" pitchFamily="34" charset="-122"/>
                 <a:cs typeface="Georgia" pitchFamily="34" charset="-120"/>
               </a:rPr>
-              <a:t>Vocabulary</a:t>
+              <a:t>Materials</a:t>
             </a:r>
             <a:endParaRPr lang="en-US" sz="1800" dirty="0"/>
           </a:p>
@@ -3845,8 +6735,8 @@
         </p:nvSpPr>
         <p:spPr>
           <a:xfrm>
-            <a:off x="406301" y="870942"/>
-            <a:ext cx="8498026" cy="213271"/>
+            <a:off x="634901" y="883593"/>
+            <a:ext cx="8102798" cy="1013222"/>
           </a:xfrm>
           <a:prstGeom prst="rect">
             <a:avLst/>
@@ -3858,54 +6748,6 @@
           <a:bodyPr wrap="square" lIns="0" tIns="0" rIns="0" bIns="0" rtlCol="0" anchor="t"/>
           <a:lstStyle/>
           <a:p>
-            <a:pPr algn="l" indent="0" marL="0">
-              <a:lnSpc>
-                <a:spcPts val="1680"/>
-              </a:lnSpc>
-              <a:spcBef>
-                <a:spcPts val="300"/>
-              </a:spcBef>
-              <a:spcAft>
-                <a:spcPts val="300"/>
-              </a:spcAft>
-              <a:buNone/>
-            </a:pPr>
-            <a:r>
-              <a:rPr lang="en-US" sz="1200" dirty="0">
-                <a:solidFill>
-                  <a:srgbClr val="1C2833"/>
-                </a:solidFill>
-                <a:latin typeface="Arial" pitchFamily="34" charset="0"/>
-                <a:ea typeface="Arial" pitchFamily="34" charset="-122"/>
-                <a:cs typeface="Arial" pitchFamily="34" charset="-120"/>
-              </a:rPr>
-              <a:t>(All from Module 2 — review, do not introduce as new.)</a:t>
-            </a:r>
-            <a:endParaRPr lang="en-US" sz="1200" dirty="0"/>
-          </a:p>
-        </p:txBody>
-      </p:sp>
-      <p:sp>
-        <p:nvSpPr>
-          <p:cNvPr id="5" name="Text 3"/>
-          <p:cNvSpPr/>
-          <p:nvPr/>
-        </p:nvSpPr>
-        <p:spPr>
-          <a:xfrm>
-            <a:off x="634901" y="1173063"/>
-            <a:ext cx="8102798" cy="1257002"/>
-          </a:xfrm>
-          <a:prstGeom prst="rect">
-            <a:avLst/>
-          </a:prstGeom>
-          <a:noFill/>
-          <a:ln/>
-        </p:spPr>
-        <p:txBody>
-          <a:bodyPr wrap="square" lIns="0" tIns="0" rIns="0" bIns="0" rtlCol="0" anchor="t"/>
-          <a:lstStyle/>
-          <a:p>
             <a:pPr algn="l" marL="342900" indent="-342900">
               <a:lnSpc>
                 <a:spcPts val="1620"/>
@@ -3917,26 +6759,6 @@
               <a:buChar char="•"/>
             </a:pPr>
             <a:r>
-              <a:rPr lang="en-US" sz="1200" i="1" dirty="0">
-                <a:solidFill>
-                  <a:srgbClr val="1C2833"/>
-                </a:solidFill>
-                <a:latin typeface="Arial" pitchFamily="34" charset="0"/>
-                <a:ea typeface="Arial" pitchFamily="34" charset="-122"/>
-                <a:cs typeface="Arial" pitchFamily="34" charset="-120"/>
-              </a:rPr>
-              <a:t>pṛthvī</a:t>
-            </a:r>
-            <a:pPr algn="l" indent="0" marL="0">
-              <a:lnSpc>
-                <a:spcPts val="1620"/>
-              </a:lnSpc>
-              <a:spcAft>
-                <a:spcPts val="300"/>
-              </a:spcAft>
-              <a:buNone/>
-            </a:pPr>
-            <a:r>
               <a:rPr lang="en-US" sz="1200" dirty="0">
                 <a:solidFill>
                   <a:srgbClr val="1C2833"/>
@@ -3945,7 +6767,7 @@
                 <a:ea typeface="Arial" pitchFamily="34" charset="-122"/>
                 <a:cs typeface="Arial" pitchFamily="34" charset="-120"/>
               </a:rPr>
-              <a:t> (earth / solid)</a:t>
+              <a:t>Whiteboard</a:t>
             </a:r>
             <a:endParaRPr lang="en-US" sz="1200" dirty="0"/>
           </a:p>
@@ -3961,26 +6783,6 @@
               <a:buChar char="•"/>
             </a:pPr>
             <a:r>
-              <a:rPr lang="en-US" sz="1200" i="1" dirty="0">
-                <a:solidFill>
-                  <a:srgbClr val="1C2833"/>
-                </a:solidFill>
-                <a:latin typeface="Arial" pitchFamily="34" charset="0"/>
-                <a:ea typeface="Arial" pitchFamily="34" charset="-122"/>
-                <a:cs typeface="Arial" pitchFamily="34" charset="-120"/>
-              </a:rPr>
-              <a:t>ap</a:t>
-            </a:r>
-            <a:pPr algn="l" indent="0" marL="0">
-              <a:lnSpc>
-                <a:spcPts val="1620"/>
-              </a:lnSpc>
-              <a:spcAft>
-                <a:spcPts val="300"/>
-              </a:spcAft>
-              <a:buNone/>
-            </a:pPr>
-            <a:r>
               <a:rPr lang="en-US" sz="1200" dirty="0">
                 <a:solidFill>
                   <a:srgbClr val="1C2833"/>
@@ -3989,47 +6791,7 @@
                 <a:ea typeface="Arial" pitchFamily="34" charset="-122"/>
                 <a:cs typeface="Arial" pitchFamily="34" charset="-120"/>
               </a:rPr>
-              <a:t> / </a:t>
-            </a:r>
-            <a:pPr algn="l" indent="0" marL="0">
-              <a:lnSpc>
-                <a:spcPts val="1620"/>
-              </a:lnSpc>
-              <a:spcAft>
-                <a:spcPts val="300"/>
-              </a:spcAft>
-              <a:buNone/>
-            </a:pPr>
-            <a:r>
-              <a:rPr lang="en-US" sz="1200" i="1" dirty="0">
-                <a:solidFill>
-                  <a:srgbClr val="1C2833"/>
-                </a:solidFill>
-                <a:latin typeface="Arial" pitchFamily="34" charset="0"/>
-                <a:ea typeface="Arial" pitchFamily="34" charset="-122"/>
-                <a:cs typeface="Arial" pitchFamily="34" charset="-120"/>
-              </a:rPr>
-              <a:t>jala</a:t>
-            </a:r>
-            <a:pPr algn="l" indent="0" marL="0">
-              <a:lnSpc>
-                <a:spcPts val="1620"/>
-              </a:lnSpc>
-              <a:spcAft>
-                <a:spcPts val="300"/>
-              </a:spcAft>
-              <a:buNone/>
-            </a:pPr>
-            <a:r>
-              <a:rPr lang="en-US" sz="1200" dirty="0">
-                <a:solidFill>
-                  <a:srgbClr val="1C2833"/>
-                </a:solidFill>
-                <a:latin typeface="Arial" pitchFamily="34" charset="0"/>
-                <a:ea typeface="Arial" pitchFamily="34" charset="-122"/>
-                <a:cs typeface="Arial" pitchFamily="34" charset="-120"/>
-              </a:rPr>
-              <a:t> (water / liquid)</a:t>
+              <a:t>Each student's Module 2 notebook (if available); otherwise a five-row table on the board</a:t>
             </a:r>
             <a:endParaRPr lang="en-US" sz="1200" dirty="0"/>
           </a:p>
@@ -4045,26 +6807,6 @@
               <a:buChar char="•"/>
             </a:pPr>
             <a:r>
-              <a:rPr lang="en-US" sz="1200" i="1" dirty="0">
-                <a:solidFill>
-                  <a:srgbClr val="1C2833"/>
-                </a:solidFill>
-                <a:latin typeface="Arial" pitchFamily="34" charset="0"/>
-                <a:ea typeface="Arial" pitchFamily="34" charset="-122"/>
-                <a:cs typeface="Arial" pitchFamily="34" charset="-120"/>
-              </a:rPr>
-              <a:t>tejas</a:t>
-            </a:r>
-            <a:pPr algn="l" indent="0" marL="0">
-              <a:lnSpc>
-                <a:spcPts val="1620"/>
-              </a:lnSpc>
-              <a:spcAft>
-                <a:spcPts val="300"/>
-              </a:spcAft>
-              <a:buNone/>
-            </a:pPr>
-            <a:r>
               <a:rPr lang="en-US" sz="1200" dirty="0">
                 <a:solidFill>
                   <a:srgbClr val="1C2833"/>
@@ -4073,47 +6815,7 @@
                 <a:ea typeface="Arial" pitchFamily="34" charset="-122"/>
                 <a:cs typeface="Arial" pitchFamily="34" charset="-120"/>
               </a:rPr>
-              <a:t> / </a:t>
-            </a:r>
-            <a:pPr algn="l" indent="0" marL="0">
-              <a:lnSpc>
-                <a:spcPts val="1620"/>
-              </a:lnSpc>
-              <a:spcAft>
-                <a:spcPts val="300"/>
-              </a:spcAft>
-              <a:buNone/>
-            </a:pPr>
-            <a:r>
-              <a:rPr lang="en-US" sz="1200" i="1" dirty="0">
-                <a:solidFill>
-                  <a:srgbClr val="1C2833"/>
-                </a:solidFill>
-                <a:latin typeface="Arial" pitchFamily="34" charset="0"/>
-                <a:ea typeface="Arial" pitchFamily="34" charset="-122"/>
-                <a:cs typeface="Arial" pitchFamily="34" charset="-120"/>
-              </a:rPr>
-              <a:t>agni</a:t>
-            </a:r>
-            <a:pPr algn="l" indent="0" marL="0">
-              <a:lnSpc>
-                <a:spcPts val="1620"/>
-              </a:lnSpc>
-              <a:spcAft>
-                <a:spcPts val="300"/>
-              </a:spcAft>
-              <a:buNone/>
-            </a:pPr>
-            <a:r>
-              <a:rPr lang="en-US" sz="1200" dirty="0">
-                <a:solidFill>
-                  <a:srgbClr val="1C2833"/>
-                </a:solidFill>
-                <a:latin typeface="Arial" pitchFamily="34" charset="0"/>
-                <a:ea typeface="Arial" pitchFamily="34" charset="-122"/>
-                <a:cs typeface="Arial" pitchFamily="34" charset="-120"/>
-              </a:rPr>
-              <a:t> (fire / heat / light)</a:t>
+              <a:t>Five posters or sheets, one per element, labelled in Sanskrit + English</a:t>
             </a:r>
             <a:endParaRPr lang="en-US" sz="1200" dirty="0"/>
           </a:p>
@@ -4129,26 +6831,6 @@
               <a:buChar char="•"/>
             </a:pPr>
             <a:r>
-              <a:rPr lang="en-US" sz="1200" i="1" dirty="0">
-                <a:solidFill>
-                  <a:srgbClr val="1C2833"/>
-                </a:solidFill>
-                <a:latin typeface="Arial" pitchFamily="34" charset="0"/>
-                <a:ea typeface="Arial" pitchFamily="34" charset="-122"/>
-                <a:cs typeface="Arial" pitchFamily="34" charset="-120"/>
-              </a:rPr>
-              <a:t>vāyu</a:t>
-            </a:r>
-            <a:pPr algn="l" indent="0" marL="0">
-              <a:lnSpc>
-                <a:spcPts val="1620"/>
-              </a:lnSpc>
-              <a:spcAft>
-                <a:spcPts val="300"/>
-              </a:spcAft>
-              <a:buNone/>
-            </a:pPr>
-            <a:r>
               <a:rPr lang="en-US" sz="1200" dirty="0">
                 <a:solidFill>
                   <a:srgbClr val="1C2833"/>
@@ -4157,173 +6839,15 @@
                 <a:ea typeface="Arial" pitchFamily="34" charset="-122"/>
                 <a:cs typeface="Arial" pitchFamily="34" charset="-120"/>
               </a:rPr>
-              <a:t> (air / gas / movement)</a:t>
+              <a:t>Sticky notes from Day 1</a:t>
             </a:r>
             <a:endParaRPr lang="en-US" sz="1200" dirty="0"/>
           </a:p>
-          <a:p>
-            <a:pPr algn="l" marL="342900" indent="-342900">
-              <a:lnSpc>
-                <a:spcPts val="1620"/>
-              </a:lnSpc>
-              <a:spcAft>
-                <a:spcPts val="300"/>
-              </a:spcAft>
-              <a:buSzPct val="100000"/>
-              <a:buChar char="•"/>
-            </a:pPr>
-            <a:r>
-              <a:rPr lang="en-US" sz="1200" i="1" dirty="0">
-                <a:solidFill>
-                  <a:srgbClr val="1C2833"/>
-                </a:solidFill>
-                <a:latin typeface="Arial" pitchFamily="34" charset="0"/>
-                <a:ea typeface="Arial" pitchFamily="34" charset="-122"/>
-                <a:cs typeface="Arial" pitchFamily="34" charset="-120"/>
-              </a:rPr>
-              <a:t>ākāśa</a:t>
-            </a:r>
-            <a:pPr algn="l" indent="0" marL="0">
-              <a:lnSpc>
-                <a:spcPts val="1620"/>
-              </a:lnSpc>
-              <a:spcAft>
-                <a:spcPts val="300"/>
-              </a:spcAft>
-              <a:buNone/>
-            </a:pPr>
-            <a:r>
-              <a:rPr lang="en-US" sz="1200" dirty="0">
-                <a:solidFill>
-                  <a:srgbClr val="1C2833"/>
-                </a:solidFill>
-                <a:latin typeface="Arial" pitchFamily="34" charset="0"/>
-                <a:ea typeface="Arial" pitchFamily="34" charset="-122"/>
-                <a:cs typeface="Arial" pitchFamily="34" charset="-120"/>
-              </a:rPr>
-              <a:t> (space)</a:t>
-            </a:r>
-            <a:endParaRPr lang="en-US" sz="1200" dirty="0"/>
-          </a:p>
-        </p:txBody>
-      </p:sp>
-      <p:sp>
-        <p:nvSpPr>
-          <p:cNvPr id="6" name="Text 4"/>
-          <p:cNvSpPr/>
-          <p:nvPr/>
-        </p:nvSpPr>
-        <p:spPr>
-          <a:xfrm>
-            <a:off x="406301" y="2518916"/>
-            <a:ext cx="8498026" cy="213271"/>
-          </a:xfrm>
-          <a:prstGeom prst="rect">
-            <a:avLst/>
-          </a:prstGeom>
-          <a:noFill/>
-          <a:ln/>
-        </p:spPr>
-        <p:txBody>
-          <a:bodyPr wrap="square" lIns="0" tIns="0" rIns="0" bIns="0" rtlCol="0" anchor="t"/>
-          <a:lstStyle/>
-          <a:p>
-            <a:pPr algn="l" indent="0" marL="0">
-              <a:lnSpc>
-                <a:spcPts val="1680"/>
-              </a:lnSpc>
-              <a:spcBef>
-                <a:spcPts val="300"/>
-              </a:spcBef>
-              <a:spcAft>
-                <a:spcPts val="300"/>
-              </a:spcAft>
-              <a:buNone/>
-            </a:pPr>
-            <a:r>
-              <a:rPr lang="en-US" sz="1200" dirty="0">
-                <a:solidFill>
-                  <a:srgbClr val="1C2833"/>
-                </a:solidFill>
-                <a:latin typeface="Arial" pitchFamily="34" charset="0"/>
-                <a:ea typeface="Arial" pitchFamily="34" charset="-122"/>
-                <a:cs typeface="Arial" pitchFamily="34" charset="-120"/>
-              </a:rPr>
-              <a:t>Add today:</a:t>
-            </a:r>
-            <a:endParaRPr lang="en-US" sz="1200" dirty="0"/>
-          </a:p>
-        </p:txBody>
-      </p:sp>
-      <p:sp>
-        <p:nvSpPr>
-          <p:cNvPr id="7" name="Text 5"/>
-          <p:cNvSpPr/>
-          <p:nvPr/>
-        </p:nvSpPr>
-        <p:spPr>
-          <a:xfrm>
-            <a:off x="634901" y="2821037"/>
-            <a:ext cx="8102798" cy="487561"/>
-          </a:xfrm>
-          <a:prstGeom prst="rect">
-            <a:avLst/>
-          </a:prstGeom>
-          <a:noFill/>
-          <a:ln/>
-        </p:spPr>
-        <p:txBody>
-          <a:bodyPr wrap="square" lIns="0" tIns="0" rIns="0" bIns="0" rtlCol="0" anchor="t"/>
-          <a:lstStyle/>
-          <a:p>
-            <a:pPr algn="l" marL="342900" indent="-342900">
-              <a:lnSpc>
-                <a:spcPts val="1620"/>
-              </a:lnSpc>
-              <a:spcAft>
-                <a:spcPts val="300"/>
-              </a:spcAft>
-              <a:buSzPct val="100000"/>
-              <a:buChar char="•"/>
-            </a:pPr>
-            <a:r>
-              <a:rPr lang="en-US" sz="1200" i="1" dirty="0">
-                <a:solidFill>
-                  <a:srgbClr val="1C2833"/>
-                </a:solidFill>
-                <a:latin typeface="Arial" pitchFamily="34" charset="0"/>
-                <a:ea typeface="Arial" pitchFamily="34" charset="-122"/>
-                <a:cs typeface="Arial" pitchFamily="34" charset="-120"/>
-              </a:rPr>
-              <a:t>bhūta-saṁskāra</a:t>
-            </a:r>
-            <a:pPr algn="l" indent="0" marL="0">
-              <a:lnSpc>
-                <a:spcPts val="1620"/>
-              </a:lnSpc>
-              <a:spcAft>
-                <a:spcPts val="300"/>
-              </a:spcAft>
-              <a:buNone/>
-            </a:pPr>
-            <a:r>
-              <a:rPr lang="en-US" sz="1200" dirty="0">
-                <a:solidFill>
-                  <a:srgbClr val="1C2833"/>
-                </a:solidFill>
-                <a:latin typeface="Arial" pitchFamily="34" charset="0"/>
-                <a:ea typeface="Arial" pitchFamily="34" charset="-122"/>
-                <a:cs typeface="Arial" pitchFamily="34" charset="-120"/>
-              </a:rPr>
-              <a:t> (IAST: bhūta-saṁskāra; lit. "element-care") — a working term we use for "the care we owe each element." This is not a classical compound; we use it as a teaching shorthand.</a:t>
-            </a:r>
-            <a:endParaRPr lang="en-US" sz="1200" dirty="0"/>
-          </a:p>
-        </p:txBody>
-      </p:sp>
-      <p:sp>
-        <p:nvSpPr>
-          <p:cNvPr id="8" name="Text 6"/>
+        </p:txBody>
+      </p:sp>
+      <p:sp>
+        <p:nvSpPr>
+          <p:cNvPr id="5" name="Text 3"/>
           <p:cNvSpPr/>
           <p:nvPr/>
         </p:nvSpPr>
@@ -4473,7 +6997,7 @@
                 <a:ea typeface="Georgia" pitchFamily="34" charset="-122"/>
                 <a:cs typeface="Georgia" pitchFamily="34" charset="-120"/>
               </a:rPr>
-              <a:t>Lesson flow</a:t>
+              <a:t>Vocabulary</a:t>
             </a:r>
             <a:endParaRPr lang="en-US" sz="1800" dirty="0"/>
           </a:p>
@@ -4482,6 +7006,376 @@
       <p:sp>
         <p:nvSpPr>
           <p:cNvPr id="4" name="Text 2"/>
+          <p:cNvSpPr/>
+          <p:nvPr/>
+        </p:nvSpPr>
+        <p:spPr>
+          <a:xfrm>
+            <a:off x="406301" y="870942"/>
+            <a:ext cx="8498026" cy="213271"/>
+          </a:xfrm>
+          <a:prstGeom prst="rect">
+            <a:avLst/>
+          </a:prstGeom>
+          <a:noFill/>
+          <a:ln/>
+        </p:spPr>
+        <p:txBody>
+          <a:bodyPr wrap="square" lIns="0" tIns="0" rIns="0" bIns="0" rtlCol="0" anchor="t"/>
+          <a:lstStyle/>
+          <a:p>
+            <a:pPr algn="l" indent="0" marL="0">
+              <a:lnSpc>
+                <a:spcPts val="1680"/>
+              </a:lnSpc>
+              <a:spcBef>
+                <a:spcPts val="300"/>
+              </a:spcBef>
+              <a:spcAft>
+                <a:spcPts val="300"/>
+              </a:spcAft>
+              <a:buNone/>
+            </a:pPr>
+            <a:r>
+              <a:rPr lang="en-US" sz="1200" dirty="0">
+                <a:solidFill>
+                  <a:srgbClr val="1C2833"/>
+                </a:solidFill>
+                <a:latin typeface="Arial" pitchFamily="34" charset="0"/>
+                <a:ea typeface="Arial" pitchFamily="34" charset="-122"/>
+                <a:cs typeface="Arial" pitchFamily="34" charset="-120"/>
+              </a:rPr>
+              <a:t>(All from Module 2 — review, do not introduce as new.)</a:t>
+            </a:r>
+            <a:endParaRPr lang="en-US" sz="1200" dirty="0"/>
+          </a:p>
+        </p:txBody>
+      </p:sp>
+      <p:sp>
+        <p:nvSpPr>
+          <p:cNvPr id="5" name="Text 3"/>
+          <p:cNvSpPr/>
+          <p:nvPr/>
+        </p:nvSpPr>
+        <p:spPr>
+          <a:xfrm>
+            <a:off x="634901" y="1173063"/>
+            <a:ext cx="8102798" cy="1257002"/>
+          </a:xfrm>
+          <a:prstGeom prst="rect">
+            <a:avLst/>
+          </a:prstGeom>
+          <a:noFill/>
+          <a:ln/>
+        </p:spPr>
+        <p:txBody>
+          <a:bodyPr wrap="square" lIns="0" tIns="0" rIns="0" bIns="0" rtlCol="0" anchor="t"/>
+          <a:lstStyle/>
+          <a:p>
+            <a:pPr algn="l" marL="342900" indent="-342900">
+              <a:lnSpc>
+                <a:spcPts val="1620"/>
+              </a:lnSpc>
+              <a:spcAft>
+                <a:spcPts val="300"/>
+              </a:spcAft>
+              <a:buSzPct val="100000"/>
+              <a:buChar char="•"/>
+            </a:pPr>
+            <a:r>
+              <a:rPr lang="en-US" sz="1200" i="1" dirty="0">
+                <a:solidFill>
+                  <a:srgbClr val="1C2833"/>
+                </a:solidFill>
+                <a:latin typeface="Arial" pitchFamily="34" charset="0"/>
+                <a:ea typeface="Arial" pitchFamily="34" charset="-122"/>
+                <a:cs typeface="Arial" pitchFamily="34" charset="-120"/>
+              </a:rPr>
+              <a:t>pṛthvī</a:t>
+            </a:r>
+            <a:pPr algn="l" indent="0" marL="0">
+              <a:lnSpc>
+                <a:spcPts val="1620"/>
+              </a:lnSpc>
+              <a:spcAft>
+                <a:spcPts val="300"/>
+              </a:spcAft>
+              <a:buNone/>
+            </a:pPr>
+            <a:r>
+              <a:rPr lang="en-US" sz="1200" dirty="0">
+                <a:solidFill>
+                  <a:srgbClr val="1C2833"/>
+                </a:solidFill>
+                <a:latin typeface="Arial" pitchFamily="34" charset="0"/>
+                <a:ea typeface="Arial" pitchFamily="34" charset="-122"/>
+                <a:cs typeface="Arial" pitchFamily="34" charset="-120"/>
+              </a:rPr>
+              <a:t> (earth / solid)</a:t>
+            </a:r>
+            <a:endParaRPr lang="en-US" sz="1200" dirty="0"/>
+          </a:p>
+          <a:p>
+            <a:pPr algn="l" marL="342900" indent="-342900">
+              <a:lnSpc>
+                <a:spcPts val="1620"/>
+              </a:lnSpc>
+              <a:spcAft>
+                <a:spcPts val="300"/>
+              </a:spcAft>
+              <a:buSzPct val="100000"/>
+              <a:buChar char="•"/>
+            </a:pPr>
+            <a:r>
+              <a:rPr lang="en-US" sz="1200" i="1" dirty="0">
+                <a:solidFill>
+                  <a:srgbClr val="1C2833"/>
+                </a:solidFill>
+                <a:latin typeface="Arial" pitchFamily="34" charset="0"/>
+                <a:ea typeface="Arial" pitchFamily="34" charset="-122"/>
+                <a:cs typeface="Arial" pitchFamily="34" charset="-120"/>
+              </a:rPr>
+              <a:t>ap</a:t>
+            </a:r>
+            <a:pPr algn="l" indent="0" marL="0">
+              <a:lnSpc>
+                <a:spcPts val="1620"/>
+              </a:lnSpc>
+              <a:spcAft>
+                <a:spcPts val="300"/>
+              </a:spcAft>
+              <a:buNone/>
+            </a:pPr>
+            <a:r>
+              <a:rPr lang="en-US" sz="1200" dirty="0">
+                <a:solidFill>
+                  <a:srgbClr val="1C2833"/>
+                </a:solidFill>
+                <a:latin typeface="Arial" pitchFamily="34" charset="0"/>
+                <a:ea typeface="Arial" pitchFamily="34" charset="-122"/>
+                <a:cs typeface="Arial" pitchFamily="34" charset="-120"/>
+              </a:rPr>
+              <a:t> / </a:t>
+            </a:r>
+            <a:pPr algn="l" indent="0" marL="0">
+              <a:lnSpc>
+                <a:spcPts val="1620"/>
+              </a:lnSpc>
+              <a:spcAft>
+                <a:spcPts val="300"/>
+              </a:spcAft>
+              <a:buNone/>
+            </a:pPr>
+            <a:r>
+              <a:rPr lang="en-US" sz="1200" i="1" dirty="0">
+                <a:solidFill>
+                  <a:srgbClr val="1C2833"/>
+                </a:solidFill>
+                <a:latin typeface="Arial" pitchFamily="34" charset="0"/>
+                <a:ea typeface="Arial" pitchFamily="34" charset="-122"/>
+                <a:cs typeface="Arial" pitchFamily="34" charset="-120"/>
+              </a:rPr>
+              <a:t>jala</a:t>
+            </a:r>
+            <a:pPr algn="l" indent="0" marL="0">
+              <a:lnSpc>
+                <a:spcPts val="1620"/>
+              </a:lnSpc>
+              <a:spcAft>
+                <a:spcPts val="300"/>
+              </a:spcAft>
+              <a:buNone/>
+            </a:pPr>
+            <a:r>
+              <a:rPr lang="en-US" sz="1200" dirty="0">
+                <a:solidFill>
+                  <a:srgbClr val="1C2833"/>
+                </a:solidFill>
+                <a:latin typeface="Arial" pitchFamily="34" charset="0"/>
+                <a:ea typeface="Arial" pitchFamily="34" charset="-122"/>
+                <a:cs typeface="Arial" pitchFamily="34" charset="-120"/>
+              </a:rPr>
+              <a:t> (water / liquid)</a:t>
+            </a:r>
+            <a:endParaRPr lang="en-US" sz="1200" dirty="0"/>
+          </a:p>
+          <a:p>
+            <a:pPr algn="l" marL="342900" indent="-342900">
+              <a:lnSpc>
+                <a:spcPts val="1620"/>
+              </a:lnSpc>
+              <a:spcAft>
+                <a:spcPts val="300"/>
+              </a:spcAft>
+              <a:buSzPct val="100000"/>
+              <a:buChar char="•"/>
+            </a:pPr>
+            <a:r>
+              <a:rPr lang="en-US" sz="1200" i="1" dirty="0">
+                <a:solidFill>
+                  <a:srgbClr val="1C2833"/>
+                </a:solidFill>
+                <a:latin typeface="Arial" pitchFamily="34" charset="0"/>
+                <a:ea typeface="Arial" pitchFamily="34" charset="-122"/>
+                <a:cs typeface="Arial" pitchFamily="34" charset="-120"/>
+              </a:rPr>
+              <a:t>tejas</a:t>
+            </a:r>
+            <a:pPr algn="l" indent="0" marL="0">
+              <a:lnSpc>
+                <a:spcPts val="1620"/>
+              </a:lnSpc>
+              <a:spcAft>
+                <a:spcPts val="300"/>
+              </a:spcAft>
+              <a:buNone/>
+            </a:pPr>
+            <a:r>
+              <a:rPr lang="en-US" sz="1200" dirty="0">
+                <a:solidFill>
+                  <a:srgbClr val="1C2833"/>
+                </a:solidFill>
+                <a:latin typeface="Arial" pitchFamily="34" charset="0"/>
+                <a:ea typeface="Arial" pitchFamily="34" charset="-122"/>
+                <a:cs typeface="Arial" pitchFamily="34" charset="-120"/>
+              </a:rPr>
+              <a:t> / </a:t>
+            </a:r>
+            <a:pPr algn="l" indent="0" marL="0">
+              <a:lnSpc>
+                <a:spcPts val="1620"/>
+              </a:lnSpc>
+              <a:spcAft>
+                <a:spcPts val="300"/>
+              </a:spcAft>
+              <a:buNone/>
+            </a:pPr>
+            <a:r>
+              <a:rPr lang="en-US" sz="1200" i="1" dirty="0">
+                <a:solidFill>
+                  <a:srgbClr val="1C2833"/>
+                </a:solidFill>
+                <a:latin typeface="Arial" pitchFamily="34" charset="0"/>
+                <a:ea typeface="Arial" pitchFamily="34" charset="-122"/>
+                <a:cs typeface="Arial" pitchFamily="34" charset="-120"/>
+              </a:rPr>
+              <a:t>agni</a:t>
+            </a:r>
+            <a:pPr algn="l" indent="0" marL="0">
+              <a:lnSpc>
+                <a:spcPts val="1620"/>
+              </a:lnSpc>
+              <a:spcAft>
+                <a:spcPts val="300"/>
+              </a:spcAft>
+              <a:buNone/>
+            </a:pPr>
+            <a:r>
+              <a:rPr lang="en-US" sz="1200" dirty="0">
+                <a:solidFill>
+                  <a:srgbClr val="1C2833"/>
+                </a:solidFill>
+                <a:latin typeface="Arial" pitchFamily="34" charset="0"/>
+                <a:ea typeface="Arial" pitchFamily="34" charset="-122"/>
+                <a:cs typeface="Arial" pitchFamily="34" charset="-120"/>
+              </a:rPr>
+              <a:t> (fire / heat / light)</a:t>
+            </a:r>
+            <a:endParaRPr lang="en-US" sz="1200" dirty="0"/>
+          </a:p>
+          <a:p>
+            <a:pPr algn="l" marL="342900" indent="-342900">
+              <a:lnSpc>
+                <a:spcPts val="1620"/>
+              </a:lnSpc>
+              <a:spcAft>
+                <a:spcPts val="300"/>
+              </a:spcAft>
+              <a:buSzPct val="100000"/>
+              <a:buChar char="•"/>
+            </a:pPr>
+            <a:r>
+              <a:rPr lang="en-US" sz="1200" i="1" dirty="0">
+                <a:solidFill>
+                  <a:srgbClr val="1C2833"/>
+                </a:solidFill>
+                <a:latin typeface="Arial" pitchFamily="34" charset="0"/>
+                <a:ea typeface="Arial" pitchFamily="34" charset="-122"/>
+                <a:cs typeface="Arial" pitchFamily="34" charset="-120"/>
+              </a:rPr>
+              <a:t>vāyu</a:t>
+            </a:r>
+            <a:pPr algn="l" indent="0" marL="0">
+              <a:lnSpc>
+                <a:spcPts val="1620"/>
+              </a:lnSpc>
+              <a:spcAft>
+                <a:spcPts val="300"/>
+              </a:spcAft>
+              <a:buNone/>
+            </a:pPr>
+            <a:r>
+              <a:rPr lang="en-US" sz="1200" dirty="0">
+                <a:solidFill>
+                  <a:srgbClr val="1C2833"/>
+                </a:solidFill>
+                <a:latin typeface="Arial" pitchFamily="34" charset="0"/>
+                <a:ea typeface="Arial" pitchFamily="34" charset="-122"/>
+                <a:cs typeface="Arial" pitchFamily="34" charset="-120"/>
+              </a:rPr>
+              <a:t> (air / gas / movement)</a:t>
+            </a:r>
+            <a:endParaRPr lang="en-US" sz="1200" dirty="0"/>
+          </a:p>
+          <a:p>
+            <a:pPr algn="l" marL="342900" indent="-342900">
+              <a:lnSpc>
+                <a:spcPts val="1620"/>
+              </a:lnSpc>
+              <a:spcAft>
+                <a:spcPts val="300"/>
+              </a:spcAft>
+              <a:buSzPct val="100000"/>
+              <a:buChar char="•"/>
+            </a:pPr>
+            <a:r>
+              <a:rPr lang="en-US" sz="1200" i="1" dirty="0">
+                <a:solidFill>
+                  <a:srgbClr val="1C2833"/>
+                </a:solidFill>
+                <a:latin typeface="Arial" pitchFamily="34" charset="0"/>
+                <a:ea typeface="Arial" pitchFamily="34" charset="-122"/>
+                <a:cs typeface="Arial" pitchFamily="34" charset="-120"/>
+              </a:rPr>
+              <a:t>ākāśa</a:t>
+            </a:r>
+            <a:pPr algn="l" indent="0" marL="0">
+              <a:lnSpc>
+                <a:spcPts val="1620"/>
+              </a:lnSpc>
+              <a:spcAft>
+                <a:spcPts val="300"/>
+              </a:spcAft>
+              <a:buNone/>
+            </a:pPr>
+            <a:r>
+              <a:rPr lang="en-US" sz="1200" dirty="0">
+                <a:solidFill>
+                  <a:srgbClr val="1C2833"/>
+                </a:solidFill>
+                <a:latin typeface="Arial" pitchFamily="34" charset="0"/>
+                <a:ea typeface="Arial" pitchFamily="34" charset="-122"/>
+                <a:cs typeface="Arial" pitchFamily="34" charset="-120"/>
+              </a:rPr>
+              <a:t> (space)</a:t>
+            </a:r>
+            <a:endParaRPr lang="en-US" sz="1200" dirty="0"/>
+          </a:p>
+        </p:txBody>
+      </p:sp>
+      <p:sp>
+        <p:nvSpPr>
+          <p:cNvPr id="6" name="Text 4"/>
           <p:cNvSpPr/>
           <p:nvPr/>
         </p:nvSpPr>
@@ -4631,7 +7525,7 @@
                 <a:ea typeface="Georgia" pitchFamily="34" charset="-122"/>
                 <a:cs typeface="Georgia" pitchFamily="34" charset="-120"/>
               </a:rPr>
-              <a:t>Warm-up (5 min)</a:t>
+              <a:t>Vocabulary (cont.)</a:t>
             </a:r>
             <a:endParaRPr lang="en-US" sz="1800" dirty="0"/>
           </a:p>
@@ -4646,7 +7540,7 @@
         <p:spPr>
           <a:xfrm>
             <a:off x="406301" y="870942"/>
-            <a:ext cx="8498026" cy="426541"/>
+            <a:ext cx="8498026" cy="213271"/>
           </a:xfrm>
           <a:prstGeom prst="rect">
             <a:avLst/>
@@ -4679,19 +7573,42 @@
                 <a:ea typeface="Arial" pitchFamily="34" charset="-122"/>
                 <a:cs typeface="Arial" pitchFamily="34" charset="-120"/>
               </a:rPr>
-              <a:t>– Read 3–4 anonymous exit slips from yesterday — students' "extended family" examples. – Quick chorus: </a:t>
-            </a:r>
-            <a:pPr algn="l" indent="0" marL="0">
-              <a:lnSpc>
-                <a:spcPts val="1680"/>
-              </a:lnSpc>
-              <a:spcBef>
-                <a:spcPts val="300"/>
-              </a:spcBef>
-              <a:spcAft>
-                <a:spcPts val="300"/>
-              </a:spcAft>
-              <a:buNone/>
+              <a:t>Add today:</a:t>
+            </a:r>
+            <a:endParaRPr lang="en-US" sz="1200" dirty="0"/>
+          </a:p>
+        </p:txBody>
+      </p:sp>
+      <p:sp>
+        <p:nvSpPr>
+          <p:cNvPr id="5" name="Text 3"/>
+          <p:cNvSpPr/>
+          <p:nvPr/>
+        </p:nvSpPr>
+        <p:spPr>
+          <a:xfrm>
+            <a:off x="634901" y="1173063"/>
+            <a:ext cx="8102798" cy="487561"/>
+          </a:xfrm>
+          <a:prstGeom prst="rect">
+            <a:avLst/>
+          </a:prstGeom>
+          <a:noFill/>
+          <a:ln/>
+        </p:spPr>
+        <p:txBody>
+          <a:bodyPr wrap="square" lIns="0" tIns="0" rIns="0" bIns="0" rtlCol="0" anchor="t"/>
+          <a:lstStyle/>
+          <a:p>
+            <a:pPr algn="l" marL="342900" indent="-342900">
+              <a:lnSpc>
+                <a:spcPts val="1620"/>
+              </a:lnSpc>
+              <a:spcAft>
+                <a:spcPts val="300"/>
+              </a:spcAft>
+              <a:buSzPct val="100000"/>
+              <a:buChar char="•"/>
             </a:pPr>
             <a:r>
               <a:rPr lang="en-US" sz="1200" i="1" dirty="0">
@@ -4702,15 +7619,12 @@
                 <a:ea typeface="Arial" pitchFamily="34" charset="-122"/>
                 <a:cs typeface="Arial" pitchFamily="34" charset="-120"/>
               </a:rPr>
-              <a:t>"What were the five elements from Module 2?"</a:t>
-            </a:r>
-            <a:pPr algn="l" indent="0" marL="0">
-              <a:lnSpc>
-                <a:spcPts val="1680"/>
-              </a:lnSpc>
-              <a:spcBef>
-                <a:spcPts val="300"/>
-              </a:spcBef>
+              <a:t>bhūta-saṁskāra</a:t>
+            </a:r>
+            <a:pPr algn="l" indent="0" marL="0">
+              <a:lnSpc>
+                <a:spcPts val="1620"/>
+              </a:lnSpc>
               <a:spcAft>
                 <a:spcPts val="300"/>
               </a:spcAft>
@@ -4725,7 +7639,7 @@
                 <a:ea typeface="Arial" pitchFamily="34" charset="-122"/>
                 <a:cs typeface="Arial" pitchFamily="34" charset="-120"/>
               </a:rPr>
-              <a:t> — class names them in order.</a:t>
+              <a:t> (IAST: bhūta-saṁskāra; lit. "element-care") — a working term we use for "the care we owe each element." This is not a classical compound; we use it as a teaching shorthand.</a:t>
             </a:r>
             <a:endParaRPr lang="en-US" sz="1200" dirty="0"/>
           </a:p>
@@ -4733,7 +7647,7 @@
       </p:sp>
       <p:sp>
         <p:nvSpPr>
-          <p:cNvPr id="5" name="Text 3"/>
+          <p:cNvPr id="6" name="Text 4"/>
           <p:cNvSpPr/>
           <p:nvPr/>
         </p:nvSpPr>
@@ -4883,7 +7797,7 @@
                 <a:ea typeface="Georgia" pitchFamily="34" charset="-122"/>
                 <a:cs typeface="Georgia" pitchFamily="34" charset="-120"/>
               </a:rPr>
-              <a:t>Core (20 min)</a:t>
+              <a:t>Lesson flow</a:t>
             </a:r>
             <a:endParaRPr lang="en-US" sz="1800" dirty="0"/>
           </a:p>
@@ -4897,803 +7811,7 @@
         </p:nvSpPr>
         <p:spPr>
           <a:xfrm>
-            <a:off x="634901" y="883593"/>
-            <a:ext cx="8102798" cy="281880"/>
-          </a:xfrm>
-          <a:prstGeom prst="rect">
-            <a:avLst/>
-          </a:prstGeom>
-          <a:noFill/>
-          <a:ln/>
-        </p:spPr>
-        <p:txBody>
-          <a:bodyPr wrap="square" lIns="0" tIns="0" rIns="0" bIns="0" rtlCol="0" anchor="t"/>
-          <a:lstStyle/>
-          <a:p>
-            <a:pPr algn="l" marL="342900" indent="-342900">
-              <a:lnSpc>
-                <a:spcPts val="1620"/>
-              </a:lnSpc>
-              <a:spcAft>
-                <a:spcPts val="300"/>
-              </a:spcAft>
-              <a:buSzPct val="100000"/>
-              <a:buChar char="•"/>
-            </a:pPr>
-            <a:r>
-              <a:rPr lang="en-US" sz="1200" b="1" dirty="0">
-                <a:solidFill>
-                  <a:srgbClr val="1C2833"/>
-                </a:solidFill>
-                <a:latin typeface="Arial" pitchFamily="34" charset="0"/>
-                <a:ea typeface="Arial" pitchFamily="34" charset="-122"/>
-                <a:cs typeface="Arial" pitchFamily="34" charset="-120"/>
-              </a:rPr>
-              <a:t>Re-draw the five-element chart on the board:</a:t>
-            </a:r>
-            <a:endParaRPr lang="en-US" sz="1200" dirty="0"/>
-          </a:p>
-        </p:txBody>
-      </p:sp>
-      <p:sp>
-        <p:nvSpPr>
-          <p:cNvPr id="5" name="Text 3"/>
-          <p:cNvSpPr/>
-          <p:nvPr/>
-        </p:nvSpPr>
-        <p:spPr>
-          <a:xfrm>
-            <a:off x="406301" y="1254323"/>
-            <a:ext cx="8498026" cy="213271"/>
-          </a:xfrm>
-          <a:prstGeom prst="rect">
-            <a:avLst/>
-          </a:prstGeom>
-          <a:noFill/>
-          <a:ln/>
-        </p:spPr>
-        <p:txBody>
-          <a:bodyPr wrap="square" lIns="0" tIns="0" rIns="0" bIns="0" rtlCol="0" anchor="t"/>
-          <a:lstStyle/>
-          <a:p>
-            <a:pPr algn="l" indent="0" marL="0">
-              <a:lnSpc>
-                <a:spcPts val="1680"/>
-              </a:lnSpc>
-              <a:spcBef>
-                <a:spcPts val="300"/>
-              </a:spcBef>
-              <a:spcAft>
-                <a:spcPts val="300"/>
-              </a:spcAft>
-              <a:buNone/>
-            </a:pPr>
-            <a:r>
-              <a:rPr lang="en-US" sz="1200" i="1" dirty="0">
-                <a:solidFill>
-                  <a:srgbClr val="1C2833"/>
-                </a:solidFill>
-                <a:latin typeface="Arial" pitchFamily="34" charset="0"/>
-                <a:ea typeface="Arial" pitchFamily="34" charset="-122"/>
-                <a:cs typeface="Arial" pitchFamily="34" charset="-120"/>
-              </a:rPr>
-              <a:t>Each row: Element · English · One thing it does for us · One way we pollute it.</a:t>
-            </a:r>
-            <a:endParaRPr lang="en-US" sz="1200" dirty="0"/>
-          </a:p>
-        </p:txBody>
-      </p:sp>
-      <p:sp>
-        <p:nvSpPr>
-          <p:cNvPr id="6" name="Text 4"/>
-          <p:cNvSpPr/>
-          <p:nvPr/>
-        </p:nvSpPr>
-        <p:spPr>
-          <a:xfrm>
-            <a:off x="634901" y="1556445"/>
-            <a:ext cx="8102798" cy="1257002"/>
-          </a:xfrm>
-          <a:prstGeom prst="rect">
-            <a:avLst/>
-          </a:prstGeom>
-          <a:noFill/>
-          <a:ln/>
-        </p:spPr>
-        <p:txBody>
-          <a:bodyPr wrap="square" lIns="0" tIns="0" rIns="0" bIns="0" rtlCol="0" anchor="t"/>
-          <a:lstStyle/>
-          <a:p>
-            <a:pPr algn="l" marL="342900" indent="-342900">
-              <a:lnSpc>
-                <a:spcPts val="1620"/>
-              </a:lnSpc>
-              <a:spcAft>
-                <a:spcPts val="300"/>
-              </a:spcAft>
-              <a:buSzPct val="100000"/>
-              <a:buChar char="•"/>
-            </a:pPr>
-            <a:r>
-              <a:rPr lang="en-US" sz="1200" i="1" dirty="0">
-                <a:solidFill>
-                  <a:srgbClr val="1C2833"/>
-                </a:solidFill>
-                <a:latin typeface="Arial" pitchFamily="34" charset="0"/>
-                <a:ea typeface="Arial" pitchFamily="34" charset="-122"/>
-                <a:cs typeface="Arial" pitchFamily="34" charset="-120"/>
-              </a:rPr>
-              <a:t>pṛthvī</a:t>
-            </a:r>
-            <a:pPr algn="l" indent="0" marL="0">
-              <a:lnSpc>
-                <a:spcPts val="1620"/>
-              </a:lnSpc>
-              <a:spcAft>
-                <a:spcPts val="300"/>
-              </a:spcAft>
-              <a:buNone/>
-            </a:pPr>
-            <a:r>
-              <a:rPr lang="en-US" sz="1200" dirty="0">
-                <a:solidFill>
-                  <a:srgbClr val="1C2833"/>
-                </a:solidFill>
-                <a:latin typeface="Arial" pitchFamily="34" charset="0"/>
-                <a:ea typeface="Arial" pitchFamily="34" charset="-122"/>
-                <a:cs typeface="Arial" pitchFamily="34" charset="-120"/>
-              </a:rPr>
-              <a:t> — earth / solid · Soil for food, ground to stand on · Plastic waste, chemical fertiliser</a:t>
-            </a:r>
-            <a:endParaRPr lang="en-US" sz="1200" dirty="0"/>
-          </a:p>
-          <a:p>
-            <a:pPr algn="l" marL="342900" indent="-342900">
-              <a:lnSpc>
-                <a:spcPts val="1620"/>
-              </a:lnSpc>
-              <a:spcAft>
-                <a:spcPts val="300"/>
-              </a:spcAft>
-              <a:buSzPct val="100000"/>
-              <a:buChar char="•"/>
-            </a:pPr>
-            <a:r>
-              <a:rPr lang="en-US" sz="1200" i="1" dirty="0">
-                <a:solidFill>
-                  <a:srgbClr val="1C2833"/>
-                </a:solidFill>
-                <a:latin typeface="Arial" pitchFamily="34" charset="0"/>
-                <a:ea typeface="Arial" pitchFamily="34" charset="-122"/>
-                <a:cs typeface="Arial" pitchFamily="34" charset="-120"/>
-              </a:rPr>
-              <a:t>ap</a:t>
-            </a:r>
-            <a:pPr algn="l" indent="0" marL="0">
-              <a:lnSpc>
-                <a:spcPts val="1620"/>
-              </a:lnSpc>
-              <a:spcAft>
-                <a:spcPts val="300"/>
-              </a:spcAft>
-              <a:buNone/>
-            </a:pPr>
-            <a:r>
-              <a:rPr lang="en-US" sz="1200" dirty="0">
-                <a:solidFill>
-                  <a:srgbClr val="1C2833"/>
-                </a:solidFill>
-                <a:latin typeface="Arial" pitchFamily="34" charset="0"/>
-                <a:ea typeface="Arial" pitchFamily="34" charset="-122"/>
-                <a:cs typeface="Arial" pitchFamily="34" charset="-120"/>
-              </a:rPr>
-              <a:t> — water · Drink, wash, irrigate · Sewage, industrial effluent</a:t>
-            </a:r>
-            <a:endParaRPr lang="en-US" sz="1200" dirty="0"/>
-          </a:p>
-          <a:p>
-            <a:pPr algn="l" marL="342900" indent="-342900">
-              <a:lnSpc>
-                <a:spcPts val="1620"/>
-              </a:lnSpc>
-              <a:spcAft>
-                <a:spcPts val="300"/>
-              </a:spcAft>
-              <a:buSzPct val="100000"/>
-              <a:buChar char="•"/>
-            </a:pPr>
-            <a:r>
-              <a:rPr lang="en-US" sz="1200" i="1" dirty="0">
-                <a:solidFill>
-                  <a:srgbClr val="1C2833"/>
-                </a:solidFill>
-                <a:latin typeface="Arial" pitchFamily="34" charset="0"/>
-                <a:ea typeface="Arial" pitchFamily="34" charset="-122"/>
-                <a:cs typeface="Arial" pitchFamily="34" charset="-120"/>
-              </a:rPr>
-              <a:t>tejas</a:t>
-            </a:r>
-            <a:pPr algn="l" indent="0" marL="0">
-              <a:lnSpc>
-                <a:spcPts val="1620"/>
-              </a:lnSpc>
-              <a:spcAft>
-                <a:spcPts val="300"/>
-              </a:spcAft>
-              <a:buNone/>
-            </a:pPr>
-            <a:r>
-              <a:rPr lang="en-US" sz="1200" dirty="0">
-                <a:solidFill>
-                  <a:srgbClr val="1C2833"/>
-                </a:solidFill>
-                <a:latin typeface="Arial" pitchFamily="34" charset="0"/>
-                <a:ea typeface="Arial" pitchFamily="34" charset="-122"/>
-                <a:cs typeface="Arial" pitchFamily="34" charset="-120"/>
-              </a:rPr>
-              <a:t> — fire / heat / light · Cook, warm, illuminate · Burning fossil fuels (CO₂)</a:t>
-            </a:r>
-            <a:endParaRPr lang="en-US" sz="1200" dirty="0"/>
-          </a:p>
-          <a:p>
-            <a:pPr algn="l" marL="342900" indent="-342900">
-              <a:lnSpc>
-                <a:spcPts val="1620"/>
-              </a:lnSpc>
-              <a:spcAft>
-                <a:spcPts val="300"/>
-              </a:spcAft>
-              <a:buSzPct val="100000"/>
-              <a:buChar char="•"/>
-            </a:pPr>
-            <a:r>
-              <a:rPr lang="en-US" sz="1200" i="1" dirty="0">
-                <a:solidFill>
-                  <a:srgbClr val="1C2833"/>
-                </a:solidFill>
-                <a:latin typeface="Arial" pitchFamily="34" charset="0"/>
-                <a:ea typeface="Arial" pitchFamily="34" charset="-122"/>
-                <a:cs typeface="Arial" pitchFamily="34" charset="-120"/>
-              </a:rPr>
-              <a:t>vāyu</a:t>
-            </a:r>
-            <a:pPr algn="l" indent="0" marL="0">
-              <a:lnSpc>
-                <a:spcPts val="1620"/>
-              </a:lnSpc>
-              <a:spcAft>
-                <a:spcPts val="300"/>
-              </a:spcAft>
-              <a:buNone/>
-            </a:pPr>
-            <a:r>
-              <a:rPr lang="en-US" sz="1200" dirty="0">
-                <a:solidFill>
-                  <a:srgbClr val="1C2833"/>
-                </a:solidFill>
-                <a:latin typeface="Arial" pitchFamily="34" charset="0"/>
-                <a:ea typeface="Arial" pitchFamily="34" charset="-122"/>
-                <a:cs typeface="Arial" pitchFamily="34" charset="-120"/>
-              </a:rPr>
-              <a:t> — air · Breath, wind, weather · Vehicle exhaust, factory smoke</a:t>
-            </a:r>
-            <a:endParaRPr lang="en-US" sz="1200" dirty="0"/>
-          </a:p>
-          <a:p>
-            <a:pPr algn="l" marL="342900" indent="-342900">
-              <a:lnSpc>
-                <a:spcPts val="1620"/>
-              </a:lnSpc>
-              <a:spcAft>
-                <a:spcPts val="300"/>
-              </a:spcAft>
-              <a:buSzPct val="100000"/>
-              <a:buChar char="•"/>
-            </a:pPr>
-            <a:r>
-              <a:rPr lang="en-US" sz="1200" i="1" dirty="0">
-                <a:solidFill>
-                  <a:srgbClr val="1C2833"/>
-                </a:solidFill>
-                <a:latin typeface="Arial" pitchFamily="34" charset="0"/>
-                <a:ea typeface="Arial" pitchFamily="34" charset="-122"/>
-                <a:cs typeface="Arial" pitchFamily="34" charset="-120"/>
-              </a:rPr>
-              <a:t>ākāśa</a:t>
-            </a:r>
-            <a:pPr algn="l" indent="0" marL="0">
-              <a:lnSpc>
-                <a:spcPts val="1620"/>
-              </a:lnSpc>
-              <a:spcAft>
-                <a:spcPts val="300"/>
-              </a:spcAft>
-              <a:buNone/>
-            </a:pPr>
-            <a:r>
-              <a:rPr lang="en-US" sz="1200" dirty="0">
-                <a:solidFill>
-                  <a:srgbClr val="1C2833"/>
-                </a:solidFill>
-                <a:latin typeface="Arial" pitchFamily="34" charset="0"/>
-                <a:ea typeface="Arial" pitchFamily="34" charset="-122"/>
-                <a:cs typeface="Arial" pitchFamily="34" charset="-120"/>
-              </a:rPr>
-              <a:t> — space · Room to live, transmit sound · Noise, light pollution, satellite debris</a:t>
-            </a:r>
-            <a:endParaRPr lang="en-US" sz="1200" dirty="0"/>
-          </a:p>
-        </p:txBody>
-      </p:sp>
-      <p:sp>
-        <p:nvSpPr>
-          <p:cNvPr id="7" name="Text 5"/>
-          <p:cNvSpPr/>
-          <p:nvPr/>
-        </p:nvSpPr>
-        <p:spPr>
-          <a:xfrm>
-            <a:off x="634901" y="2914948"/>
-            <a:ext cx="8102798" cy="487561"/>
-          </a:xfrm>
-          <a:prstGeom prst="rect">
-            <a:avLst/>
-          </a:prstGeom>
-          <a:noFill/>
-          <a:ln/>
-        </p:spPr>
-        <p:txBody>
-          <a:bodyPr wrap="square" lIns="0" tIns="0" rIns="0" bIns="0" rtlCol="0" anchor="t"/>
-          <a:lstStyle/>
-          <a:p>
-            <a:pPr algn="l" marL="342900" indent="-342900">
-              <a:lnSpc>
-                <a:spcPts val="1620"/>
-              </a:lnSpc>
-              <a:spcAft>
-                <a:spcPts val="300"/>
-              </a:spcAft>
-              <a:buSzPct val="100000"/>
-              <a:buChar char="•"/>
-            </a:pPr>
-            <a:r>
-              <a:rPr lang="en-US" sz="1200" b="1" dirty="0">
-                <a:solidFill>
-                  <a:srgbClr val="1C2833"/>
-                </a:solidFill>
-                <a:latin typeface="Arial" pitchFamily="34" charset="0"/>
-                <a:ea typeface="Arial" pitchFamily="34" charset="-122"/>
-                <a:cs typeface="Arial" pitchFamily="34" charset="-120"/>
-              </a:rPr>
-              <a:t>The reframe.</a:t>
-            </a:r>
-            <a:pPr algn="l" indent="0" marL="0">
-              <a:lnSpc>
-                <a:spcPts val="1620"/>
-              </a:lnSpc>
-              <a:spcAft>
-                <a:spcPts val="300"/>
-              </a:spcAft>
-              <a:buNone/>
-            </a:pPr>
-            <a:r>
-              <a:rPr lang="en-US" sz="1200" dirty="0">
-                <a:solidFill>
-                  <a:srgbClr val="1C2833"/>
-                </a:solidFill>
-                <a:latin typeface="Arial" pitchFamily="34" charset="0"/>
-                <a:ea typeface="Arial" pitchFamily="34" charset="-122"/>
-                <a:cs typeface="Arial" pitchFamily="34" charset="-120"/>
-              </a:rPr>
-              <a:t> </a:t>
-            </a:r>
-            <a:pPr algn="l" indent="0" marL="0">
-              <a:lnSpc>
-                <a:spcPts val="1620"/>
-              </a:lnSpc>
-              <a:spcAft>
-                <a:spcPts val="300"/>
-              </a:spcAft>
-              <a:buNone/>
-            </a:pPr>
-            <a:r>
-              <a:rPr lang="en-US" sz="1200" i="1" dirty="0">
-                <a:solidFill>
-                  <a:srgbClr val="1C2833"/>
-                </a:solidFill>
-                <a:latin typeface="Arial" pitchFamily="34" charset="0"/>
-                <a:ea typeface="Arial" pitchFamily="34" charset="-122"/>
-                <a:cs typeface="Arial" pitchFamily="34" charset="-120"/>
-              </a:rPr>
-              <a:t>"In Module 2 we learned the five elements as categories of matter. Today we look at the same five as members of the family."</a:t>
-            </a:r>
-            <a:pPr algn="l" indent="0" marL="0">
-              <a:lnSpc>
-                <a:spcPts val="1620"/>
-              </a:lnSpc>
-              <a:spcAft>
-                <a:spcPts val="300"/>
-              </a:spcAft>
-              <a:buNone/>
-            </a:pPr>
-            <a:r>
-              <a:rPr lang="en-US" sz="1200" dirty="0">
-                <a:solidFill>
-                  <a:srgbClr val="1C2833"/>
-                </a:solidFill>
-                <a:latin typeface="Arial" pitchFamily="34" charset="0"/>
-                <a:ea typeface="Arial" pitchFamily="34" charset="-122"/>
-                <a:cs typeface="Arial" pitchFamily="34" charset="-120"/>
-              </a:rPr>
-              <a:t> Each element gives us something; we owe each one something back.</a:t>
-            </a:r>
-            <a:endParaRPr lang="en-US" sz="1200" dirty="0"/>
-          </a:p>
-        </p:txBody>
-      </p:sp>
-      <p:sp>
-        <p:nvSpPr>
-          <p:cNvPr id="8" name="Text 6"/>
-          <p:cNvSpPr/>
-          <p:nvPr/>
-        </p:nvSpPr>
-        <p:spPr>
-          <a:xfrm>
-            <a:off x="634901" y="3504009"/>
-            <a:ext cx="8102798" cy="693241"/>
-          </a:xfrm>
-          <a:prstGeom prst="rect">
-            <a:avLst/>
-          </a:prstGeom>
-          <a:noFill/>
-          <a:ln/>
-        </p:spPr>
-        <p:txBody>
-          <a:bodyPr wrap="square" lIns="0" tIns="0" rIns="0" bIns="0" rtlCol="0" anchor="t"/>
-          <a:lstStyle/>
-          <a:p>
-            <a:pPr algn="l" marL="342900" indent="-342900">
-              <a:lnSpc>
-                <a:spcPts val="1620"/>
-              </a:lnSpc>
-              <a:spcAft>
-                <a:spcPts val="300"/>
-              </a:spcAft>
-              <a:buSzPct val="100000"/>
-              <a:buChar char="•"/>
-            </a:pPr>
-            <a:r>
-              <a:rPr lang="en-US" sz="1200" b="1" dirty="0">
-                <a:solidFill>
-                  <a:srgbClr val="1C2833"/>
-                </a:solidFill>
-                <a:latin typeface="Arial" pitchFamily="34" charset="0"/>
-                <a:ea typeface="Arial" pitchFamily="34" charset="-122"/>
-                <a:cs typeface="Arial" pitchFamily="34" charset="-120"/>
-              </a:rPr>
-              <a:t>Why this is an ecological lens.</a:t>
-            </a:r>
-            <a:pPr algn="l" indent="0" marL="0">
-              <a:lnSpc>
-                <a:spcPts val="1620"/>
-              </a:lnSpc>
-              <a:spcAft>
-                <a:spcPts val="300"/>
-              </a:spcAft>
-              <a:buNone/>
-            </a:pPr>
-            <a:r>
-              <a:rPr lang="en-US" sz="1200" dirty="0">
-                <a:solidFill>
-                  <a:srgbClr val="1C2833"/>
-                </a:solidFill>
-                <a:latin typeface="Arial" pitchFamily="34" charset="0"/>
-                <a:ea typeface="Arial" pitchFamily="34" charset="-122"/>
-                <a:cs typeface="Arial" pitchFamily="34" charset="-120"/>
-              </a:rPr>
-              <a:t> Modern environmental science uses categories like "atmosphere," "hydrosphere," "lithosphere," "biosphere," etc. The five-element framework is a sensory, everyday version of the same idea. It says: </a:t>
-            </a:r>
-            <a:pPr algn="l" indent="0" marL="0">
-              <a:lnSpc>
-                <a:spcPts val="1620"/>
-              </a:lnSpc>
-              <a:spcAft>
-                <a:spcPts val="300"/>
-              </a:spcAft>
-              <a:buNone/>
-            </a:pPr>
-            <a:r>
-              <a:rPr lang="en-US" sz="1200" i="1" dirty="0">
-                <a:solidFill>
-                  <a:srgbClr val="1C2833"/>
-                </a:solidFill>
-                <a:latin typeface="Arial" pitchFamily="34" charset="0"/>
-                <a:ea typeface="Arial" pitchFamily="34" charset="-122"/>
-                <a:cs typeface="Arial" pitchFamily="34" charset="-120"/>
-              </a:rPr>
-              <a:t>the place you live is made of these five. Notice them. Care for each.</a:t>
-            </a:r>
-            <a:endParaRPr lang="en-US" sz="1200" dirty="0"/>
-          </a:p>
-        </p:txBody>
-      </p:sp>
-      <p:sp>
-        <p:nvSpPr>
-          <p:cNvPr id="9" name="Text 7"/>
-          <p:cNvSpPr/>
-          <p:nvPr/>
-        </p:nvSpPr>
-        <p:spPr>
-          <a:xfrm>
-            <a:off x="406301" y="4286101"/>
-            <a:ext cx="8498026" cy="426541"/>
-          </a:xfrm>
-          <a:prstGeom prst="rect">
-            <a:avLst/>
-          </a:prstGeom>
-          <a:noFill/>
-          <a:ln/>
-        </p:spPr>
-        <p:txBody>
-          <a:bodyPr wrap="square" lIns="0" tIns="0" rIns="0" bIns="0" rtlCol="0" anchor="t"/>
-          <a:lstStyle/>
-          <a:p>
-            <a:pPr algn="l" indent="0" marL="0">
-              <a:lnSpc>
-                <a:spcPts val="1680"/>
-              </a:lnSpc>
-              <a:spcBef>
-                <a:spcPts val="300"/>
-              </a:spcBef>
-              <a:spcAft>
-                <a:spcPts val="300"/>
-              </a:spcAft>
-              <a:buNone/>
-            </a:pPr>
-            <a:r>
-              <a:rPr lang="en-US" sz="1200" dirty="0">
-                <a:solidFill>
-                  <a:srgbClr val="1C2833"/>
-                </a:solidFill>
-                <a:latin typeface="Arial" pitchFamily="34" charset="0"/>
-                <a:ea typeface="Arial" pitchFamily="34" charset="-122"/>
-                <a:cs typeface="Arial" pitchFamily="34" charset="-120"/>
-              </a:rPr>
-              <a:t>&gt; "Earth, water, fire, air, and sky — these five great elements (</a:t>
-            </a:r>
-            <a:pPr algn="l" indent="0" marL="0">
-              <a:lnSpc>
-                <a:spcPts val="1680"/>
-              </a:lnSpc>
-              <a:spcBef>
-                <a:spcPts val="300"/>
-              </a:spcBef>
-              <a:spcAft>
-                <a:spcPts val="300"/>
-              </a:spcAft>
-              <a:buNone/>
-            </a:pPr>
-            <a:r>
-              <a:rPr lang="en-US" sz="1200" i="1" dirty="0">
-                <a:solidFill>
-                  <a:srgbClr val="1C2833"/>
-                </a:solidFill>
-                <a:latin typeface="Arial" pitchFamily="34" charset="0"/>
-                <a:ea typeface="Arial" pitchFamily="34" charset="-122"/>
-                <a:cs typeface="Arial" pitchFamily="34" charset="-120"/>
-              </a:rPr>
-              <a:t>pañca-mahābhūta</a:t>
-            </a:r>
-            <a:pPr algn="l" indent="0" marL="0">
-              <a:lnSpc>
-                <a:spcPts val="1680"/>
-              </a:lnSpc>
-              <a:spcBef>
-                <a:spcPts val="300"/>
-              </a:spcBef>
-              <a:spcAft>
-                <a:spcPts val="300"/>
-              </a:spcAft>
-              <a:buNone/>
-            </a:pPr>
-            <a:r>
-              <a:rPr lang="en-US" sz="1200" dirty="0">
-                <a:solidFill>
-                  <a:srgbClr val="1C2833"/>
-                </a:solidFill>
-                <a:latin typeface="Arial" pitchFamily="34" charset="0"/>
-                <a:ea typeface="Arial" pitchFamily="34" charset="-122"/>
-                <a:cs typeface="Arial" pitchFamily="34" charset="-120"/>
-              </a:rPr>
-              <a:t>) sustain all beings." &gt; — paraphrase from Bhāgavata Purāṇa Canto 3.</a:t>
-            </a:r>
-            <a:endParaRPr lang="en-US" sz="1200" dirty="0"/>
-          </a:p>
-        </p:txBody>
-      </p:sp>
-      <p:sp>
-        <p:nvSpPr>
-          <p:cNvPr id="10" name="Text 8"/>
-          <p:cNvSpPr/>
-          <p:nvPr/>
-        </p:nvSpPr>
-        <p:spPr>
-          <a:xfrm>
-            <a:off x="406301" y="4788843"/>
-            <a:ext cx="8498026" cy="213271"/>
-          </a:xfrm>
-          <a:prstGeom prst="rect">
-            <a:avLst/>
-          </a:prstGeom>
-          <a:noFill/>
-          <a:ln/>
-        </p:spPr>
-        <p:txBody>
-          <a:bodyPr wrap="square" lIns="0" tIns="0" rIns="0" bIns="0" rtlCol="0" anchor="t"/>
-          <a:lstStyle/>
-          <a:p>
-            <a:pPr algn="l" indent="0" marL="0">
-              <a:lnSpc>
-                <a:spcPts val="1680"/>
-              </a:lnSpc>
-              <a:spcBef>
-                <a:spcPts val="300"/>
-              </a:spcBef>
-              <a:spcAft>
-                <a:spcPts val="300"/>
-              </a:spcAft>
-              <a:buNone/>
-            </a:pPr>
-            <a:r>
-              <a:rPr lang="en-US" sz="1200" dirty="0">
-                <a:solidFill>
-                  <a:srgbClr val="1C2833"/>
-                </a:solidFill>
-                <a:latin typeface="Arial" pitchFamily="34" charset="0"/>
-                <a:ea typeface="Arial" pitchFamily="34" charset="-122"/>
-                <a:cs typeface="Arial" pitchFamily="34" charset="-120"/>
-              </a:rPr>
-              <a:t>(Cited as paraphrase to satisfy Middle-band citation rule; the verse cluster is SB 3.26.40–51 covered in Module 2.)</a:t>
-            </a:r>
-            <a:endParaRPr lang="en-US" sz="1200" dirty="0"/>
-          </a:p>
-        </p:txBody>
-      </p:sp>
-      <p:sp>
-        <p:nvSpPr>
-          <p:cNvPr id="11" name="Text 9"/>
-          <p:cNvSpPr/>
-          <p:nvPr/>
-        </p:nvSpPr>
-        <p:spPr>
-          <a:xfrm>
-            <a:off x="634901" y="5090964"/>
-            <a:ext cx="8102798" cy="487561"/>
-          </a:xfrm>
-          <a:prstGeom prst="rect">
-            <a:avLst/>
-          </a:prstGeom>
-          <a:noFill/>
-          <a:ln/>
-        </p:spPr>
-        <p:txBody>
-          <a:bodyPr wrap="square" lIns="0" tIns="0" rIns="0" bIns="0" rtlCol="0" anchor="t"/>
-          <a:lstStyle/>
-          <a:p>
-            <a:pPr algn="l" marL="342900" indent="-342900">
-              <a:lnSpc>
-                <a:spcPts val="1620"/>
-              </a:lnSpc>
-              <a:spcAft>
-                <a:spcPts val="300"/>
-              </a:spcAft>
-              <a:buSzPct val="100000"/>
-              <a:buChar char="•"/>
-            </a:pPr>
-            <a:r>
-              <a:rPr lang="en-US" sz="1200" b="1" dirty="0">
-                <a:solidFill>
-                  <a:srgbClr val="1C2833"/>
-                </a:solidFill>
-                <a:latin typeface="Arial" pitchFamily="34" charset="0"/>
-                <a:ea typeface="Arial" pitchFamily="34" charset="-122"/>
-                <a:cs typeface="Arial" pitchFamily="34" charset="-120"/>
-              </a:rPr>
-              <a:t>The "give back" idea.</a:t>
-            </a:r>
-            <a:pPr algn="l" indent="0" marL="0">
-              <a:lnSpc>
-                <a:spcPts val="1620"/>
-              </a:lnSpc>
-              <a:spcAft>
-                <a:spcPts val="300"/>
-              </a:spcAft>
-              <a:buNone/>
-            </a:pPr>
-            <a:r>
-              <a:rPr lang="en-US" sz="1200" dirty="0">
-                <a:solidFill>
-                  <a:srgbClr val="1C2833"/>
-                </a:solidFill>
-                <a:latin typeface="Arial" pitchFamily="34" charset="0"/>
-                <a:ea typeface="Arial" pitchFamily="34" charset="-122"/>
-                <a:cs typeface="Arial" pitchFamily="34" charset="-120"/>
-              </a:rPr>
-              <a:t> </a:t>
-            </a:r>
-            <a:pPr algn="l" indent="0" marL="0">
-              <a:lnSpc>
-                <a:spcPts val="1620"/>
-              </a:lnSpc>
-              <a:spcAft>
-                <a:spcPts val="300"/>
-              </a:spcAft>
-              <a:buNone/>
-            </a:pPr>
-            <a:r>
-              <a:rPr lang="en-US" sz="1200" i="1" dirty="0">
-                <a:solidFill>
-                  <a:srgbClr val="1C2833"/>
-                </a:solidFill>
-                <a:latin typeface="Arial" pitchFamily="34" charset="0"/>
-                <a:ea typeface="Arial" pitchFamily="34" charset="-122"/>
-                <a:cs typeface="Arial" pitchFamily="34" charset="-120"/>
-              </a:rPr>
-              <a:t>"What does a family member do for another? They give, they take, and they don't pollute each other's spaces. We'll come back to this on Day 5 when we read the Bhagavad Gītā on the</a:t>
-            </a:r>
-            <a:pPr algn="l" indent="0" marL="0">
-              <a:lnSpc>
-                <a:spcPts val="1620"/>
-              </a:lnSpc>
-              <a:spcAft>
-                <a:spcPts val="300"/>
-              </a:spcAft>
-              <a:buNone/>
-            </a:pPr>
-            <a:r>
-              <a:rPr lang="en-US" sz="1200" dirty="0">
-                <a:solidFill>
-                  <a:srgbClr val="1C2833"/>
-                </a:solidFill>
-                <a:latin typeface="Arial" pitchFamily="34" charset="0"/>
-                <a:ea typeface="Arial" pitchFamily="34" charset="-122"/>
-                <a:cs typeface="Arial" pitchFamily="34" charset="-120"/>
-              </a:rPr>
-              <a:t>yajña</a:t>
-            </a:r>
-            <a:pPr algn="l" indent="0" marL="0">
-              <a:lnSpc>
-                <a:spcPts val="1620"/>
-              </a:lnSpc>
-              <a:spcAft>
-                <a:spcPts val="300"/>
-              </a:spcAft>
-              <a:buNone/>
-            </a:pPr>
-            <a:r>
-              <a:rPr lang="en-US" sz="1200" i="1" dirty="0">
-                <a:solidFill>
-                  <a:srgbClr val="1C2833"/>
-                </a:solidFill>
-                <a:latin typeface="Arial" pitchFamily="34" charset="0"/>
-                <a:ea typeface="Arial" pitchFamily="34" charset="-122"/>
-                <a:cs typeface="Arial" pitchFamily="34" charset="-120"/>
-              </a:rPr>
-              <a:t> cycle."</a:t>
-            </a:r>
-            <a:endParaRPr lang="en-US" sz="1200" dirty="0"/>
-          </a:p>
-        </p:txBody>
-      </p:sp>
-      <p:sp>
-        <p:nvSpPr>
-          <p:cNvPr id="12" name="Text 10"/>
-          <p:cNvSpPr/>
-          <p:nvPr/>
-        </p:nvSpPr>
-        <p:spPr>
-          <a:xfrm>
-            <a:off x="406301" y="5743575"/>
+            <a:off x="406301" y="4434929"/>
             <a:ext cx="8498026" cy="213271"/>
           </a:xfrm>
           <a:prstGeom prst="rect">
@@ -5837,7 +7955,7 @@
                 <a:ea typeface="Georgia" pitchFamily="34" charset="-122"/>
                 <a:cs typeface="Georgia" pitchFamily="34" charset="-120"/>
               </a:rPr>
-              <a:t>Activity (15 min) — Element-as-family poster</a:t>
+              <a:t>Warm-up (5 min)</a:t>
             </a:r>
             <a:endParaRPr lang="en-US" sz="1800" dirty="0"/>
           </a:p>
@@ -5851,8 +7969,8 @@
         </p:nvSpPr>
         <p:spPr>
           <a:xfrm>
-            <a:off x="406301" y="870942"/>
-            <a:ext cx="8498026" cy="1066354"/>
+            <a:off x="634901" y="883593"/>
+            <a:ext cx="8102798" cy="525661"/>
           </a:xfrm>
           <a:prstGeom prst="rect">
             <a:avLst/>
@@ -5864,17 +7982,15 @@
           <a:bodyPr wrap="square" lIns="0" tIns="0" rIns="0" bIns="0" rtlCol="0" anchor="t"/>
           <a:lstStyle/>
           <a:p>
-            <a:pPr algn="l" indent="0" marL="0">
-              <a:lnSpc>
-                <a:spcPts val="1680"/>
-              </a:lnSpc>
-              <a:spcBef>
-                <a:spcPts val="300"/>
-              </a:spcBef>
-              <a:spcAft>
-                <a:spcPts val="300"/>
-              </a:spcAft>
-              <a:buNone/>
+            <a:pPr algn="l" marL="342900" indent="-342900">
+              <a:lnSpc>
+                <a:spcPts val="1620"/>
+              </a:lnSpc>
+              <a:spcAft>
+                <a:spcPts val="300"/>
+              </a:spcAft>
+              <a:buSzPct val="100000"/>
+              <a:buChar char="•"/>
             </a:pPr>
             <a:r>
               <a:rPr lang="en-US" sz="1200" dirty="0">
@@ -5885,42 +8001,20 @@
                 <a:ea typeface="Arial" pitchFamily="34" charset="-122"/>
                 <a:cs typeface="Arial" pitchFamily="34" charset="-120"/>
               </a:rPr>
-              <a:t>– Group of 4. Each group gets one element-poster. – They fill in: - </a:t>
-            </a:r>
-            <a:pPr algn="l" indent="0" marL="0">
-              <a:lnSpc>
-                <a:spcPts val="1680"/>
-              </a:lnSpc>
-              <a:spcBef>
-                <a:spcPts val="300"/>
-              </a:spcBef>
-              <a:spcAft>
-                <a:spcPts val="300"/>
-              </a:spcAft>
-              <a:buNone/>
-            </a:pPr>
-            <a:r>
-              <a:rPr lang="en-US" sz="1200" b="1" dirty="0">
-                <a:solidFill>
-                  <a:srgbClr val="1C2833"/>
-                </a:solidFill>
-                <a:latin typeface="Arial" pitchFamily="34" charset="0"/>
-                <a:ea typeface="Arial" pitchFamily="34" charset="-122"/>
-                <a:cs typeface="Arial" pitchFamily="34" charset="-120"/>
-              </a:rPr>
-              <a:t>One concrete way this element gives to us, near our school.</a:t>
-            </a:r>
-            <a:pPr algn="l" indent="0" marL="0">
-              <a:lnSpc>
-                <a:spcPts val="1680"/>
-              </a:lnSpc>
-              <a:spcBef>
-                <a:spcPts val="300"/>
-              </a:spcBef>
-              <a:spcAft>
-                <a:spcPts val="300"/>
-              </a:spcAft>
-              <a:buNone/>
+              <a:t>Read 3–4 anonymous exit slips from yesterday — students' "extended family" examples.</a:t>
+            </a:r>
+            <a:endParaRPr lang="en-US" sz="1200" dirty="0"/>
+          </a:p>
+          <a:p>
+            <a:pPr algn="l" marL="342900" indent="-342900">
+              <a:lnSpc>
+                <a:spcPts val="1620"/>
+              </a:lnSpc>
+              <a:spcAft>
+                <a:spcPts val="300"/>
+              </a:spcAft>
+              <a:buSzPct val="100000"/>
+              <a:buChar char="•"/>
             </a:pPr>
             <a:r>
               <a:rPr lang="en-US" sz="1200" dirty="0">
@@ -5931,15 +8025,12 @@
                 <a:ea typeface="Arial" pitchFamily="34" charset="-122"/>
                 <a:cs typeface="Arial" pitchFamily="34" charset="-120"/>
               </a:rPr>
-              <a:t> (E.g. </a:t>
-            </a:r>
-            <a:pPr algn="l" indent="0" marL="0">
-              <a:lnSpc>
-                <a:spcPts val="1680"/>
-              </a:lnSpc>
-              <a:spcBef>
-                <a:spcPts val="300"/>
-              </a:spcBef>
+              <a:t>Quick chorus: </a:t>
+            </a:r>
+            <a:pPr algn="l" indent="0" marL="0">
+              <a:lnSpc>
+                <a:spcPts val="1620"/>
+              </a:lnSpc>
               <a:spcAft>
                 <a:spcPts val="300"/>
               </a:spcAft>
@@ -5954,15 +8045,12 @@
                 <a:ea typeface="Arial" pitchFamily="34" charset="-122"/>
                 <a:cs typeface="Arial" pitchFamily="34" charset="-120"/>
               </a:rPr>
-              <a:t>vāyu</a:t>
-            </a:r>
-            <a:pPr algn="l" indent="0" marL="0">
-              <a:lnSpc>
-                <a:spcPts val="1680"/>
-              </a:lnSpc>
-              <a:spcBef>
-                <a:spcPts val="300"/>
-              </a:spcBef>
+              <a:t>"What were the five elements from Module 2?"</a:t>
+            </a:r>
+            <a:pPr algn="l" indent="0" marL="0">
+              <a:lnSpc>
+                <a:spcPts val="1620"/>
+              </a:lnSpc>
               <a:spcAft>
                 <a:spcPts val="300"/>
               </a:spcAft>
@@ -5977,191 +8065,7 @@
                 <a:ea typeface="Arial" pitchFamily="34" charset="-122"/>
                 <a:cs typeface="Arial" pitchFamily="34" charset="-120"/>
               </a:rPr>
-              <a:t>: the breeze through the open windows.) - </a:t>
-            </a:r>
-            <a:pPr algn="l" indent="0" marL="0">
-              <a:lnSpc>
-                <a:spcPts val="1680"/>
-              </a:lnSpc>
-              <a:spcBef>
-                <a:spcPts val="300"/>
-              </a:spcBef>
-              <a:spcAft>
-                <a:spcPts val="300"/>
-              </a:spcAft>
-              <a:buNone/>
-            </a:pPr>
-            <a:r>
-              <a:rPr lang="en-US" sz="1200" b="1" dirty="0">
-                <a:solidFill>
-                  <a:srgbClr val="1C2833"/>
-                </a:solidFill>
-                <a:latin typeface="Arial" pitchFamily="34" charset="0"/>
-                <a:ea typeface="Arial" pitchFamily="34" charset="-122"/>
-                <a:cs typeface="Arial" pitchFamily="34" charset="-120"/>
-              </a:rPr>
-              <a:t>One concrete way we take from this element, near our school.</a:t>
-            </a:r>
-            <a:pPr algn="l" indent="0" marL="0">
-              <a:lnSpc>
-                <a:spcPts val="1680"/>
-              </a:lnSpc>
-              <a:spcBef>
-                <a:spcPts val="300"/>
-              </a:spcBef>
-              <a:spcAft>
-                <a:spcPts val="300"/>
-              </a:spcAft>
-              <a:buNone/>
-            </a:pPr>
-            <a:r>
-              <a:rPr lang="en-US" sz="1200" dirty="0">
-                <a:solidFill>
-                  <a:srgbClr val="1C2833"/>
-                </a:solidFill>
-                <a:latin typeface="Arial" pitchFamily="34" charset="0"/>
-                <a:ea typeface="Arial" pitchFamily="34" charset="-122"/>
-                <a:cs typeface="Arial" pitchFamily="34" charset="-120"/>
-              </a:rPr>
-              <a:t> (E.g. </a:t>
-            </a:r>
-            <a:pPr algn="l" indent="0" marL="0">
-              <a:lnSpc>
-                <a:spcPts val="1680"/>
-              </a:lnSpc>
-              <a:spcBef>
-                <a:spcPts val="300"/>
-              </a:spcBef>
-              <a:spcAft>
-                <a:spcPts val="300"/>
-              </a:spcAft>
-              <a:buNone/>
-            </a:pPr>
-            <a:r>
-              <a:rPr lang="en-US" sz="1200" i="1" dirty="0">
-                <a:solidFill>
-                  <a:srgbClr val="1C2833"/>
-                </a:solidFill>
-                <a:latin typeface="Arial" pitchFamily="34" charset="0"/>
-                <a:ea typeface="Arial" pitchFamily="34" charset="-122"/>
-                <a:cs typeface="Arial" pitchFamily="34" charset="-120"/>
-              </a:rPr>
-              <a:t>vāyu</a:t>
-            </a:r>
-            <a:pPr algn="l" indent="0" marL="0">
-              <a:lnSpc>
-                <a:spcPts val="1680"/>
-              </a:lnSpc>
-              <a:spcBef>
-                <a:spcPts val="300"/>
-              </a:spcBef>
-              <a:spcAft>
-                <a:spcPts val="300"/>
-              </a:spcAft>
-              <a:buNone/>
-            </a:pPr>
-            <a:r>
-              <a:rPr lang="en-US" sz="1200" dirty="0">
-                <a:solidFill>
-                  <a:srgbClr val="1C2833"/>
-                </a:solidFill>
-                <a:latin typeface="Arial" pitchFamily="34" charset="0"/>
-                <a:ea typeface="Arial" pitchFamily="34" charset="-122"/>
-                <a:cs typeface="Arial" pitchFamily="34" charset="-120"/>
-              </a:rPr>
-              <a:t>: the parents' cars idling outside the gate.) - </a:t>
-            </a:r>
-            <a:pPr algn="l" indent="0" marL="0">
-              <a:lnSpc>
-                <a:spcPts val="1680"/>
-              </a:lnSpc>
-              <a:spcBef>
-                <a:spcPts val="300"/>
-              </a:spcBef>
-              <a:spcAft>
-                <a:spcPts val="300"/>
-              </a:spcAft>
-              <a:buNone/>
-            </a:pPr>
-            <a:r>
-              <a:rPr lang="en-US" sz="1200" b="1" dirty="0">
-                <a:solidFill>
-                  <a:srgbClr val="1C2833"/>
-                </a:solidFill>
-                <a:latin typeface="Arial" pitchFamily="34" charset="0"/>
-                <a:ea typeface="Arial" pitchFamily="34" charset="-122"/>
-                <a:cs typeface="Arial" pitchFamily="34" charset="-120"/>
-              </a:rPr>
-              <a:t>One concrete way to give back to this element, near our school.</a:t>
-            </a:r>
-            <a:pPr algn="l" indent="0" marL="0">
-              <a:lnSpc>
-                <a:spcPts val="1680"/>
-              </a:lnSpc>
-              <a:spcBef>
-                <a:spcPts val="300"/>
-              </a:spcBef>
-              <a:spcAft>
-                <a:spcPts val="300"/>
-              </a:spcAft>
-              <a:buNone/>
-            </a:pPr>
-            <a:r>
-              <a:rPr lang="en-US" sz="1200" dirty="0">
-                <a:solidFill>
-                  <a:srgbClr val="1C2833"/>
-                </a:solidFill>
-                <a:latin typeface="Arial" pitchFamily="34" charset="0"/>
-                <a:ea typeface="Arial" pitchFamily="34" charset="-122"/>
-                <a:cs typeface="Arial" pitchFamily="34" charset="-120"/>
-              </a:rPr>
-              <a:t> (E.g. </a:t>
-            </a:r>
-            <a:pPr algn="l" indent="0" marL="0">
-              <a:lnSpc>
-                <a:spcPts val="1680"/>
-              </a:lnSpc>
-              <a:spcBef>
-                <a:spcPts val="300"/>
-              </a:spcBef>
-              <a:spcAft>
-                <a:spcPts val="300"/>
-              </a:spcAft>
-              <a:buNone/>
-            </a:pPr>
-            <a:r>
-              <a:rPr lang="en-US" sz="1200" i="1" dirty="0">
-                <a:solidFill>
-                  <a:srgbClr val="1C2833"/>
-                </a:solidFill>
-                <a:latin typeface="Arial" pitchFamily="34" charset="0"/>
-                <a:ea typeface="Arial" pitchFamily="34" charset="-122"/>
-                <a:cs typeface="Arial" pitchFamily="34" charset="-120"/>
-              </a:rPr>
-              <a:t>vāyu</a:t>
-            </a:r>
-            <a:pPr algn="l" indent="0" marL="0">
-              <a:lnSpc>
-                <a:spcPts val="1680"/>
-              </a:lnSpc>
-              <a:spcBef>
-                <a:spcPts val="300"/>
-              </a:spcBef>
-              <a:spcAft>
-                <a:spcPts val="300"/>
-              </a:spcAft>
-              <a:buNone/>
-            </a:pPr>
-            <a:r>
-              <a:rPr lang="en-US" sz="1200" dirty="0">
-                <a:solidFill>
-                  <a:srgbClr val="1C2833"/>
-                </a:solidFill>
-                <a:latin typeface="Arial" pitchFamily="34" charset="0"/>
-                <a:ea typeface="Arial" pitchFamily="34" charset="-122"/>
-                <a:cs typeface="Arial" pitchFamily="34" charset="-120"/>
-              </a:rPr>
-              <a:t>: ask parents to switch off engines during pick-up.) – Posters go up on the wall. They stay up for the rest of the module.</a:t>
+              <a:t> — class names them in order.</a:t>
             </a:r>
             <a:endParaRPr lang="en-US" sz="1200" dirty="0"/>
           </a:p>
@@ -6319,7 +8223,7 @@
                 <a:ea typeface="Georgia" pitchFamily="34" charset="-122"/>
                 <a:cs typeface="Georgia" pitchFamily="34" charset="-120"/>
               </a:rPr>
-              <a:t>Wrap-up (5 min)</a:t>
+              <a:t>Core (20 min)</a:t>
             </a:r>
             <a:endParaRPr lang="en-US" sz="1800" dirty="0"/>
           </a:p>
@@ -6334,7 +8238,7 @@
         <p:spPr>
           <a:xfrm>
             <a:off x="634901" y="883593"/>
-            <a:ext cx="8102798" cy="487561"/>
+            <a:ext cx="8102798" cy="281880"/>
           </a:xfrm>
           <a:prstGeom prst="rect">
             <a:avLst/>
@@ -6365,47 +8269,7 @@
                 <a:ea typeface="Arial" pitchFamily="34" charset="-122"/>
                 <a:cs typeface="Arial" pitchFamily="34" charset="-120"/>
               </a:rPr>
-              <a:t>Exit ticket.</a:t>
-            </a:r>
-            <a:pPr algn="l" indent="0" marL="0">
-              <a:lnSpc>
-                <a:spcPts val="1620"/>
-              </a:lnSpc>
-              <a:spcAft>
-                <a:spcPts val="300"/>
-              </a:spcAft>
-              <a:buNone/>
-            </a:pPr>
-            <a:r>
-              <a:rPr lang="en-US" sz="1200" dirty="0">
-                <a:solidFill>
-                  <a:srgbClr val="1C2833"/>
-                </a:solidFill>
-                <a:latin typeface="Arial" pitchFamily="34" charset="0"/>
-                <a:ea typeface="Arial" pitchFamily="34" charset="-122"/>
-                <a:cs typeface="Arial" pitchFamily="34" charset="-120"/>
-              </a:rPr>
-              <a:t> Each student writes on a slip: </a:t>
-            </a:r>
-            <a:pPr algn="l" indent="0" marL="0">
-              <a:lnSpc>
-                <a:spcPts val="1620"/>
-              </a:lnSpc>
-              <a:spcAft>
-                <a:spcPts val="300"/>
-              </a:spcAft>
-              <a:buNone/>
-            </a:pPr>
-            <a:r>
-              <a:rPr lang="en-US" sz="1200" i="1" dirty="0">
-                <a:solidFill>
-                  <a:srgbClr val="1C2833"/>
-                </a:solidFill>
-                <a:latin typeface="Arial" pitchFamily="34" charset="0"/>
-                <a:ea typeface="Arial" pitchFamily="34" charset="-122"/>
-                <a:cs typeface="Arial" pitchFamily="34" charset="-120"/>
-              </a:rPr>
-              <a:t>"The element I will pay closest attention to this week is _______, because _______."</a:t>
+              <a:t>Re-draw the five-element chart on the board:</a:t>
             </a:r>
             <a:endParaRPr lang="en-US" sz="1200" dirty="0"/>
           </a:p>
@@ -6419,8 +8283,8 @@
         </p:nvSpPr>
         <p:spPr>
           <a:xfrm>
-            <a:off x="406301" y="1460004"/>
-            <a:ext cx="8498026" cy="426541"/>
+            <a:off x="406301" y="1254323"/>
+            <a:ext cx="8498026" cy="213271"/>
           </a:xfrm>
           <a:prstGeom prst="rect">
             <a:avLst/>
@@ -6445,29 +8309,6 @@
               <a:buNone/>
             </a:pPr>
             <a:r>
-              <a:rPr lang="en-US" sz="1200" dirty="0">
-                <a:solidFill>
-                  <a:srgbClr val="1C2833"/>
-                </a:solidFill>
-                <a:latin typeface="Arial" pitchFamily="34" charset="0"/>
-                <a:ea typeface="Arial" pitchFamily="34" charset="-122"/>
-                <a:cs typeface="Arial" pitchFamily="34" charset="-120"/>
-              </a:rPr>
-              <a:t>– Preview Day 3: </a:t>
-            </a:r>
-            <a:pPr algn="l" indent="0" marL="0">
-              <a:lnSpc>
-                <a:spcPts val="1680"/>
-              </a:lnSpc>
-              <a:spcBef>
-                <a:spcPts val="300"/>
-              </a:spcBef>
-              <a:spcAft>
-                <a:spcPts val="300"/>
-              </a:spcAft>
-              <a:buNone/>
-            </a:pPr>
-            <a:r>
               <a:rPr lang="en-US" sz="1200" i="1" dirty="0">
                 <a:solidFill>
                   <a:srgbClr val="1C2833"/>
@@ -6476,7 +8317,7 @@
                 <a:ea typeface="Arial" pitchFamily="34" charset="-122"/>
                 <a:cs typeface="Arial" pitchFamily="34" charset="-120"/>
               </a:rPr>
-              <a:t>"Tomorrow we look at the element that has had the most religious attention in India — water, especially rivers."</a:t>
+              <a:t>Each row: Element · English · One thing it does for us · One way we pollute it.</a:t>
             </a:r>
             <a:endParaRPr lang="en-US" sz="1200" dirty="0"/>
           </a:p>
@@ -6634,7 +8475,7 @@
                 <a:ea typeface="Georgia" pitchFamily="34" charset="-122"/>
                 <a:cs typeface="Georgia" pitchFamily="34" charset="-120"/>
               </a:rPr>
-              <a:t>Student-facing content</a:t>
+              <a:t>Core (20 min) (cont.)</a:t>
             </a:r>
             <a:endParaRPr lang="en-US" sz="1800" dirty="0"/>
           </a:p>
@@ -6648,61 +8489,8 @@
         </p:nvSpPr>
         <p:spPr>
           <a:xfrm>
-            <a:off x="406301" y="883593"/>
-            <a:ext cx="8331398" cy="2305050"/>
-          </a:xfrm>
-          <a:prstGeom prst="rect">
-            <a:avLst/>
-          </a:prstGeom>
-          <a:solidFill>
-            <a:srgbClr val="F4F8F9"/>
-          </a:solidFill>
-          <a:ln/>
-        </p:spPr>
-        <p:txBody>
-          <a:bodyPr wrap="square" rtlCol="0" anchor="ctr"/>
-          <a:lstStyle/>
-          <a:p>
-            <a:pPr indent="0" marL="0">
-              <a:buNone/>
-            </a:pPr>
-            <a:endParaRPr lang="en-US" dirty="0"/>
-          </a:p>
-        </p:txBody>
-      </p:sp>
-      <p:sp>
-        <p:nvSpPr>
-          <p:cNvPr id="5" name="Shape 3"/>
-          <p:cNvSpPr/>
-          <p:nvPr/>
-        </p:nvSpPr>
-        <p:spPr>
-          <a:xfrm>
-            <a:off x="434876" y="883593"/>
-            <a:ext cx="0" cy="2305050"/>
-          </a:xfrm>
-          <a:prstGeom prst="line">
-            <a:avLst/>
-          </a:prstGeom>
-          <a:noFill/>
-          <a:ln w="57150">
-            <a:solidFill>
-              <a:srgbClr val="FE4447"/>
-            </a:solidFill>
-            <a:prstDash val="solid"/>
-          </a:ln>
-        </p:spPr>
-      </p:sp>
-      <p:sp>
-        <p:nvSpPr>
-          <p:cNvPr id="6" name="Text 4"/>
-          <p:cNvSpPr/>
-          <p:nvPr/>
-        </p:nvSpPr>
-        <p:spPr>
-          <a:xfrm>
-            <a:off x="692051" y="1074093"/>
-            <a:ext cx="7973389" cy="230981"/>
+            <a:off x="634901" y="883593"/>
+            <a:ext cx="8102798" cy="1257002"/>
           </a:xfrm>
           <a:prstGeom prst="rect">
             <a:avLst/>
@@ -6714,408 +8502,230 @@
           <a:bodyPr wrap="square" lIns="0" tIns="0" rIns="0" bIns="0" rtlCol="0" anchor="t"/>
           <a:lstStyle/>
           <a:p>
-            <a:pPr algn="l" indent="0" marL="0">
-              <a:lnSpc>
-                <a:spcPts val="1820"/>
-              </a:lnSpc>
-              <a:spcBef>
-                <a:spcPts val="300"/>
-              </a:spcBef>
-              <a:spcAft>
-                <a:spcPts val="300"/>
-              </a:spcAft>
-              <a:buNone/>
-            </a:pPr>
-            <a:r>
-              <a:rPr lang="en-US" sz="1300" b="1" i="1" dirty="0">
-                <a:solidFill>
-                  <a:srgbClr val="1C2833"/>
-                </a:solidFill>
-                <a:latin typeface="Georgia" pitchFamily="34" charset="0"/>
-                <a:ea typeface="Georgia" pitchFamily="34" charset="-122"/>
-                <a:cs typeface="Georgia" pitchFamily="34" charset="-120"/>
-              </a:rPr>
-              <a:t>The five elements as family members.</a:t>
-            </a:r>
-            <a:endParaRPr lang="en-US" sz="1300" dirty="0"/>
-          </a:p>
-        </p:txBody>
-      </p:sp>
-      <p:sp>
-        <p:nvSpPr>
-          <p:cNvPr id="7" name="Text 5"/>
-          <p:cNvSpPr/>
-          <p:nvPr/>
-        </p:nvSpPr>
-        <p:spPr>
-          <a:xfrm>
-            <a:off x="692051" y="1343174"/>
-            <a:ext cx="7973389" cy="1154906"/>
-          </a:xfrm>
-          <a:prstGeom prst="rect">
-            <a:avLst/>
-          </a:prstGeom>
-          <a:noFill/>
-          <a:ln/>
-        </p:spPr>
-        <p:txBody>
-          <a:bodyPr wrap="square" lIns="0" tIns="0" rIns="0" bIns="0" rtlCol="0" anchor="t"/>
-          <a:lstStyle/>
-          <a:p>
-            <a:pPr algn="l" indent="0" marL="0">
-              <a:lnSpc>
-                <a:spcPts val="1820"/>
-              </a:lnSpc>
-              <a:spcBef>
-                <a:spcPts val="300"/>
-              </a:spcBef>
-              <a:spcAft>
-                <a:spcPts val="300"/>
-              </a:spcAft>
-              <a:buNone/>
-            </a:pPr>
-            <a:r>
-              <a:rPr lang="en-US" sz="1300" dirty="0">
-                <a:solidFill>
-                  <a:srgbClr val="1C2833"/>
-                </a:solidFill>
-                <a:latin typeface="Georgia" pitchFamily="34" charset="0"/>
-                <a:ea typeface="Georgia" pitchFamily="34" charset="-122"/>
-                <a:cs typeface="Georgia" pitchFamily="34" charset="-120"/>
-              </a:rPr>
-              <a:t>| Element | Gives us | We owe it | |---------|----------|-----------| | </a:t>
-            </a:r>
-            <a:pPr algn="l" indent="0" marL="0">
-              <a:lnSpc>
-                <a:spcPts val="1820"/>
-              </a:lnSpc>
-              <a:spcBef>
-                <a:spcPts val="300"/>
-              </a:spcBef>
-              <a:spcAft>
-                <a:spcPts val="300"/>
-              </a:spcAft>
-              <a:buNone/>
-            </a:pPr>
-            <a:r>
-              <a:rPr lang="en-US" sz="1300" i="1" dirty="0">
-                <a:solidFill>
-                  <a:srgbClr val="1C2833"/>
-                </a:solidFill>
-                <a:latin typeface="Georgia" pitchFamily="34" charset="0"/>
-                <a:ea typeface="Georgia" pitchFamily="34" charset="-122"/>
-                <a:cs typeface="Georgia" pitchFamily="34" charset="-120"/>
+            <a:pPr algn="l" marL="342900" indent="-342900">
+              <a:lnSpc>
+                <a:spcPts val="1620"/>
+              </a:lnSpc>
+              <a:spcAft>
+                <a:spcPts val="300"/>
+              </a:spcAft>
+              <a:buSzPct val="100000"/>
+              <a:buChar char="•"/>
+            </a:pPr>
+            <a:r>
+              <a:rPr lang="en-US" sz="1200" i="1" dirty="0">
+                <a:solidFill>
+                  <a:srgbClr val="1C2833"/>
+                </a:solidFill>
+                <a:latin typeface="Arial" pitchFamily="34" charset="0"/>
+                <a:ea typeface="Arial" pitchFamily="34" charset="-122"/>
+                <a:cs typeface="Arial" pitchFamily="34" charset="-120"/>
               </a:rPr>
               <a:t>pṛthvī</a:t>
             </a:r>
             <a:pPr algn="l" indent="0" marL="0">
               <a:lnSpc>
-                <a:spcPts val="1820"/>
-              </a:lnSpc>
-              <a:spcBef>
-                <a:spcPts val="300"/>
-              </a:spcBef>
-              <a:spcAft>
-                <a:spcPts val="300"/>
-              </a:spcAft>
-              <a:buNone/>
-            </a:pPr>
-            <a:r>
-              <a:rPr lang="en-US" sz="1300" dirty="0">
-                <a:solidFill>
-                  <a:srgbClr val="1C2833"/>
-                </a:solidFill>
-                <a:latin typeface="Georgia" pitchFamily="34" charset="0"/>
-                <a:ea typeface="Georgia" pitchFamily="34" charset="-122"/>
-                <a:cs typeface="Georgia" pitchFamily="34" charset="-120"/>
-              </a:rPr>
-              <a:t> (earth) | Food, ground, minerals | Less waste, less concrete, more compost | | </a:t>
-            </a:r>
-            <a:pPr algn="l" indent="0" marL="0">
-              <a:lnSpc>
-                <a:spcPts val="1820"/>
-              </a:lnSpc>
-              <a:spcBef>
-                <a:spcPts val="300"/>
-              </a:spcBef>
-              <a:spcAft>
-                <a:spcPts val="300"/>
-              </a:spcAft>
-              <a:buNone/>
-            </a:pPr>
-            <a:r>
-              <a:rPr lang="en-US" sz="1300" i="1" dirty="0">
-                <a:solidFill>
-                  <a:srgbClr val="1C2833"/>
-                </a:solidFill>
-                <a:latin typeface="Georgia" pitchFamily="34" charset="0"/>
-                <a:ea typeface="Georgia" pitchFamily="34" charset="-122"/>
-                <a:cs typeface="Georgia" pitchFamily="34" charset="-120"/>
+                <a:spcPts val="1620"/>
+              </a:lnSpc>
+              <a:spcAft>
+                <a:spcPts val="300"/>
+              </a:spcAft>
+              <a:buNone/>
+            </a:pPr>
+            <a:r>
+              <a:rPr lang="en-US" sz="1200" dirty="0">
+                <a:solidFill>
+                  <a:srgbClr val="1C2833"/>
+                </a:solidFill>
+                <a:latin typeface="Arial" pitchFamily="34" charset="0"/>
+                <a:ea typeface="Arial" pitchFamily="34" charset="-122"/>
+                <a:cs typeface="Arial" pitchFamily="34" charset="-120"/>
+              </a:rPr>
+              <a:t> — earth / solid · Soil for food, ground to stand on · Plastic waste, chemical fertiliser</a:t>
+            </a:r>
+            <a:endParaRPr lang="en-US" sz="1200" dirty="0"/>
+          </a:p>
+          <a:p>
+            <a:pPr algn="l" marL="342900" indent="-342900">
+              <a:lnSpc>
+                <a:spcPts val="1620"/>
+              </a:lnSpc>
+              <a:spcAft>
+                <a:spcPts val="300"/>
+              </a:spcAft>
+              <a:buSzPct val="100000"/>
+              <a:buChar char="•"/>
+            </a:pPr>
+            <a:r>
+              <a:rPr lang="en-US" sz="1200" i="1" dirty="0">
+                <a:solidFill>
+                  <a:srgbClr val="1C2833"/>
+                </a:solidFill>
+                <a:latin typeface="Arial" pitchFamily="34" charset="0"/>
+                <a:ea typeface="Arial" pitchFamily="34" charset="-122"/>
+                <a:cs typeface="Arial" pitchFamily="34" charset="-120"/>
               </a:rPr>
               <a:t>ap</a:t>
             </a:r>
             <a:pPr algn="l" indent="0" marL="0">
               <a:lnSpc>
-                <a:spcPts val="1820"/>
-              </a:lnSpc>
-              <a:spcBef>
-                <a:spcPts val="300"/>
-              </a:spcBef>
-              <a:spcAft>
-                <a:spcPts val="300"/>
-              </a:spcAft>
-              <a:buNone/>
-            </a:pPr>
-            <a:r>
-              <a:rPr lang="en-US" sz="1300" dirty="0">
-                <a:solidFill>
-                  <a:srgbClr val="1C2833"/>
-                </a:solidFill>
-                <a:latin typeface="Georgia" pitchFamily="34" charset="0"/>
-                <a:ea typeface="Georgia" pitchFamily="34" charset="-122"/>
-                <a:cs typeface="Georgia" pitchFamily="34" charset="-120"/>
-              </a:rPr>
-              <a:t> (water) | Drink, growth, cleanness | Less waste, less pollution | | </a:t>
-            </a:r>
-            <a:pPr algn="l" indent="0" marL="0">
-              <a:lnSpc>
-                <a:spcPts val="1820"/>
-              </a:lnSpc>
-              <a:spcBef>
-                <a:spcPts val="300"/>
-              </a:spcBef>
-              <a:spcAft>
-                <a:spcPts val="300"/>
-              </a:spcAft>
-              <a:buNone/>
-            </a:pPr>
-            <a:r>
-              <a:rPr lang="en-US" sz="1300" i="1" dirty="0">
-                <a:solidFill>
-                  <a:srgbClr val="1C2833"/>
-                </a:solidFill>
-                <a:latin typeface="Georgia" pitchFamily="34" charset="0"/>
-                <a:ea typeface="Georgia" pitchFamily="34" charset="-122"/>
-                <a:cs typeface="Georgia" pitchFamily="34" charset="-120"/>
+                <a:spcPts val="1620"/>
+              </a:lnSpc>
+              <a:spcAft>
+                <a:spcPts val="300"/>
+              </a:spcAft>
+              <a:buNone/>
+            </a:pPr>
+            <a:r>
+              <a:rPr lang="en-US" sz="1200" dirty="0">
+                <a:solidFill>
+                  <a:srgbClr val="1C2833"/>
+                </a:solidFill>
+                <a:latin typeface="Arial" pitchFamily="34" charset="0"/>
+                <a:ea typeface="Arial" pitchFamily="34" charset="-122"/>
+                <a:cs typeface="Arial" pitchFamily="34" charset="-120"/>
+              </a:rPr>
+              <a:t> — water · Drink, wash, irrigate · Sewage, industrial effluent</a:t>
+            </a:r>
+            <a:endParaRPr lang="en-US" sz="1200" dirty="0"/>
+          </a:p>
+          <a:p>
+            <a:pPr algn="l" marL="342900" indent="-342900">
+              <a:lnSpc>
+                <a:spcPts val="1620"/>
+              </a:lnSpc>
+              <a:spcAft>
+                <a:spcPts val="300"/>
+              </a:spcAft>
+              <a:buSzPct val="100000"/>
+              <a:buChar char="•"/>
+            </a:pPr>
+            <a:r>
+              <a:rPr lang="en-US" sz="1200" i="1" dirty="0">
+                <a:solidFill>
+                  <a:srgbClr val="1C2833"/>
+                </a:solidFill>
+                <a:latin typeface="Arial" pitchFamily="34" charset="0"/>
+                <a:ea typeface="Arial" pitchFamily="34" charset="-122"/>
+                <a:cs typeface="Arial" pitchFamily="34" charset="-120"/>
               </a:rPr>
               <a:t>tejas</a:t>
             </a:r>
             <a:pPr algn="l" indent="0" marL="0">
               <a:lnSpc>
-                <a:spcPts val="1820"/>
-              </a:lnSpc>
-              <a:spcBef>
-                <a:spcPts val="300"/>
-              </a:spcBef>
-              <a:spcAft>
-                <a:spcPts val="300"/>
-              </a:spcAft>
-              <a:buNone/>
-            </a:pPr>
-            <a:r>
-              <a:rPr lang="en-US" sz="1300" dirty="0">
-                <a:solidFill>
-                  <a:srgbClr val="1C2833"/>
-                </a:solidFill>
-                <a:latin typeface="Georgia" pitchFamily="34" charset="0"/>
-                <a:ea typeface="Georgia" pitchFamily="34" charset="-122"/>
-                <a:cs typeface="Georgia" pitchFamily="34" charset="-120"/>
-              </a:rPr>
-              <a:t> (fire / energy) | Warmth, light, cooking | Less fossil fuel, more efficiency | | </a:t>
-            </a:r>
-            <a:pPr algn="l" indent="0" marL="0">
-              <a:lnSpc>
-                <a:spcPts val="1820"/>
-              </a:lnSpc>
-              <a:spcBef>
-                <a:spcPts val="300"/>
-              </a:spcBef>
-              <a:spcAft>
-                <a:spcPts val="300"/>
-              </a:spcAft>
-              <a:buNone/>
-            </a:pPr>
-            <a:r>
-              <a:rPr lang="en-US" sz="1300" i="1" dirty="0">
-                <a:solidFill>
-                  <a:srgbClr val="1C2833"/>
-                </a:solidFill>
-                <a:latin typeface="Georgia" pitchFamily="34" charset="0"/>
-                <a:ea typeface="Georgia" pitchFamily="34" charset="-122"/>
-                <a:cs typeface="Georgia" pitchFamily="34" charset="-120"/>
+                <a:spcPts val="1620"/>
+              </a:lnSpc>
+              <a:spcAft>
+                <a:spcPts val="300"/>
+              </a:spcAft>
+              <a:buNone/>
+            </a:pPr>
+            <a:r>
+              <a:rPr lang="en-US" sz="1200" dirty="0">
+                <a:solidFill>
+                  <a:srgbClr val="1C2833"/>
+                </a:solidFill>
+                <a:latin typeface="Arial" pitchFamily="34" charset="0"/>
+                <a:ea typeface="Arial" pitchFamily="34" charset="-122"/>
+                <a:cs typeface="Arial" pitchFamily="34" charset="-120"/>
+              </a:rPr>
+              <a:t> — fire / heat / light · Cook, warm, illuminate · Burning fossil fuels (CO₂)</a:t>
+            </a:r>
+            <a:endParaRPr lang="en-US" sz="1200" dirty="0"/>
+          </a:p>
+          <a:p>
+            <a:pPr algn="l" marL="342900" indent="-342900">
+              <a:lnSpc>
+                <a:spcPts val="1620"/>
+              </a:lnSpc>
+              <a:spcAft>
+                <a:spcPts val="300"/>
+              </a:spcAft>
+              <a:buSzPct val="100000"/>
+              <a:buChar char="•"/>
+            </a:pPr>
+            <a:r>
+              <a:rPr lang="en-US" sz="1200" i="1" dirty="0">
+                <a:solidFill>
+                  <a:srgbClr val="1C2833"/>
+                </a:solidFill>
+                <a:latin typeface="Arial" pitchFamily="34" charset="0"/>
+                <a:ea typeface="Arial" pitchFamily="34" charset="-122"/>
+                <a:cs typeface="Arial" pitchFamily="34" charset="-120"/>
               </a:rPr>
               <a:t>vāyu</a:t>
             </a:r>
             <a:pPr algn="l" indent="0" marL="0">
               <a:lnSpc>
-                <a:spcPts val="1820"/>
-              </a:lnSpc>
-              <a:spcBef>
-                <a:spcPts val="300"/>
-              </a:spcBef>
-              <a:spcAft>
-                <a:spcPts val="300"/>
-              </a:spcAft>
-              <a:buNone/>
-            </a:pPr>
-            <a:r>
-              <a:rPr lang="en-US" sz="1300" dirty="0">
-                <a:solidFill>
-                  <a:srgbClr val="1C2833"/>
-                </a:solidFill>
-                <a:latin typeface="Georgia" pitchFamily="34" charset="0"/>
-                <a:ea typeface="Georgia" pitchFamily="34" charset="-122"/>
-                <a:cs typeface="Georgia" pitchFamily="34" charset="-120"/>
-              </a:rPr>
-              <a:t> (air) | Breath, weather | Less burning, fewer engines | | </a:t>
-            </a:r>
-            <a:pPr algn="l" indent="0" marL="0">
-              <a:lnSpc>
-                <a:spcPts val="1820"/>
-              </a:lnSpc>
-              <a:spcBef>
-                <a:spcPts val="300"/>
-              </a:spcBef>
-              <a:spcAft>
-                <a:spcPts val="300"/>
-              </a:spcAft>
-              <a:buNone/>
-            </a:pPr>
-            <a:r>
-              <a:rPr lang="en-US" sz="1300" i="1" dirty="0">
-                <a:solidFill>
-                  <a:srgbClr val="1C2833"/>
-                </a:solidFill>
-                <a:latin typeface="Georgia" pitchFamily="34" charset="0"/>
-                <a:ea typeface="Georgia" pitchFamily="34" charset="-122"/>
-                <a:cs typeface="Georgia" pitchFamily="34" charset="-120"/>
+                <a:spcPts val="1620"/>
+              </a:lnSpc>
+              <a:spcAft>
+                <a:spcPts val="300"/>
+              </a:spcAft>
+              <a:buNone/>
+            </a:pPr>
+            <a:r>
+              <a:rPr lang="en-US" sz="1200" dirty="0">
+                <a:solidFill>
+                  <a:srgbClr val="1C2833"/>
+                </a:solidFill>
+                <a:latin typeface="Arial" pitchFamily="34" charset="0"/>
+                <a:ea typeface="Arial" pitchFamily="34" charset="-122"/>
+                <a:cs typeface="Arial" pitchFamily="34" charset="-120"/>
+              </a:rPr>
+              <a:t> — air · Breath, wind, weather · Vehicle exhaust, factory smoke</a:t>
+            </a:r>
+            <a:endParaRPr lang="en-US" sz="1200" dirty="0"/>
+          </a:p>
+          <a:p>
+            <a:pPr algn="l" marL="342900" indent="-342900">
+              <a:lnSpc>
+                <a:spcPts val="1620"/>
+              </a:lnSpc>
+              <a:spcAft>
+                <a:spcPts val="300"/>
+              </a:spcAft>
+              <a:buSzPct val="100000"/>
+              <a:buChar char="•"/>
+            </a:pPr>
+            <a:r>
+              <a:rPr lang="en-US" sz="1200" i="1" dirty="0">
+                <a:solidFill>
+                  <a:srgbClr val="1C2833"/>
+                </a:solidFill>
+                <a:latin typeface="Arial" pitchFamily="34" charset="0"/>
+                <a:ea typeface="Arial" pitchFamily="34" charset="-122"/>
+                <a:cs typeface="Arial" pitchFamily="34" charset="-120"/>
               </a:rPr>
               <a:t>ākāśa</a:t>
             </a:r>
             <a:pPr algn="l" indent="0" marL="0">
               <a:lnSpc>
-                <a:spcPts val="1820"/>
-              </a:lnSpc>
-              <a:spcBef>
-                <a:spcPts val="300"/>
-              </a:spcBef>
-              <a:spcAft>
-                <a:spcPts val="300"/>
-              </a:spcAft>
-              <a:buNone/>
-            </a:pPr>
-            <a:r>
-              <a:rPr lang="en-US" sz="1300" dirty="0">
-                <a:solidFill>
-                  <a:srgbClr val="1C2833"/>
-                </a:solidFill>
-                <a:latin typeface="Georgia" pitchFamily="34" charset="0"/>
-                <a:ea typeface="Georgia" pitchFamily="34" charset="-122"/>
-                <a:cs typeface="Georgia" pitchFamily="34" charset="-120"/>
-              </a:rPr>
-              <a:t> (space) | Room to live, sound to travel | Less noise, less light at night, less stuff |</a:t>
-            </a:r>
-            <a:endParaRPr lang="en-US" sz="1300" dirty="0"/>
-          </a:p>
-        </p:txBody>
-      </p:sp>
-      <p:sp>
-        <p:nvSpPr>
-          <p:cNvPr id="8" name="Text 6"/>
-          <p:cNvSpPr/>
-          <p:nvPr/>
-        </p:nvSpPr>
-        <p:spPr>
-          <a:xfrm>
-            <a:off x="692051" y="2536180"/>
-            <a:ext cx="7973389" cy="461963"/>
-          </a:xfrm>
-          <a:prstGeom prst="rect">
-            <a:avLst/>
-          </a:prstGeom>
-          <a:noFill/>
-          <a:ln/>
-        </p:spPr>
-        <p:txBody>
-          <a:bodyPr wrap="square" lIns="0" tIns="0" rIns="0" bIns="0" rtlCol="0" anchor="t"/>
-          <a:lstStyle/>
-          <a:p>
-            <a:pPr algn="l" indent="0" marL="0">
-              <a:lnSpc>
-                <a:spcPts val="1820"/>
-              </a:lnSpc>
-              <a:spcBef>
-                <a:spcPts val="300"/>
-              </a:spcBef>
-              <a:spcAft>
-                <a:spcPts val="300"/>
-              </a:spcAft>
-              <a:buNone/>
-            </a:pPr>
-            <a:r>
-              <a:rPr lang="en-US" sz="1300" dirty="0">
-                <a:solidFill>
-                  <a:srgbClr val="1C2833"/>
-                </a:solidFill>
-                <a:latin typeface="Georgia" pitchFamily="34" charset="0"/>
-                <a:ea typeface="Georgia" pitchFamily="34" charset="-122"/>
-                <a:cs typeface="Georgia" pitchFamily="34" charset="-120"/>
-              </a:rPr>
-              <a:t>The five elements are not five things "out there." They are five members of the family the verse calls </a:t>
-            </a:r>
-            <a:pPr algn="l" indent="0" marL="0">
-              <a:lnSpc>
-                <a:spcPts val="1820"/>
-              </a:lnSpc>
-              <a:spcBef>
-                <a:spcPts val="300"/>
-              </a:spcBef>
-              <a:spcAft>
-                <a:spcPts val="300"/>
-              </a:spcAft>
-              <a:buNone/>
-            </a:pPr>
-            <a:r>
-              <a:rPr lang="en-US" sz="1300" i="1" dirty="0">
-                <a:solidFill>
-                  <a:srgbClr val="1C2833"/>
-                </a:solidFill>
-                <a:latin typeface="Georgia" pitchFamily="34" charset="0"/>
-                <a:ea typeface="Georgia" pitchFamily="34" charset="-122"/>
-                <a:cs typeface="Georgia" pitchFamily="34" charset="-120"/>
-              </a:rPr>
-              <a:t>kuṭumba</a:t>
-            </a:r>
-            <a:pPr algn="l" indent="0" marL="0">
-              <a:lnSpc>
-                <a:spcPts val="1820"/>
-              </a:lnSpc>
-              <a:spcBef>
-                <a:spcPts val="300"/>
-              </a:spcBef>
-              <a:spcAft>
-                <a:spcPts val="300"/>
-              </a:spcAft>
-              <a:buNone/>
-            </a:pPr>
-            <a:r>
-              <a:rPr lang="en-US" sz="1300" dirty="0">
-                <a:solidFill>
-                  <a:srgbClr val="1C2833"/>
-                </a:solidFill>
-                <a:latin typeface="Georgia" pitchFamily="34" charset="0"/>
-                <a:ea typeface="Georgia" pitchFamily="34" charset="-122"/>
-                <a:cs typeface="Georgia" pitchFamily="34" charset="-120"/>
-              </a:rPr>
-              <a:t>.</a:t>
-            </a:r>
-            <a:endParaRPr lang="en-US" sz="1300" dirty="0"/>
-          </a:p>
-        </p:txBody>
-      </p:sp>
-      <p:sp>
-        <p:nvSpPr>
-          <p:cNvPr id="9" name="Text 7"/>
+                <a:spcPts val="1620"/>
+              </a:lnSpc>
+              <a:spcAft>
+                <a:spcPts val="300"/>
+              </a:spcAft>
+              <a:buNone/>
+            </a:pPr>
+            <a:r>
+              <a:rPr lang="en-US" sz="1200" dirty="0">
+                <a:solidFill>
+                  <a:srgbClr val="1C2833"/>
+                </a:solidFill>
+                <a:latin typeface="Arial" pitchFamily="34" charset="0"/>
+                <a:ea typeface="Arial" pitchFamily="34" charset="-122"/>
+                <a:cs typeface="Arial" pitchFamily="34" charset="-120"/>
+              </a:rPr>
+              <a:t> — space · Room to live, transmit sound · Noise, light pollution, satellite debris</a:t>
+            </a:r>
+            <a:endParaRPr lang="en-US" sz="1200" dirty="0"/>
+          </a:p>
+        </p:txBody>
+      </p:sp>
+      <p:sp>
+        <p:nvSpPr>
+          <p:cNvPr id="5" name="Text 3"/>
           <p:cNvSpPr/>
           <p:nvPr/>
         </p:nvSpPr>
